--- a/slides/deck.pptx
+++ b/slides/deck.pptx
@@ -5,7 +5,7 @@
     <p:sldMasterId id="2147483648" r:id="rId1"/>
   </p:sldMasterIdLst>
   <p:notesMasterIdLst>
-    <p:notesMasterId r:id="rId41"/>
+    <p:notesMasterId r:id="rId44"/>
   </p:notesMasterIdLst>
   <p:sldIdLst>
     <p:sldId id="256" r:id="rId2"/>
@@ -47,6 +47,9 @@
     <p:sldId id="292" r:id="rId38"/>
     <p:sldId id="293" r:id="rId39"/>
     <p:sldId id="294" r:id="rId40"/>
+    <p:sldId id="295" r:id="rId41"/>
+    <p:sldId id="296" r:id="rId42"/>
+    <p:sldId id="297" r:id="rId43"/>
   </p:sldIdLst>
   <p:sldSz cx="9144000" cy="5143500" type="screen16x9"/>
   <p:notesSz cx="6858000" cy="9144000"/>
@@ -562,7 +565,7 @@
             </a:pPr>
             <a:r>
               <a:rPr/>
-              <a:t>Restrict quantitative claims to source-backed literature, generated validation tables, and explicitly labeled model outputs. Ionic-liquid systems are context only, not the active benchmark.</a:t>
+              <a:t>Restrict quantitative claims to source-backed literature, generated validation tables, and explicitly labeled model outputs. Divalent ions are feed-context species only; the active objective is Li extraction from Na after divalent pretreatment.</a:t>
             </a:r>
           </a:p>
           <a:p>
@@ -658,7 +661,7 @@
             </a:pPr>
             <a:r>
               <a:rPr/>
-              <a:t>This slide prevents overclaiming. It answers the obvious reviewer question: yes, the new paper is useful, but it used PC-SAFT for the organic side and ePC-SAFT for the aqueous side. The case study still needs its own HBTA/TOPO parameterization.</a:t>
+              <a:t>Be careful not to oversell. This is a replacement for unsupported transfer assumptions, not a claim that ePC-SAFT solves kinetics, hydraulics, or plant economics by itself.</a:t>
             </a:r>
           </a:p>
         </p:txBody>
@@ -680,7 +683,7 @@
           <a:p>
             <a:fld id="{18BDFEC3-8487-43E8-A154-7C12CBC1FFF2}" type="slidenum">
               <a:rPr lang="en-US"/>
-              <a:t>18</a:t>
+              <a:t>17</a:t>
             </a:fld>
             <a:endParaRPr lang="en-US"/>
           </a:p>
@@ -740,7 +743,7 @@
             </a:pPr>
             <a:r>
               <a:rPr/>
-              <a:t>This ranking keeps the active benchmark conventional and non-ionic while still identifying backup solvent families.</a:t>
+              <a:t>The novelty claim is reusable insight. The model lets the project ask where the chemistry should work, why the answer changes across basins, and what variables the process model should receive. For this deck, those variables are transfer variables, not equipment performance coefficients.</a:t>
             </a:r>
           </a:p>
         </p:txBody>
@@ -762,7 +765,7 @@
           <a:p>
             <a:fld id="{18BDFEC3-8487-43E8-A154-7C12CBC1FFF2}" type="slidenum">
               <a:rPr lang="en-US"/>
-              <a:t>19</a:t>
+              <a:t>18</a:t>
             </a:fld>
             <a:endParaRPr lang="en-US"/>
           </a:p>
@@ -822,7 +825,7 @@
             </a:pPr>
             <a:r>
               <a:rPr/>
-              <a:t>This slide creates the contrast. The older result is not embarrassing; it is the baseline that proves why a better thermodynamic/chemistry architecture is needed.</a:t>
+              <a:t>This slide prevents overclaiming. The source-regressed bridge is presentation-facing; the direct published-constant thermodynamic replay remains diagnostic until the activity-reference gap is closed.</a:t>
             </a:r>
           </a:p>
         </p:txBody>
@@ -904,7 +907,7 @@
             </a:pPr>
             <a:r>
               <a:rPr/>
-              <a:t>The important contrast is selective transfer: lithium moves materially while sodium barely moves. The model is source-regressed against literature anchors and reused across feed cases, but it is still not a full organic-phase ePC-SAFT closure.</a:t>
+              <a:t>Legacy solvent-choice artifacts are retained only in the archive. The active presentation chain is Rezaee DES/TOPO after divalent pretreatment.</a:t>
             </a:r>
           </a:p>
         </p:txBody>
@@ -926,7 +929,7 @@
           <a:p>
             <a:fld id="{18BDFEC3-8487-43E8-A154-7C12CBC1FFF2}" type="slidenum">
               <a:rPr lang="en-US"/>
-              <a:t>22</a:t>
+              <a:t>21</a:t>
             </a:fld>
             <a:endParaRPr lang="en-US"/>
           </a:p>
@@ -986,7 +989,7 @@
             </a:pPr>
             <a:r>
               <a:rPr/>
-              <a:t>The near-total stage-three value is useful as a design signal, not as a final physical claim. In the costing tables it is capped to the Shan/Gando three-stage anchor.</a:t>
+              <a:t>The important contrast is selective transfer after divalent pretreatment: lithium moves more strongly than sodium, and the bridge remains explicitly source-regressed until direct Rezaee thermodynamic closure is resolved.</a:t>
             </a:r>
           </a:p>
         </p:txBody>
@@ -1008,7 +1011,7 @@
           <a:p>
             <a:fld id="{18BDFEC3-8487-43E8-A154-7C12CBC1FFF2}" type="slidenum">
               <a:rPr lang="en-US"/>
-              <a:t>25</a:t>
+              <a:t>24</a:t>
             </a:fld>
             <a:endParaRPr lang="en-US"/>
           </a:p>
@@ -1068,7 +1071,7 @@
             </a:pPr>
             <a:r>
               <a:rPr/>
-              <a:t>This is the main “novel insight” slide. The idea is not just a better lithium number. It is a more reusable way to reason from location to chemistry to process design.</a:t>
+              <a:t>The three-stage value is useful as a design signal and bridge output. It should not be presented as direct published-constant ePC-SAFT LLE closure.</a:t>
             </a:r>
           </a:p>
         </p:txBody>
@@ -1090,7 +1093,7 @@
           <a:p>
             <a:fld id="{18BDFEC3-8487-43E8-A154-7C12CBC1FFF2}" type="slidenum">
               <a:rPr lang="en-US"/>
-              <a:t>26</a:t>
+              <a:t>27</a:t>
             </a:fld>
             <a:endParaRPr lang="en-US"/>
           </a:p>
@@ -1150,7 +1153,7 @@
             </a:pPr>
             <a:r>
               <a:rPr/>
-              <a:t>This is the concrete software interface. Percent extraction is the audience-friendly number; the unit model needs compositions, phase splits, distribution ratios, selectivity, and diagnostics.</a:t>
+              <a:t>This is the main “novel insight” slide. The idea is not just a better lithium number. It is a more reusable way to reason from location to chemistry to process design.</a:t>
             </a:r>
           </a:p>
         </p:txBody>
@@ -1172,7 +1175,7 @@
           <a:p>
             <a:fld id="{18BDFEC3-8487-43E8-A154-7C12CBC1FFF2}" type="slidenum">
               <a:rPr lang="en-US"/>
-              <a:t>29</a:t>
+              <a:t>28</a:t>
             </a:fld>
             <a:endParaRPr lang="en-US"/>
           </a:p>
@@ -1232,7 +1235,7 @@
             </a:pPr>
             <a:r>
               <a:rPr/>
-              <a:t>This slide is the strongest technical anchor for implementation reviewers because it is explicit about what gets passed across process boundaries.</a:t>
+              <a:t>This is the concrete software interface. Percent extraction is the audience-friendly number; the unit model needs compositions, phase splits, distribution ratios, selectivity, and diagnostics.</a:t>
             </a:r>
           </a:p>
         </p:txBody>
@@ -1314,7 +1317,7 @@
             </a:pPr>
             <a:r>
               <a:rPr/>
-              <a:t>This is the recommended maturity ladder. Do not pitch direct coupling as the only path. The lowest-risk first step is an offline data generator that feeds a bounded surrogate.</a:t>
+              <a:t>This slide is the strongest technical anchor for implementation reviewers because it is explicit about what gets passed across process boundaries.</a:t>
             </a:r>
           </a:p>
         </p:txBody>
@@ -1336,7 +1339,7 @@
           <a:p>
             <a:fld id="{18BDFEC3-8487-43E8-A154-7C12CBC1FFF2}" type="slidenum">
               <a:rPr lang="en-US"/>
-              <a:t>32</a:t>
+              <a:t>33</a:t>
             </a:fld>
             <a:endParaRPr lang="en-US"/>
           </a:p>
@@ -1396,7 +1399,7 @@
             </a:pPr>
             <a:r>
               <a:rPr/>
-              <a:t>The assumptions are scenario placeholders, not vendor quotes.</a:t>
+              <a:t>This is the recommended maturity ladder. Do not pitch direct coupling as the only path. The lowest-risk first step is an offline data generator that feeds a bounded surrogate.</a:t>
             </a:r>
           </a:p>
         </p:txBody>
@@ -1560,7 +1563,7 @@
             </a:pPr>
             <a:r>
               <a:rPr/>
-              <a:t>This slide is the ask. It should leave no ambiguity about what you want: implement ePC-SAFT into the ecosystem so these cases can move from isolated scripts into reusable process models.</a:t>
+              <a:t>The assumptions are scenario placeholders, not vendor quotes.</a:t>
             </a:r>
           </a:p>
         </p:txBody>
@@ -1642,7 +1645,7 @@
             </a:pPr>
             <a:r>
               <a:rPr/>
-              <a:t>This gives you a transparent ending if someone asks what is already proven versus what remains. It also turns the next work into a clear roadmap rather than a vague promise.</a:t>
+              <a:t>The Rezaee clean Li/Na transfer table now drives a PrOMMiS-side IDAES/Pyomo costing block with stress, base, and favorable cases. This verifies the handoff shape and cost-accounting hooks; the calibrated surrogate will replace the scaffold response values.</a:t>
             </a:r>
           </a:p>
         </p:txBody>
@@ -1724,7 +1727,7 @@
             </a:pPr>
             <a:r>
               <a:rPr/>
-              <a:t>This backup slide is the roadmap for the next systematic screening campaign. It should be shown when someone asks how this becomes more than one case.</a:t>
+              <a:t>This slide is the ask. It should leave no ambiguity about what you want: implement ePC-SAFT into the ecosystem so these cases can move from isolated scripts into reusable process models.</a:t>
             </a:r>
           </a:p>
         </p:txBody>
@@ -1747,6 +1750,170 @@
             <a:fld id="{18BDFEC3-8487-43E8-A154-7C12CBC1FFF2}" type="slidenum">
               <a:rPr lang="en-US"/>
               <a:t>39</a:t>
+            </a:fld>
+            <a:endParaRPr lang="en-US"/>
+          </a:p>
+        </p:txBody>
+      </p:sp>
+    </p:spTree>
+  </p:cSld>
+</p:notes>
+</file>
+
+<file path=ppt/notesSlides/notesSlide23.xml><?xml version="1.0" encoding="utf-8"?>
+<p:notes xmlns:a="http://schemas.openxmlformats.org/drawingml/2006/main" xmlns:r="http://schemas.openxmlformats.org/officeDocument/2006/relationships" xmlns:p="http://schemas.openxmlformats.org/presentationml/2006/main">
+  <p:cSld>
+    <p:spTree>
+      <p:nvGrpSpPr>
+        <p:cNvPr id="1" name=""/>
+        <p:cNvGrpSpPr/>
+        <p:nvPr/>
+      </p:nvGrpSpPr>
+      <p:grpSpPr>
+        <a:xfrm>
+          <a:off x="0" y="0"/>
+          <a:ext cx="0" cy="0"/>
+          <a:chOff x="0" y="0"/>
+          <a:chExt cx="0" cy="0"/>
+        </a:xfrm>
+      </p:grpSpPr>
+      <p:sp>
+        <p:nvSpPr>
+          <p:cNvPr id="2" name="Slide Image Placeholder 1"/>
+          <p:cNvSpPr>
+            <a:spLocks noGrp="1" noRot="1" noChangeAspect="1"/>
+          </p:cNvSpPr>
+          <p:nvPr>
+            <p:ph type="sldImg"/>
+          </p:nvPr>
+        </p:nvSpPr>
+        <p:spPr/>
+      </p:sp>
+      <p:sp>
+        <p:nvSpPr>
+          <p:cNvPr id="3" name="Notes Placeholder 2"/>
+          <p:cNvSpPr>
+            <a:spLocks noGrp="1"/>
+          </p:cNvSpPr>
+          <p:nvPr>
+            <p:ph type="body" idx="1"/>
+          </p:nvPr>
+        </p:nvSpPr>
+        <p:spPr/>
+        <p:txBody>
+          <a:bodyPr/>
+          <a:lstStyle/>
+          <a:p>
+            <a:pPr lvl="0" indent="0" marL="0">
+              <a:buNone/>
+            </a:pPr>
+            <a:r>
+              <a:rPr/>
+              <a:t>This gives you a transparent ending if someone asks what is already proven versus what remains. It also turns the next work into a clear roadmap rather than a vague promise.</a:t>
+            </a:r>
+          </a:p>
+        </p:txBody>
+      </p:sp>
+      <p:sp>
+        <p:nvSpPr>
+          <p:cNvPr id="4" name="Slide Number Placeholder 3"/>
+          <p:cNvSpPr>
+            <a:spLocks noGrp="1"/>
+          </p:cNvSpPr>
+          <p:nvPr>
+            <p:ph type="sldNum" sz="quarter" idx="10"/>
+          </p:nvPr>
+        </p:nvSpPr>
+        <p:spPr/>
+        <p:txBody>
+          <a:bodyPr/>
+          <a:lstStyle/>
+          <a:p>
+            <a:fld id="{18BDFEC3-8487-43E8-A154-7C12CBC1FFF2}" type="slidenum">
+              <a:rPr lang="en-US"/>
+              <a:t>40</a:t>
+            </a:fld>
+            <a:endParaRPr lang="en-US"/>
+          </a:p>
+        </p:txBody>
+      </p:sp>
+    </p:spTree>
+  </p:cSld>
+</p:notes>
+</file>
+
+<file path=ppt/notesSlides/notesSlide24.xml><?xml version="1.0" encoding="utf-8"?>
+<p:notes xmlns:a="http://schemas.openxmlformats.org/drawingml/2006/main" xmlns:r="http://schemas.openxmlformats.org/officeDocument/2006/relationships" xmlns:p="http://schemas.openxmlformats.org/presentationml/2006/main">
+  <p:cSld>
+    <p:spTree>
+      <p:nvGrpSpPr>
+        <p:cNvPr id="1" name=""/>
+        <p:cNvGrpSpPr/>
+        <p:nvPr/>
+      </p:nvGrpSpPr>
+      <p:grpSpPr>
+        <a:xfrm>
+          <a:off x="0" y="0"/>
+          <a:ext cx="0" cy="0"/>
+          <a:chOff x="0" y="0"/>
+          <a:chExt cx="0" cy="0"/>
+        </a:xfrm>
+      </p:grpSpPr>
+      <p:sp>
+        <p:nvSpPr>
+          <p:cNvPr id="2" name="Slide Image Placeholder 1"/>
+          <p:cNvSpPr>
+            <a:spLocks noGrp="1" noRot="1" noChangeAspect="1"/>
+          </p:cNvSpPr>
+          <p:nvPr>
+            <p:ph type="sldImg"/>
+          </p:nvPr>
+        </p:nvSpPr>
+        <p:spPr/>
+      </p:sp>
+      <p:sp>
+        <p:nvSpPr>
+          <p:cNvPr id="3" name="Notes Placeholder 2"/>
+          <p:cNvSpPr>
+            <a:spLocks noGrp="1"/>
+          </p:cNvSpPr>
+          <p:nvPr>
+            <p:ph type="body" idx="1"/>
+          </p:nvPr>
+        </p:nvSpPr>
+        <p:spPr/>
+        <p:txBody>
+          <a:bodyPr/>
+          <a:lstStyle/>
+          <a:p>
+            <a:pPr lvl="0" indent="0" marL="0">
+              <a:buNone/>
+            </a:pPr>
+            <a:r>
+              <a:rPr/>
+              <a:t>This backup slide is the roadmap for the next systematic screening campaign. It should be shown when someone asks how this becomes more than one case.</a:t>
+            </a:r>
+          </a:p>
+        </p:txBody>
+      </p:sp>
+      <p:sp>
+        <p:nvSpPr>
+          <p:cNvPr id="4" name="Slide Number Placeholder 3"/>
+          <p:cNvSpPr>
+            <a:spLocks noGrp="1"/>
+          </p:cNvSpPr>
+          <p:nvPr>
+            <p:ph type="sldNum" sz="quarter" idx="10"/>
+          </p:nvPr>
+        </p:nvSpPr>
+        <p:spPr/>
+        <p:txBody>
+          <a:bodyPr/>
+          <a:lstStyle/>
+          <a:p>
+            <a:fld id="{18BDFEC3-8487-43E8-A154-7C12CBC1FFF2}" type="slidenum">
+              <a:rPr lang="en-US"/>
+              <a:t>42</a:t>
             </a:fld>
             <a:endParaRPr lang="en-US"/>
           </a:p>
@@ -1888,7 +2055,7 @@
             </a:pPr>
             <a:r>
               <a:rPr/>
-              <a:t>This slide shows true source composition without implying that the Shan/Gando extraction feed is a Smackover sample.</a:t>
+              <a:t>This slide shows true source composition without implying that the Rezaee extraction experiments were performed on this Smackover sample.</a:t>
             </a:r>
           </a:p>
         </p:txBody>
@@ -2134,7 +2301,7 @@
             </a:pPr>
             <a:r>
               <a:rPr/>
-              <a:t>This slide makes the problem multidimensional without inventing unsupported ranges. It sets up why a thermodynamic engine is needed before a process optimizer starts sampling.</a:t>
+              <a:t>The raw Smackover brine is still the source site. The extraction model starts after pretreatment, so Mg, Ca, Sr, and Ba are not active extraction variables in this Li/Na bridge.</a:t>
             </a:r>
           </a:p>
         </p:txBody>
@@ -2216,7 +2383,7 @@
             </a:pPr>
             <a:r>
               <a:rPr/>
-              <a:t>Be careful not to oversell. This is a replacement for unsupported transfer assumptions, not a claim that ePC-SAFT solves kinetics, hydraulics, or plant economics by itself.</a:t>
+              <a:t>This is the input contract for the next surrogate run. It separates Rezaee’s paper-tested ranges from the produced-water extension needed for the selected Smackover clean Li+Na stream. Do not present these bounds as completed response surfaces until the concrete run script generates the extraction outputs.</a:t>
             </a:r>
           </a:p>
         </p:txBody>
@@ -2238,7 +2405,7 @@
           <a:p>
             <a:fld id="{18BDFEC3-8487-43E8-A154-7C12CBC1FFF2}" type="slidenum">
               <a:rPr lang="en-US"/>
-              <a:t>15</a:t>
+              <a:t>13</a:t>
             </a:fld>
             <a:endParaRPr lang="en-US"/>
           </a:p>
@@ -2298,7 +2465,7 @@
             </a:pPr>
             <a:r>
               <a:rPr/>
-              <a:t>The novelty claim is reusable insight. The model lets the project ask where the chemistry should work, why the answer changes across basins, and what variables the process model should receive. For this deck, those variables are transfer variables, not equipment performance coefficients.</a:t>
+              <a:t>This scaffold response surface is for process-integration readiness. It checks that the TDS, Li, and O/A design can be carried through transfer variables, staged recovery, and costing before the calibrated Rezaee/ePC-SAFT surrogate rows replace it.</a:t>
             </a:r>
           </a:p>
         </p:txBody>
@@ -2320,7 +2487,7 @@
           <a:p>
             <a:fld id="{18BDFEC3-8487-43E8-A154-7C12CBC1FFF2}" type="slidenum">
               <a:rPr lang="en-US"/>
-              <a:t>16</a:t>
+              <a:t>14</a:t>
             </a:fld>
             <a:endParaRPr lang="en-US"/>
           </a:p>
@@ -5353,7 +5520,7 @@
             </a:pPr>
             <a:r>
               <a:rPr/>
-              <a:t>Thermodynamic and process-systems case study for HBTA/TOPO solvent extraction</a:t>
+              <a:t>Rezaee DES/TOPO Li/Na bridge for thermodynamic and process-systems integration</a:t>
             </a:r>
             <a:br/>
             <a:br/>
@@ -5384,7 +5551,7 @@
             </a:pPr>
             <a:r>
               <a:rPr/>
-              <a:t>2026-05-07</a:t>
+              <a:t>2026-05-08</a:t>
             </a:r>
           </a:p>
         </p:txBody>
@@ -5440,7 +5607,7 @@
             </a:pPr>
             <a:r>
               <a:rPr sz="2000"/>
-              <a:t>The feed is Smackover-specific. The extraction chemistry is Shan/Gando HBTA/TOPO. The model couples a source-backed brine to a literature-backed non-ionic extraction chemistry without claiming a fully calibrated Arkansas extraction experiment.</a:t>
+              <a:t>The feed is Smackover-specific. The extraction chemistry is Rezaee DES/TOPO. The model couples a source-backed brine to a literature-backed Li/Na extraction chemistry without claiming a fully calibrated Arkansas extraction experiment.</a:t>
             </a:r>
           </a:p>
         </p:txBody>
@@ -5851,37 +6018,37 @@
                       </a:pPr>
                       <a:r>
                         <a:rPr/>
-                        <a:t>TDS / NaCl load</a:t>
-                      </a:r>
-                    </a:p>
-                  </a:txBody>
-                </a:tc>
-                <a:tc>
-                  <a:txBody>
-                    <a:bodyPr/>
-                    <a:lstStyle/>
-                    <a:p>
-                      <a:pPr lvl="0" indent="0" marL="0">
-                        <a:buNone/>
-                      </a:pPr>
-                      <a:r>
-                        <a:rPr/>
-                        <a:t>Changes ionic strength and activity behavior</a:t>
-                      </a:r>
-                    </a:p>
-                  </a:txBody>
-                </a:tc>
-                <a:tc>
-                  <a:txBody>
-                    <a:bodyPr/>
-                    <a:lstStyle/>
-                    <a:p>
-                      <a:pPr lvl="0" indent="0" marL="0">
-                        <a:buNone/>
-                      </a:pPr>
-                      <a:r>
-                        <a:rPr/>
-                        <a:t>Moves distribution behavior and surrogate validity</a:t>
+                        <a:t>Na/Li ratio</a:t>
+                      </a:r>
+                    </a:p>
+                  </a:txBody>
+                </a:tc>
+                <a:tc>
+                  <a:txBody>
+                    <a:bodyPr/>
+                    <a:lstStyle/>
+                    <a:p>
+                      <a:pPr lvl="0" indent="0" marL="0">
+                        <a:buNone/>
+                      </a:pPr>
+                      <a:r>
+                        <a:rPr/>
+                        <a:t>Defines the clean post-pretreatment competition problem</a:t>
+                      </a:r>
+                    </a:p>
+                  </a:txBody>
+                </a:tc>
+                <a:tc>
+                  <a:txBody>
+                    <a:bodyPr/>
+                    <a:lstStyle/>
+                    <a:p>
+                      <a:pPr lvl="0" indent="0" marL="0">
+                        <a:buNone/>
+                      </a:pPr>
+                      <a:r>
+                        <a:rPr/>
+                        <a:t>Changes Li/Na selectivity and sodium co-transfer</a:t>
                       </a:r>
                     </a:p>
                   </a:txBody>
@@ -5898,37 +6065,37 @@
                       </a:pPr>
                       <a:r>
                         <a:rPr/>
-                        <a:t>Competing ions</a:t>
-                      </a:r>
-                    </a:p>
-                  </a:txBody>
-                </a:tc>
-                <a:tc>
-                  <a:txBody>
-                    <a:bodyPr/>
-                    <a:lstStyle/>
-                    <a:p>
-                      <a:pPr lvl="0" indent="0" marL="0">
-                        <a:buNone/>
-                      </a:pPr>
-                      <a:r>
-                        <a:rPr/>
-                        <a:t>Mg, Ca, Sr, Ba, and Na affect selectivity</a:t>
-                      </a:r>
-                    </a:p>
-                  </a:txBody>
-                </a:tc>
-                <a:tc>
-                  <a:txBody>
-                    <a:bodyPr/>
-                    <a:lstStyle/>
-                    <a:p>
-                      <a:pPr lvl="0" indent="0" marL="0">
-                        <a:buNone/>
-                      </a:pPr>
-                      <a:r>
-                        <a:rPr/>
-                        <a:t>Changes pretreatment and solvent burden</a:t>
+                        <a:t>pH and temperature</a:t>
+                      </a:r>
+                    </a:p>
+                  </a:txBody>
+                </a:tc>
+                <a:tc>
+                  <a:txBody>
+                    <a:bodyPr/>
+                    <a:lstStyle/>
+                    <a:p>
+                      <a:pPr lvl="0" indent="0" marL="0">
+                        <a:buNone/>
+                      </a:pPr>
+                      <a:r>
+                        <a:rPr/>
+                        <a:t>Rezaee reports these as major response drivers</a:t>
+                      </a:r>
+                    </a:p>
+                  </a:txBody>
+                </a:tc>
+                <a:tc>
+                  <a:txBody>
+                    <a:bodyPr/>
+                    <a:lstStyle/>
+                    <a:p>
+                      <a:pPr lvl="0" indent="0" marL="0">
+                        <a:buNone/>
+                      </a:pPr>
+                      <a:r>
+                        <a:rPr/>
+                        <a:t>Moves extraction and selectivity at the chemistry level</a:t>
                       </a:r>
                     </a:p>
                   </a:txBody>
@@ -5945,37 +6112,37 @@
                       </a:pPr>
                       <a:r>
                         <a:rPr/>
-                        <a:t>Solvent / extractant chemistry</a:t>
-                      </a:r>
-                    </a:p>
-                  </a:txBody>
-                </a:tc>
-                <a:tc>
-                  <a:txBody>
-                    <a:bodyPr/>
-                    <a:lstStyle/>
-                    <a:p>
-                      <a:pPr lvl="0" indent="0" marL="0">
-                        <a:buNone/>
-                      </a:pPr>
-                      <a:r>
-                        <a:rPr/>
-                        <a:t>Determines whether selective transfer is plausible</a:t>
-                      </a:r>
-                    </a:p>
-                  </a:txBody>
-                </a:tc>
-                <a:tc>
-                  <a:txBody>
-                    <a:bodyPr/>
-                    <a:lstStyle/>
-                    <a:p>
-                      <a:pPr lvl="0" indent="0" marL="0">
-                        <a:buNone/>
-                      </a:pPr>
-                      <a:r>
-                        <a:rPr/>
-                        <a:t>Changes (D_i), selectivity, and loaded-solvent composition</a:t>
+                        <a:t>TOPO loading</a:t>
+                      </a:r>
+                    </a:p>
+                  </a:txBody>
+                </a:tc>
+                <a:tc>
+                  <a:txBody>
+                    <a:bodyPr/>
+                    <a:lstStyle/>
+                    <a:p>
+                      <a:pPr lvl="0" indent="0" marL="0">
+                        <a:buNone/>
+                      </a:pPr>
+                      <a:r>
+                        <a:rPr/>
+                        <a:t>Controls ligand capacity and solvent cost</a:t>
+                      </a:r>
+                    </a:p>
+                  </a:txBody>
+                </a:tc>
+                <a:tc>
+                  <a:txBody>
+                    <a:bodyPr/>
+                    <a:lstStyle/>
+                    <a:p>
+                      <a:pPr lvl="0" indent="0" marL="0">
+                        <a:buNone/>
+                      </a:pPr>
+                      <a:r>
+                        <a:rPr/>
+                        <a:t>Changes (D_i), selectivity, and solvent inventory</a:t>
                       </a:r>
                     </a:p>
                   </a:txBody>
@@ -6023,6 +6190,53 @@
                       <a:r>
                         <a:rPr/>
                         <a:t>Becomes a design and optimization variable</a:t>
+                      </a:r>
+                    </a:p>
+                  </a:txBody>
+                </a:tc>
+              </a:tr>
+              <a:tr h="0">
+                <a:tc>
+                  <a:txBody>
+                    <a:bodyPr/>
+                    <a:lstStyle/>
+                    <a:p>
+                      <a:pPr lvl="0" indent="0" marL="0">
+                        <a:buNone/>
+                      </a:pPr>
+                      <a:r>
+                        <a:rPr/>
+                        <a:t>TDS / salinity feature</a:t>
+                      </a:r>
+                    </a:p>
+                  </a:txBody>
+                </a:tc>
+                <a:tc>
+                  <a:txBody>
+                    <a:bodyPr/>
+                    <a:lstStyle/>
+                    <a:p>
+                      <a:pPr lvl="0" indent="0" marL="0">
+                        <a:buNone/>
+                      </a:pPr>
+                      <a:r>
+                        <a:rPr/>
+                        <a:t>Carries produced-water severity into the process model</a:t>
+                      </a:r>
+                    </a:p>
+                  </a:txBody>
+                </a:tc>
+                <a:tc>
+                  <a:txBody>
+                    <a:bodyPr/>
+                    <a:lstStyle/>
+                    <a:p>
+                      <a:pPr lvl="0" indent="0" marL="0">
+                        <a:buNone/>
+                      </a:pPr>
+                      <a:r>
+                        <a:rPr/>
+                        <a:t>Sets surrogate validity and pretreatment/costing context</a:t>
                       </a:r>
                     </a:p>
                   </a:txBody>
@@ -6064,26 +6278,51 @@
             <p:ph type="title"/>
           </p:nvPr>
         </p:nvSpPr>
-        <p:spPr>
+        <p:spPr/>
+        <p:txBody>
+          <a:bodyPr/>
+          <a:lstStyle/>
+          <a:p>
+            <a:pPr lvl="0" indent="0" marL="0">
+              <a:buNone/>
+            </a:pPr>
+            <a:r>
+              <a:rPr/>
+              <a:t>1.7 Clean Li/Na Surrogate Input Space</a:t>
+            </a:r>
+          </a:p>
+        </p:txBody>
+      </p:sp>
+      <p:pic>
+        <p:nvPicPr>
+          <p:cNvPr descr="../analyses/rezaee_2026_pcsaft_epcsaft/results/surrogate_input_space/figures/rezaee_surrogate_input_ranges.png" id="0" name="Picture 1"/>
+          <p:cNvPicPr>
+            <a:picLocks noGrp="1" noChangeAspect="1"/>
+          </p:cNvPicPr>
+          <p:nvPr/>
+        </p:nvPicPr>
+        <p:blipFill>
+          <a:blip r:embed="rId3"/>
+          <a:stretch>
+            <a:fillRect/>
+          </a:stretch>
+        </p:blipFill>
+        <p:spPr bwMode="auto">
           <a:xfrm>
-            <a:off x="722313" y="3305176"/>
-            <a:ext cx="7772400" cy="1021556"/>
+            <a:off x="1562100" y="1193800"/>
+            <a:ext cx="6019800" cy="3390900"/>
           </a:xfrm>
+          <a:prstGeom prst="rect">
+            <a:avLst/>
+          </a:prstGeom>
+          <a:noFill/>
+          <a:ln w="9525">
+            <a:noFill/>
+            <a:headEnd/>
+            <a:tailEnd/>
+          </a:ln>
         </p:spPr>
-        <p:txBody>
-          <a:bodyPr/>
-          <a:lstStyle/>
-          <a:p>
-            <a:pPr lvl="0" indent="0" marL="0">
-              <a:buNone/>
-            </a:pPr>
-            <a:r>
-              <a:rPr/>
-              <a:t>2. ePC-SAFT Thermodynamic Role</a:t>
-            </a:r>
-          </a:p>
-        </p:txBody>
-      </p:sp>
+      </p:pic>
     </p:spTree>
   </p:cSld>
 </p:sld>
@@ -6126,124 +6365,41 @@
             </a:pPr>
             <a:r>
               <a:rPr/>
-              <a:t>2.1 The Model Gap</a:t>
-            </a:r>
-          </a:p>
-        </p:txBody>
-      </p:sp>
-      <p:sp>
-        <p:nvSpPr>
-          <p:cNvPr id="3" name="Content Placeholder 2"/>
-          <p:cNvSpPr>
-            <a:spLocks noGrp="1"/>
-          </p:cNvSpPr>
-          <p:nvPr>
-            <p:ph idx="1" sz="half"/>
-          </p:nvPr>
-        </p:nvSpPr>
-        <p:spPr/>
-        <p:txBody>
-          <a:bodyPr/>
-          <a:lstStyle/>
-          <a:p>
-            <a:pPr lvl="0" indent="0" marL="0">
-              <a:buNone/>
-            </a:pPr>
-            <a:r>
-              <a:rPr b="1"/>
-              <a:t>What weak placeholders can do</a:t>
-            </a:r>
-          </a:p>
-          <a:p>
-            <a:pPr lvl="0"/>
-            <a:r>
-              <a:rPr/>
-              <a:t>Reproduce a narrow demonstration point</a:t>
-            </a:r>
-          </a:p>
-          <a:p>
-            <a:pPr lvl="0"/>
-            <a:r>
-              <a:rPr/>
-              <a:t>Provide a quick stage recovery factor</a:t>
-            </a:r>
-          </a:p>
-          <a:p>
-            <a:pPr lvl="0"/>
-            <a:r>
-              <a:rPr/>
-              <a:t>Run fast inside a flowsheet</a:t>
-            </a:r>
-          </a:p>
-          <a:p>
-            <a:pPr lvl="0"/>
-            <a:r>
-              <a:rPr/>
-              <a:t>Help debug material balances</a:t>
-            </a:r>
-          </a:p>
-        </p:txBody>
-      </p:sp>
-      <p:sp>
-        <p:nvSpPr>
-          <p:cNvPr id="4" name="Content Placeholder 3"/>
-          <p:cNvSpPr>
-            <a:spLocks noGrp="1"/>
-          </p:cNvSpPr>
-          <p:nvPr>
-            <p:ph idx="2" sz="half"/>
-          </p:nvPr>
-        </p:nvSpPr>
-        <p:spPr/>
-        <p:txBody>
-          <a:bodyPr/>
-          <a:lstStyle/>
-          <a:p>
-            <a:pPr lvl="0" indent="0" marL="0">
-              <a:buNone/>
-            </a:pPr>
-            <a:r>
-              <a:rPr b="1"/>
-              <a:t>What they cannot defend</a:t>
-            </a:r>
-          </a:p>
-          <a:p>
-            <a:pPr lvl="0"/>
-            <a:r>
-              <a:rPr/>
-              <a:t>Basin-to-basin extrapolation</a:t>
-            </a:r>
-          </a:p>
-          <a:p>
-            <a:pPr lvl="0"/>
-            <a:r>
-              <a:rPr/>
-              <a:t>Hypersaline electrolyte behavior</a:t>
-            </a:r>
-          </a:p>
-          <a:p>
-            <a:pPr lvl="0"/>
-            <a:r>
-              <a:rPr/>
-              <a:t>Solvent and O/A sensitivity</a:t>
-            </a:r>
-          </a:p>
-          <a:p>
-            <a:pPr lvl="0"/>
-            <a:r>
-              <a:rPr/>
-              <a:t>Ion-specific distribution behavior</a:t>
-            </a:r>
-          </a:p>
-          <a:p>
-            <a:pPr lvl="0"/>
-            <a:r>
-              <a:rPr/>
-              <a:t>Trust-region bounds for optimization</a:t>
-            </a:r>
-          </a:p>
-        </p:txBody>
-      </p:sp>
+              <a:t>1.8 Surrogate Readiness Surface</a:t>
+            </a:r>
+          </a:p>
+        </p:txBody>
+      </p:sp>
+      <p:pic>
+        <p:nvPicPr>
+          <p:cNvPr descr="../analyses/rezaee_2026_pcsaft_epcsaft/results/uq_surrogate/figures/calibrated_li_extraction_surface.png" id="0" name="Picture 1"/>
+          <p:cNvPicPr>
+            <a:picLocks noGrp="1" noChangeAspect="1"/>
+          </p:cNvPicPr>
+          <p:nvPr/>
+        </p:nvPicPr>
+        <p:blipFill>
+          <a:blip r:embed="rId3"/>
+          <a:stretch>
+            <a:fillRect/>
+          </a:stretch>
+        </p:blipFill>
+        <p:spPr bwMode="auto">
+          <a:xfrm>
+            <a:off x="1701800" y="1193800"/>
+            <a:ext cx="5753100" cy="3390900"/>
+          </a:xfrm>
+          <a:prstGeom prst="rect">
+            <a:avLst/>
+          </a:prstGeom>
+          <a:noFill/>
+          <a:ln w="9525">
+            <a:noFill/>
+            <a:headEnd/>
+            <a:tailEnd/>
+          </a:ln>
+        </p:spPr>
+      </p:pic>
     </p:spTree>
   </p:cSld>
 </p:sld>
@@ -6268,34 +6424,30 @@
       </p:grpSpPr>
       <p:sp>
         <p:nvSpPr>
-          <p:cNvPr id="3" name="Content Placeholder 2"/>
-          <p:cNvSpPr>
-            <a:spLocks noGrp="1"/>
-          </p:cNvSpPr>
-          <p:nvPr>
-            <p:ph idx="1"/>
-          </p:nvPr>
-        </p:nvSpPr>
-        <p:spPr/>
-        <p:txBody>
-          <a:bodyPr/>
-          <a:lstStyle/>
-          <a:p>
-            <a:pPr lvl="0" indent="0" marL="1270000">
+          <p:cNvPr id="2" name="Title 1"/>
+          <p:cNvSpPr>
+            <a:spLocks noGrp="1"/>
+          </p:cNvSpPr>
+          <p:nvPr>
+            <p:ph type="title"/>
+          </p:nvPr>
+        </p:nvSpPr>
+        <p:spPr>
+          <a:xfrm>
+            <a:off x="722313" y="3305176"/>
+            <a:ext cx="7772400" cy="1021556"/>
+          </a:xfrm>
+        </p:spPr>
+        <p:txBody>
+          <a:bodyPr/>
+          <a:lstStyle/>
+          <a:p>
+            <a:pPr lvl="0" indent="0" marL="0">
               <a:buNone/>
             </a:pPr>
             <a:r>
-              <a:rPr sz="2000" b="1"/>
-              <a:t>None</a:t>
-            </a:r>
-          </a:p>
-          <a:p>
-            <a:pPr lvl="0" indent="0" marL="1270000">
-              <a:buNone/>
-            </a:pPr>
-            <a:r>
-              <a:rPr sz="2000"/>
-              <a:t>The process model needs a physical equilibrium layer before the surrogate or optimizer is meaningful.</a:t>
+              <a:rPr/>
+              <a:t>2. ePC-SAFT Thermodynamic Role</a:t>
             </a:r>
           </a:p>
         </p:txBody>
@@ -6342,325 +6494,124 @@
             </a:pPr>
             <a:r>
               <a:rPr/>
-              <a:t>2.2 What ePC-SAFT Adds</a:t>
-            </a:r>
-          </a:p>
-        </p:txBody>
-      </p:sp>
-      <p:graphicFrame>
-        <p:nvGraphicFramePr>
-          <p:cNvPr id="6" name="Content Placeholder 5"/>
-          <p:cNvGraphicFramePr>
-            <a:graphicFrameLocks noGrp="1"/>
-          </p:cNvGraphicFramePr>
-          <p:nvPr>
-            <p:ph idx="1"/>
-          </p:nvPr>
-        </p:nvGraphicFramePr>
-        <p:xfrm>
-          <a:off x="457200" y="1193800"/>
-          <a:ext cx="8229600" cy="3390900"/>
-        </p:xfrm>
-        <a:graphic>
-          <a:graphicData uri="http://schemas.openxmlformats.org/drawingml/2006/table">
-            <a:tbl>
-              <a:tblPr firstRow="1" bandRow="1">
-                <a:tableStyleId>{5C22544A-7EE6-4342-B048-85BDC9FD1C3A}</a:tableStyleId>
-              </a:tblPr>
-              <a:tblGrid>
-                <a:gridCol w="2743200"/>
-                <a:gridCol w="2743200"/>
-                <a:gridCol w="2743200"/>
-              </a:tblGrid>
-              <a:tr h="0">
-                <a:tc>
-                  <a:txBody>
-                    <a:bodyPr/>
-                    <a:lstStyle/>
-                    <a:p>
-                      <a:pPr lvl="0" indent="0" marL="0">
-                        <a:buNone/>
-                      </a:pPr>
-                      <a:r>
-                        <a:rPr/>
-                        <a:t>Modeling need</a:t>
-                      </a:r>
-                    </a:p>
-                  </a:txBody>
-                  <a:tcPr/>
-                </a:tc>
-                <a:tc>
-                  <a:txBody>
-                    <a:bodyPr/>
-                    <a:lstStyle/>
-                    <a:p>
-                      <a:pPr lvl="0" indent="0" marL="0">
-                        <a:buNone/>
-                      </a:pPr>
-                      <a:r>
-                        <a:rPr/>
-                        <a:t>ePC-SAFT contribution</a:t>
-                      </a:r>
-                    </a:p>
-                  </a:txBody>
-                  <a:tcPr/>
-                </a:tc>
-                <a:tc>
-                  <a:txBody>
-                    <a:bodyPr/>
-                    <a:lstStyle/>
-                    <a:p>
-                      <a:pPr lvl="0" indent="0" marL="0">
-                        <a:buNone/>
-                      </a:pPr>
-                      <a:r>
-                        <a:rPr/>
-                        <a:t>Why it is novel for this case</a:t>
-                      </a:r>
-                    </a:p>
-                  </a:txBody>
-                  <a:tcPr/>
-                </a:tc>
-              </a:tr>
-              <a:tr h="0">
-                <a:tc>
-                  <a:txBody>
-                    <a:bodyPr/>
-                    <a:lstStyle/>
-                    <a:p>
-                      <a:pPr lvl="0" indent="0" marL="0">
-                        <a:buNone/>
-                      </a:pPr>
-                      <a:r>
-                        <a:rPr/>
-                        <a:t>Hypersaline brine</a:t>
-                      </a:r>
-                    </a:p>
-                  </a:txBody>
-                </a:tc>
-                <a:tc>
-                  <a:txBody>
-                    <a:bodyPr/>
-                    <a:lstStyle/>
-                    <a:p>
-                      <a:pPr lvl="0" indent="0" marL="0">
-                        <a:buNone/>
-                      </a:pPr>
-                      <a:r>
-                        <a:rPr/>
-                        <a:t>Electrolyte activity and phase-equilibrium structure</a:t>
-                      </a:r>
-                    </a:p>
-                  </a:txBody>
-                </a:tc>
-                <a:tc>
-                  <a:txBody>
-                    <a:bodyPr/>
-                    <a:lstStyle/>
-                    <a:p>
-                      <a:pPr lvl="0" indent="0" marL="0">
-                        <a:buNone/>
-                      </a:pPr>
-                      <a:r>
-                        <a:rPr/>
-                        <a:t>Salinity becomes a modeled variable, not a correction factor</a:t>
-                      </a:r>
-                    </a:p>
-                  </a:txBody>
-                </a:tc>
-              </a:tr>
-              <a:tr h="0">
-                <a:tc>
-                  <a:txBody>
-                    <a:bodyPr/>
-                    <a:lstStyle/>
-                    <a:p>
-                      <a:pPr lvl="0" indent="0" marL="0">
-                        <a:buNone/>
-                      </a:pPr>
-                      <a:r>
-                        <a:rPr/>
-                        <a:t>Aqueous/organic split</a:t>
-                      </a:r>
-                    </a:p>
-                  </a:txBody>
-                </a:tc>
-                <a:tc>
-                  <a:txBody>
-                    <a:bodyPr/>
-                    <a:lstStyle/>
-                    <a:p>
-                      <a:pPr lvl="0" indent="0" marL="0">
-                        <a:buNone/>
-                      </a:pPr>
-                      <a:r>
-                        <a:rPr/>
-                        <a:t>Phase compositions and phase fractions</a:t>
-                      </a:r>
-                    </a:p>
-                  </a:txBody>
-                </a:tc>
-                <a:tc>
-                  <a:txBody>
-                    <a:bodyPr/>
-                    <a:lstStyle/>
-                    <a:p>
-                      <a:pPr lvl="0" indent="0" marL="0">
-                        <a:buNone/>
-                      </a:pPr>
-                      <a:r>
-                        <a:rPr/>
-                        <a:t>The extraction stage gets a thermodynamic target</a:t>
-                      </a:r>
-                    </a:p>
-                  </a:txBody>
-                </a:tc>
-              </a:tr>
-              <a:tr h="0">
-                <a:tc>
-                  <a:txBody>
-                    <a:bodyPr/>
-                    <a:lstStyle/>
-                    <a:p>
-                      <a:pPr lvl="0" indent="0" marL="0">
-                        <a:buNone/>
-                      </a:pPr>
-                      <a:r>
-                        <a:rPr/>
-                        <a:t>Ion partitioning</a:t>
-                      </a:r>
-                    </a:p>
-                  </a:txBody>
-                </a:tc>
-                <a:tc>
-                  <a:txBody>
-                    <a:bodyPr/>
-                    <a:lstStyle/>
-                    <a:p>
-                      <a:pPr lvl="0" indent="0" marL="0">
-                        <a:buNone/>
-                      </a:pPr>
-                      <a:r>
-                        <a:rPr/>
-                        <a:t>Distribution ratios and selectivity metrics</a:t>
-                      </a:r>
-                    </a:p>
-                  </a:txBody>
-                </a:tc>
-                <a:tc>
-                  <a:txBody>
-                    <a:bodyPr/>
-                    <a:lstStyle/>
-                    <a:p>
-                      <a:pPr lvl="0" indent="0" marL="0">
-                        <a:buNone/>
-                      </a:pPr>
-                      <a:r>
-                        <a:rPr/>
-                        <a:t>Li movement can be separated from bulk salt movement</a:t>
-                      </a:r>
-                    </a:p>
-                  </a:txBody>
-                </a:tc>
-              </a:tr>
-              <a:tr h="0">
-                <a:tc>
-                  <a:txBody>
-                    <a:bodyPr/>
-                    <a:lstStyle/>
-                    <a:p>
-                      <a:pPr lvl="0" indent="0" marL="0">
-                        <a:buNone/>
-                      </a:pPr>
-                      <a:r>
-                        <a:rPr/>
-                        <a:t>Sensitivity surfaces</a:t>
-                      </a:r>
-                    </a:p>
-                  </a:txBody>
-                </a:tc>
-                <a:tc>
-                  <a:txBody>
-                    <a:bodyPr/>
-                    <a:lstStyle/>
-                    <a:p>
-                      <a:pPr lvl="0" indent="0" marL="0">
-                        <a:buNone/>
-                      </a:pPr>
-                      <a:r>
-                        <a:rPr/>
-                        <a:t>Response to TDS, O/A, solvent, and feed composition</a:t>
-                      </a:r>
-                    </a:p>
-                  </a:txBody>
-                </a:tc>
-                <a:tc>
-                  <a:txBody>
-                    <a:bodyPr/>
-                    <a:lstStyle/>
-                    <a:p>
-                      <a:pPr lvl="0" indent="0" marL="0">
-                        <a:buNone/>
-                      </a:pPr>
-                      <a:r>
-                        <a:rPr/>
-                        <a:t>Surrogates can be trained inside a meaningful region</a:t>
-                      </a:r>
-                    </a:p>
-                  </a:txBody>
-                </a:tc>
-              </a:tr>
-              <a:tr h="0">
-                <a:tc>
-                  <a:txBody>
-                    <a:bodyPr/>
-                    <a:lstStyle/>
-                    <a:p>
-                      <a:pPr lvl="0" indent="0" marL="0">
-                        <a:buNone/>
-                      </a:pPr>
-                      <a:r>
-                        <a:rPr/>
-                        <a:t>Diagnostics</a:t>
-                      </a:r>
-                    </a:p>
-                  </a:txBody>
-                </a:tc>
-                <a:tc>
-                  <a:txBody>
-                    <a:bodyPr/>
-                    <a:lstStyle/>
-                    <a:p>
-                      <a:pPr lvl="0" indent="0" marL="0">
-                        <a:buNone/>
-                      </a:pPr>
-                      <a:r>
-                        <a:rPr/>
-                        <a:t>Stability, convergence, and phase-distance checks</a:t>
-                      </a:r>
-                    </a:p>
-                  </a:txBody>
-                </a:tc>
-                <a:tc>
-                  <a:txBody>
-                    <a:bodyPr/>
-                    <a:lstStyle/>
-                    <a:p>
-                      <a:pPr lvl="0" indent="0" marL="0">
-                        <a:buNone/>
-                      </a:pPr>
-                      <a:r>
-                        <a:rPr/>
-                        <a:t>Failed or collapsed points do not silently become process data</a:t>
-                      </a:r>
-                    </a:p>
-                  </a:txBody>
-                </a:tc>
-              </a:tr>
-            </a:tbl>
-          </a:graphicData>
-        </a:graphic>
-      </p:graphicFrame>
+              <a:t>2.1 The Model Gap</a:t>
+            </a:r>
+          </a:p>
+        </p:txBody>
+      </p:sp>
+      <p:sp>
+        <p:nvSpPr>
+          <p:cNvPr id="3" name="Content Placeholder 2"/>
+          <p:cNvSpPr>
+            <a:spLocks noGrp="1"/>
+          </p:cNvSpPr>
+          <p:nvPr>
+            <p:ph idx="1" sz="half"/>
+          </p:nvPr>
+        </p:nvSpPr>
+        <p:spPr/>
+        <p:txBody>
+          <a:bodyPr/>
+          <a:lstStyle/>
+          <a:p>
+            <a:pPr lvl="0" indent="0" marL="0">
+              <a:buNone/>
+            </a:pPr>
+            <a:r>
+              <a:rPr b="1"/>
+              <a:t>What weak placeholders can do</a:t>
+            </a:r>
+          </a:p>
+          <a:p>
+            <a:pPr lvl="0"/>
+            <a:r>
+              <a:rPr/>
+              <a:t>Reproduce a narrow demonstration point</a:t>
+            </a:r>
+          </a:p>
+          <a:p>
+            <a:pPr lvl="0"/>
+            <a:r>
+              <a:rPr/>
+              <a:t>Provide a quick stage recovery factor</a:t>
+            </a:r>
+          </a:p>
+          <a:p>
+            <a:pPr lvl="0"/>
+            <a:r>
+              <a:rPr/>
+              <a:t>Run fast inside a flowsheet</a:t>
+            </a:r>
+          </a:p>
+          <a:p>
+            <a:pPr lvl="0"/>
+            <a:r>
+              <a:rPr/>
+              <a:t>Help debug material balances</a:t>
+            </a:r>
+          </a:p>
+        </p:txBody>
+      </p:sp>
+      <p:sp>
+        <p:nvSpPr>
+          <p:cNvPr id="4" name="Content Placeholder 3"/>
+          <p:cNvSpPr>
+            <a:spLocks noGrp="1"/>
+          </p:cNvSpPr>
+          <p:nvPr>
+            <p:ph idx="2" sz="half"/>
+          </p:nvPr>
+        </p:nvSpPr>
+        <p:spPr/>
+        <p:txBody>
+          <a:bodyPr/>
+          <a:lstStyle/>
+          <a:p>
+            <a:pPr lvl="0" indent="0" marL="0">
+              <a:buNone/>
+            </a:pPr>
+            <a:r>
+              <a:rPr b="1"/>
+              <a:t>What they cannot defend</a:t>
+            </a:r>
+          </a:p>
+          <a:p>
+            <a:pPr lvl="0"/>
+            <a:r>
+              <a:rPr/>
+              <a:t>Basin-to-basin extrapolation</a:t>
+            </a:r>
+          </a:p>
+          <a:p>
+            <a:pPr lvl="0"/>
+            <a:r>
+              <a:rPr/>
+              <a:t>Hypersaline electrolyte behavior</a:t>
+            </a:r>
+          </a:p>
+          <a:p>
+            <a:pPr lvl="0"/>
+            <a:r>
+              <a:rPr/>
+              <a:t>Solvent and O/A sensitivity</a:t>
+            </a:r>
+          </a:p>
+          <a:p>
+            <a:pPr lvl="0"/>
+            <a:r>
+              <a:rPr/>
+              <a:t>Ion-specific distribution behavior</a:t>
+            </a:r>
+          </a:p>
+          <a:p>
+            <a:pPr lvl="0"/>
+            <a:r>
+              <a:rPr/>
+              <a:t>Trust-region bounds for optimization</a:t>
+            </a:r>
+          </a:p>
+        </p:txBody>
+      </p:sp>
     </p:spTree>
   </p:cSld>
 </p:sld>
@@ -6685,219 +6636,38 @@
       </p:grpSpPr>
       <p:sp>
         <p:nvSpPr>
-          <p:cNvPr id="2" name="Title 1"/>
-          <p:cNvSpPr>
-            <a:spLocks noGrp="1"/>
-          </p:cNvSpPr>
-          <p:nvPr>
-            <p:ph type="title"/>
-          </p:nvPr>
-        </p:nvSpPr>
-        <p:spPr/>
-        <p:txBody>
-          <a:bodyPr/>
-          <a:lstStyle/>
-          <a:p>
-            <a:pPr lvl="0" indent="0" marL="0">
+          <p:cNvPr id="3" name="Content Placeholder 2"/>
+          <p:cNvSpPr>
+            <a:spLocks noGrp="1"/>
+          </p:cNvSpPr>
+          <p:nvPr>
+            <p:ph idx="1"/>
+          </p:nvPr>
+        </p:nvSpPr>
+        <p:spPr/>
+        <p:txBody>
+          <a:bodyPr/>
+          <a:lstStyle/>
+          <a:p>
+            <a:pPr lvl="0" indent="0" marL="1270000">
               <a:buNone/>
             </a:pPr>
             <a:r>
-              <a:rPr/>
-              <a:t>2.3 Rezaee 2026 As A Parameter-Fitting Smoke Test</a:t>
-            </a:r>
-          </a:p>
-        </p:txBody>
-      </p:sp>
-      <p:graphicFrame>
-        <p:nvGraphicFramePr>
-          <p:cNvPr id="6" name="Content Placeholder 5"/>
-          <p:cNvGraphicFramePr>
-            <a:graphicFrameLocks noGrp="1"/>
-          </p:cNvGraphicFramePr>
-          <p:nvPr>
-            <p:ph idx="1"/>
-          </p:nvPr>
-        </p:nvGraphicFramePr>
-        <p:xfrm>
-          <a:off x="457200" y="1193800"/>
-          <a:ext cx="8229600" cy="3390900"/>
-        </p:xfrm>
-        <a:graphic>
-          <a:graphicData uri="http://schemas.openxmlformats.org/drawingml/2006/table">
-            <a:tbl>
-              <a:tblPr firstRow="1" bandRow="1">
-                <a:tableStyleId>{5C22544A-7EE6-4342-B048-85BDC9FD1C3A}</a:tableStyleId>
-              </a:tblPr>
-              <a:tblGrid>
-                <a:gridCol w="4114800"/>
-                <a:gridCol w="4114800"/>
-              </a:tblGrid>
-              <a:tr h="0">
-                <a:tc>
-                  <a:txBody>
-                    <a:bodyPr/>
-                    <a:lstStyle/>
-                    <a:p>
-                      <a:pPr lvl="0" indent="0" marL="0">
-                        <a:buNone/>
-                      </a:pPr>
-                      <a:r>
-                        <a:rPr/>
-                        <a:t>What Rezaee gives</a:t>
-                      </a:r>
-                    </a:p>
-                  </a:txBody>
-                  <a:tcPr/>
-                </a:tc>
-                <a:tc>
-                  <a:txBody>
-                    <a:bodyPr/>
-                    <a:lstStyle/>
-                    <a:p>
-                      <a:pPr lvl="0" indent="0" marL="0">
-                        <a:buNone/>
-                      </a:pPr>
-                      <a:r>
-                        <a:rPr/>
-                        <a:t>How this deck should use it</a:t>
-                      </a:r>
-                    </a:p>
-                  </a:txBody>
-                  <a:tcPr/>
-                </a:tc>
-              </a:tr>
-              <a:tr h="0">
-                <a:tc>
-                  <a:txBody>
-                    <a:bodyPr/>
-                    <a:lstStyle/>
-                    <a:p>
-                      <a:pPr lvl="0" indent="0" marL="0">
-                        <a:buNone/>
-                      </a:pPr>
-                      <a:r>
-                        <a:rPr/>
-                        <a:t>DES/TOPO lithium extraction modeling with tabulated PC-SAFT-style parameters</a:t>
-                      </a:r>
-                    </a:p>
-                  </a:txBody>
-                </a:tc>
-                <a:tc>
-                  <a:txBody>
-                    <a:bodyPr/>
-                    <a:lstStyle/>
-                    <a:p>
-                      <a:pPr lvl="0" indent="0" marL="0">
-                        <a:buNone/>
-                      </a:pPr>
-                      <a:r>
-                        <a:rPr/>
-                        <a:t>Package regression and equilibrium smoke test</a:t>
-                      </a:r>
-                    </a:p>
-                  </a:txBody>
-                </a:tc>
-              </a:tr>
-              <a:tr h="0">
-                <a:tc>
-                  <a:txBody>
-                    <a:bodyPr/>
-                    <a:lstStyle/>
-                    <a:p>
-                      <a:pPr lvl="0" indent="0" marL="0">
-                        <a:buNone/>
-                      </a:pPr>
-                      <a:r>
-                        <a:rPr/>
-                        <a:t>Organic phase modeled with PC-SAFT</a:t>
-                      </a:r>
-                    </a:p>
-                  </a:txBody>
-                </a:tc>
-                <a:tc>
-                  <a:txBody>
-                    <a:bodyPr/>
-                    <a:lstStyle/>
-                    <a:p>
-                      <a:pPr lvl="0" indent="0" marL="0">
-                        <a:buNone/>
-                      </a:pPr>
-                      <a:r>
-                        <a:rPr/>
-                        <a:t>Do not cite as full ePC-SAFT organic-phase closure</a:t>
-                      </a:r>
-                    </a:p>
-                  </a:txBody>
-                </a:tc>
-              </a:tr>
-              <a:tr h="0">
-                <a:tc>
-                  <a:txBody>
-                    <a:bodyPr/>
-                    <a:lstStyle/>
-                    <a:p>
-                      <a:pPr lvl="0" indent="0" marL="0">
-                        <a:buNone/>
-                      </a:pPr>
-                      <a:r>
-                        <a:rPr/>
-                        <a:t>Aqueous electrolyte phase modeled with ePC-SAFT</a:t>
-                      </a:r>
-                    </a:p>
-                  </a:txBody>
-                </a:tc>
-                <a:tc>
-                  <a:txBody>
-                    <a:bodyPr/>
-                    <a:lstStyle/>
-                    <a:p>
-                      <a:pPr lvl="0" indent="0" marL="0">
-                        <a:buNone/>
-                      </a:pPr>
-                      <a:r>
-                        <a:rPr/>
-                        <a:t>Useful support for the aqueous-brine side of the bridge</a:t>
-                      </a:r>
-                    </a:p>
-                  </a:txBody>
-                </a:tc>
-              </a:tr>
-              <a:tr h="0">
-                <a:tc>
-                  <a:txBody>
-                    <a:bodyPr/>
-                    <a:lstStyle/>
-                    <a:p>
-                      <a:pPr lvl="0" indent="0" marL="0">
-                        <a:buNone/>
-                      </a:pPr>
-                      <a:r>
-                        <a:rPr/>
-                        <a:t>Fitted organic interactions and product pseudo-species</a:t>
-                      </a:r>
-                    </a:p>
-                  </a:txBody>
-                </a:tc>
-                <a:tc>
-                  <a:txBody>
-                    <a:bodyPr/>
-                    <a:lstStyle/>
-                    <a:p>
-                      <a:pPr lvl="0" indent="0" marL="0">
-                        <a:buNone/>
-                      </a:pPr>
-                      <a:r>
-                        <a:rPr/>
-                        <a:t>Useful parameterization pattern, not Shan/Gando chemistry</a:t>
-                      </a:r>
-                    </a:p>
-                  </a:txBody>
-                </a:tc>
-              </a:tr>
-            </a:tbl>
-          </a:graphicData>
-        </a:graphic>
-      </p:graphicFrame>
+              <a:rPr sz="2000" b="1"/>
+              <a:t>None</a:t>
+            </a:r>
+          </a:p>
+          <a:p>
+            <a:pPr lvl="0" indent="0" marL="1270000">
+              <a:buNone/>
+            </a:pPr>
+            <a:r>
+              <a:rPr sz="2000"/>
+              <a:t>The process model needs a physical equilibrium layer before the surrogate or optimizer is meaningful.</a:t>
+            </a:r>
+          </a:p>
+        </p:txBody>
+      </p:sp>
     </p:spTree>
   </p:cSld>
 </p:sld>
@@ -6922,38 +6692,343 @@
       </p:grpSpPr>
       <p:sp>
         <p:nvSpPr>
-          <p:cNvPr id="3" name="Content Placeholder 2"/>
-          <p:cNvSpPr>
-            <a:spLocks noGrp="1"/>
-          </p:cNvSpPr>
+          <p:cNvPr id="2" name="Title 1"/>
+          <p:cNvSpPr>
+            <a:spLocks noGrp="1"/>
+          </p:cNvSpPr>
+          <p:nvPr>
+            <p:ph type="title"/>
+          </p:nvPr>
+        </p:nvSpPr>
+        <p:spPr/>
+        <p:txBody>
+          <a:bodyPr/>
+          <a:lstStyle/>
+          <a:p>
+            <a:pPr lvl="0" indent="0" marL="0">
+              <a:buNone/>
+            </a:pPr>
+            <a:r>
+              <a:rPr/>
+              <a:t>2.2 What ePC-SAFT Adds</a:t>
+            </a:r>
+          </a:p>
+        </p:txBody>
+      </p:sp>
+      <p:graphicFrame>
+        <p:nvGraphicFramePr>
+          <p:cNvPr id="6" name="Content Placeholder 5"/>
+          <p:cNvGraphicFramePr>
+            <a:graphicFrameLocks noGrp="1"/>
+          </p:cNvGraphicFramePr>
           <p:nvPr>
             <p:ph idx="1"/>
           </p:nvPr>
-        </p:nvSpPr>
-        <p:spPr/>
-        <p:txBody>
-          <a:bodyPr/>
-          <a:lstStyle/>
-          <a:p>
-            <a:pPr lvl="0" indent="0" marL="1270000">
-              <a:buNone/>
-            </a:pPr>
-            <a:r>
-              <a:rPr sz="2000" b="1"/>
-              <a:t>None</a:t>
-            </a:r>
-          </a:p>
-          <a:p>
-            <a:pPr lvl="0" indent="0" marL="1270000">
-              <a:buNone/>
-            </a:pPr>
-            <a:r>
-              <a:rPr sz="2000"/>
-              <a:t>Rezaee is a method lead and runtime test, not the final HBTA/TOPO model.</a:t>
-            </a:r>
-          </a:p>
-        </p:txBody>
-      </p:sp>
+        </p:nvGraphicFramePr>
+        <p:xfrm>
+          <a:off x="457200" y="1193800"/>
+          <a:ext cx="8229600" cy="3390900"/>
+        </p:xfrm>
+        <a:graphic>
+          <a:graphicData uri="http://schemas.openxmlformats.org/drawingml/2006/table">
+            <a:tbl>
+              <a:tblPr firstRow="1" bandRow="1">
+                <a:tableStyleId>{5C22544A-7EE6-4342-B048-85BDC9FD1C3A}</a:tableStyleId>
+              </a:tblPr>
+              <a:tblGrid>
+                <a:gridCol w="2743200"/>
+                <a:gridCol w="2743200"/>
+                <a:gridCol w="2743200"/>
+              </a:tblGrid>
+              <a:tr h="0">
+                <a:tc>
+                  <a:txBody>
+                    <a:bodyPr/>
+                    <a:lstStyle/>
+                    <a:p>
+                      <a:pPr lvl="0" indent="0" marL="0">
+                        <a:buNone/>
+                      </a:pPr>
+                      <a:r>
+                        <a:rPr/>
+                        <a:t>Modeling need</a:t>
+                      </a:r>
+                    </a:p>
+                  </a:txBody>
+                  <a:tcPr/>
+                </a:tc>
+                <a:tc>
+                  <a:txBody>
+                    <a:bodyPr/>
+                    <a:lstStyle/>
+                    <a:p>
+                      <a:pPr lvl="0" indent="0" marL="0">
+                        <a:buNone/>
+                      </a:pPr>
+                      <a:r>
+                        <a:rPr/>
+                        <a:t>ePC-SAFT contribution</a:t>
+                      </a:r>
+                    </a:p>
+                  </a:txBody>
+                  <a:tcPr/>
+                </a:tc>
+                <a:tc>
+                  <a:txBody>
+                    <a:bodyPr/>
+                    <a:lstStyle/>
+                    <a:p>
+                      <a:pPr lvl="0" indent="0" marL="0">
+                        <a:buNone/>
+                      </a:pPr>
+                      <a:r>
+                        <a:rPr/>
+                        <a:t>Why it is novel for this case</a:t>
+                      </a:r>
+                    </a:p>
+                  </a:txBody>
+                  <a:tcPr/>
+                </a:tc>
+              </a:tr>
+              <a:tr h="0">
+                <a:tc>
+                  <a:txBody>
+                    <a:bodyPr/>
+                    <a:lstStyle/>
+                    <a:p>
+                      <a:pPr lvl="0" indent="0" marL="0">
+                        <a:buNone/>
+                      </a:pPr>
+                      <a:r>
+                        <a:rPr/>
+                        <a:t>Hypersaline brine</a:t>
+                      </a:r>
+                    </a:p>
+                  </a:txBody>
+                </a:tc>
+                <a:tc>
+                  <a:txBody>
+                    <a:bodyPr/>
+                    <a:lstStyle/>
+                    <a:p>
+                      <a:pPr lvl="0" indent="0" marL="0">
+                        <a:buNone/>
+                      </a:pPr>
+                      <a:r>
+                        <a:rPr/>
+                        <a:t>Electrolyte activity and phase-equilibrium structure</a:t>
+                      </a:r>
+                    </a:p>
+                  </a:txBody>
+                </a:tc>
+                <a:tc>
+                  <a:txBody>
+                    <a:bodyPr/>
+                    <a:lstStyle/>
+                    <a:p>
+                      <a:pPr lvl="0" indent="0" marL="0">
+                        <a:buNone/>
+                      </a:pPr>
+                      <a:r>
+                        <a:rPr/>
+                        <a:t>Salinity becomes a modeled variable, not a correction factor</a:t>
+                      </a:r>
+                    </a:p>
+                  </a:txBody>
+                </a:tc>
+              </a:tr>
+              <a:tr h="0">
+                <a:tc>
+                  <a:txBody>
+                    <a:bodyPr/>
+                    <a:lstStyle/>
+                    <a:p>
+                      <a:pPr lvl="0" indent="0" marL="0">
+                        <a:buNone/>
+                      </a:pPr>
+                      <a:r>
+                        <a:rPr/>
+                        <a:t>Aqueous/organic split</a:t>
+                      </a:r>
+                    </a:p>
+                  </a:txBody>
+                </a:tc>
+                <a:tc>
+                  <a:txBody>
+                    <a:bodyPr/>
+                    <a:lstStyle/>
+                    <a:p>
+                      <a:pPr lvl="0" indent="0" marL="0">
+                        <a:buNone/>
+                      </a:pPr>
+                      <a:r>
+                        <a:rPr/>
+                        <a:t>Phase compositions and phase fractions</a:t>
+                      </a:r>
+                    </a:p>
+                  </a:txBody>
+                </a:tc>
+                <a:tc>
+                  <a:txBody>
+                    <a:bodyPr/>
+                    <a:lstStyle/>
+                    <a:p>
+                      <a:pPr lvl="0" indent="0" marL="0">
+                        <a:buNone/>
+                      </a:pPr>
+                      <a:r>
+                        <a:rPr/>
+                        <a:t>The extraction stage gets a thermodynamic target</a:t>
+                      </a:r>
+                    </a:p>
+                  </a:txBody>
+                </a:tc>
+              </a:tr>
+              <a:tr h="0">
+                <a:tc>
+                  <a:txBody>
+                    <a:bodyPr/>
+                    <a:lstStyle/>
+                    <a:p>
+                      <a:pPr lvl="0" indent="0" marL="0">
+                        <a:buNone/>
+                      </a:pPr>
+                      <a:r>
+                        <a:rPr/>
+                        <a:t>Ion partitioning</a:t>
+                      </a:r>
+                    </a:p>
+                  </a:txBody>
+                </a:tc>
+                <a:tc>
+                  <a:txBody>
+                    <a:bodyPr/>
+                    <a:lstStyle/>
+                    <a:p>
+                      <a:pPr lvl="0" indent="0" marL="0">
+                        <a:buNone/>
+                      </a:pPr>
+                      <a:r>
+                        <a:rPr/>
+                        <a:t>Distribution ratios and selectivity metrics</a:t>
+                      </a:r>
+                    </a:p>
+                  </a:txBody>
+                </a:tc>
+                <a:tc>
+                  <a:txBody>
+                    <a:bodyPr/>
+                    <a:lstStyle/>
+                    <a:p>
+                      <a:pPr lvl="0" indent="0" marL="0">
+                        <a:buNone/>
+                      </a:pPr>
+                      <a:r>
+                        <a:rPr/>
+                        <a:t>Li movement can be separated from bulk salt movement</a:t>
+                      </a:r>
+                    </a:p>
+                  </a:txBody>
+                </a:tc>
+              </a:tr>
+              <a:tr h="0">
+                <a:tc>
+                  <a:txBody>
+                    <a:bodyPr/>
+                    <a:lstStyle/>
+                    <a:p>
+                      <a:pPr lvl="0" indent="0" marL="0">
+                        <a:buNone/>
+                      </a:pPr>
+                      <a:r>
+                        <a:rPr/>
+                        <a:t>Sensitivity surfaces</a:t>
+                      </a:r>
+                    </a:p>
+                  </a:txBody>
+                </a:tc>
+                <a:tc>
+                  <a:txBody>
+                    <a:bodyPr/>
+                    <a:lstStyle/>
+                    <a:p>
+                      <a:pPr lvl="0" indent="0" marL="0">
+                        <a:buNone/>
+                      </a:pPr>
+                      <a:r>
+                        <a:rPr/>
+                        <a:t>Response to TDS, O/A, solvent, and feed composition</a:t>
+                      </a:r>
+                    </a:p>
+                  </a:txBody>
+                </a:tc>
+                <a:tc>
+                  <a:txBody>
+                    <a:bodyPr/>
+                    <a:lstStyle/>
+                    <a:p>
+                      <a:pPr lvl="0" indent="0" marL="0">
+                        <a:buNone/>
+                      </a:pPr>
+                      <a:r>
+                        <a:rPr/>
+                        <a:t>Surrogates can be trained inside a meaningful region</a:t>
+                      </a:r>
+                    </a:p>
+                  </a:txBody>
+                </a:tc>
+              </a:tr>
+              <a:tr h="0">
+                <a:tc>
+                  <a:txBody>
+                    <a:bodyPr/>
+                    <a:lstStyle/>
+                    <a:p>
+                      <a:pPr lvl="0" indent="0" marL="0">
+                        <a:buNone/>
+                      </a:pPr>
+                      <a:r>
+                        <a:rPr/>
+                        <a:t>Diagnostics</a:t>
+                      </a:r>
+                    </a:p>
+                  </a:txBody>
+                </a:tc>
+                <a:tc>
+                  <a:txBody>
+                    <a:bodyPr/>
+                    <a:lstStyle/>
+                    <a:p>
+                      <a:pPr lvl="0" indent="0" marL="0">
+                        <a:buNone/>
+                      </a:pPr>
+                      <a:r>
+                        <a:rPr/>
+                        <a:t>Stability, convergence, and phase-distance checks</a:t>
+                      </a:r>
+                    </a:p>
+                  </a:txBody>
+                </a:tc>
+                <a:tc>
+                  <a:txBody>
+                    <a:bodyPr/>
+                    <a:lstStyle/>
+                    <a:p>
+                      <a:pPr lvl="0" indent="0" marL="0">
+                        <a:buNone/>
+                      </a:pPr>
+                      <a:r>
+                        <a:rPr/>
+                        <a:t>Failed or collapsed points do not silently become process data</a:t>
+                      </a:r>
+                    </a:p>
+                  </a:txBody>
+                </a:tc>
+              </a:tr>
+            </a:tbl>
+          </a:graphicData>
+        </a:graphic>
+      </p:graphicFrame>
     </p:spTree>
   </p:cSld>
 </p:sld>
@@ -6996,7 +7071,7 @@
             </a:pPr>
             <a:r>
               <a:rPr/>
-              <a:t>2.4 Solvent Candidate Scorecard</a:t>
+              <a:t>2.3 Rezaee 2026 As A Parameter-Fitting Smoke Test</a:t>
             </a:r>
           </a:p>
         </p:txBody>
@@ -7022,10 +7097,8 @@
                 <a:tableStyleId>{5C22544A-7EE6-4342-B048-85BDC9FD1C3A}</a:tableStyleId>
               </a:tblPr>
               <a:tblGrid>
-                <a:gridCol w="2527300"/>
-                <a:gridCol w="1905000"/>
-                <a:gridCol w="1905000"/>
-                <a:gridCol w="1905000"/>
+                <a:gridCol w="4114800"/>
+                <a:gridCol w="4114800"/>
               </a:tblGrid>
               <a:tr h="0">
                 <a:tc>
@@ -7033,12 +7106,12 @@
                     <a:bodyPr/>
                     <a:lstStyle/>
                     <a:p>
-                      <a:pPr lvl="0" indent="0" marL="0" algn="r">
-                        <a:buNone/>
-                      </a:pPr>
-                      <a:r>
-                        <a:rPr/>
-                        <a:t>Priority</a:t>
+                      <a:pPr lvl="0" indent="0" marL="0">
+                        <a:buNone/>
+                      </a:pPr>
+                      <a:r>
+                        <a:rPr/>
+                        <a:t>What Rezaee gives</a:t>
                       </a:r>
                     </a:p>
                   </a:txBody>
@@ -7054,39 +7127,7 @@
                       </a:pPr>
                       <a:r>
                         <a:rPr/>
-                        <a:t>System</a:t>
-                      </a:r>
-                    </a:p>
-                  </a:txBody>
-                  <a:tcPr/>
-                </a:tc>
-                <a:tc>
-                  <a:txBody>
-                    <a:bodyPr/>
-                    <a:lstStyle/>
-                    <a:p>
-                      <a:pPr lvl="0" indent="0" marL="0">
-                        <a:buNone/>
-                      </a:pPr>
-                      <a:r>
-                        <a:rPr/>
-                        <a:t>Role</a:t>
-                      </a:r>
-                    </a:p>
-                  </a:txBody>
-                  <a:tcPr/>
-                </a:tc>
-                <a:tc>
-                  <a:txBody>
-                    <a:bodyPr/>
-                    <a:lstStyle/>
-                    <a:p>
-                      <a:pPr lvl="0" indent="0" marL="0">
-                        <a:buNone/>
-                      </a:pPr>
-                      <a:r>
-                        <a:rPr/>
-                        <a:t>Status</a:t>
+                        <a:t>How this deck should use it</a:t>
                       </a:r>
                     </a:p>
                   </a:txBody>
@@ -7099,57 +7140,27 @@
                     <a:bodyPr/>
                     <a:lstStyle/>
                     <a:p>
-                      <a:pPr lvl="0" indent="0" marL="0" algn="r">
-                        <a:buNone/>
-                      </a:pPr>
-                      <a:r>
-                        <a:rPr/>
-                        <a:t>1</a:t>
-                      </a:r>
-                    </a:p>
-                  </a:txBody>
-                </a:tc>
-                <a:tc>
-                  <a:txBody>
-                    <a:bodyPr/>
-                    <a:lstStyle/>
-                    <a:p>
-                      <a:pPr lvl="0" indent="0" marL="0">
-                        <a:buNone/>
-                      </a:pPr>
-                      <a:r>
-                        <a:rPr/>
-                        <a:t>HBTA + TOPO + sulfonated kerosene</a:t>
-                      </a:r>
-                    </a:p>
-                  </a:txBody>
-                </a:tc>
-                <a:tc>
-                  <a:txBody>
-                    <a:bodyPr/>
-                    <a:lstStyle/>
-                    <a:p>
-                      <a:pPr lvl="0" indent="0" marL="0">
-                        <a:buNone/>
-                      </a:pPr>
-                      <a:r>
-                        <a:rPr/>
-                        <a:t>Flagship</a:t>
-                      </a:r>
-                    </a:p>
-                  </a:txBody>
-                </a:tc>
-                <a:tc>
-                  <a:txBody>
-                    <a:bodyPr/>
-                    <a:lstStyle/>
-                    <a:p>
-                      <a:pPr lvl="0" indent="0" marL="0">
-                        <a:buNone/>
-                      </a:pPr>
-                      <a:r>
-                        <a:rPr/>
-                        <a:t>Field-water evidence, source-regressed Li/Na stage model, missing full multication parameter payload</a:t>
+                      <a:pPr lvl="0" indent="0" marL="0">
+                        <a:buNone/>
+                      </a:pPr>
+                      <a:r>
+                        <a:rPr/>
+                        <a:t>2025 extraction responses and SI phase-composition rows</a:t>
+                      </a:r>
+                    </a:p>
+                  </a:txBody>
+                </a:tc>
+                <a:tc>
+                  <a:txBody>
+                    <a:bodyPr/>
+                    <a:lstStyle/>
+                    <a:p>
+                      <a:pPr lvl="0" indent="0" marL="0">
+                        <a:buNone/>
+                      </a:pPr>
+                      <a:r>
+                        <a:rPr/>
+                        <a:t>Source-backed Li/Na bridge targets</a:t>
                       </a:r>
                     </a:p>
                   </a:txBody>
@@ -7161,57 +7172,27 @@
                     <a:bodyPr/>
                     <a:lstStyle/>
                     <a:p>
-                      <a:pPr lvl="0" indent="0" marL="0" algn="r">
-                        <a:buNone/>
-                      </a:pPr>
-                      <a:r>
-                        <a:rPr/>
-                        <a:t>2</a:t>
-                      </a:r>
-                    </a:p>
-                  </a:txBody>
-                </a:tc>
-                <a:tc>
-                  <a:txBody>
-                    <a:bodyPr/>
-                    <a:lstStyle/>
-                    <a:p>
-                      <a:pPr lvl="0" indent="0" marL="0">
-                        <a:buNone/>
-                      </a:pPr>
-                      <a:r>
-                        <a:rPr/>
-                        <a:t>D2EHDTPA + BuPhen + octanol + n-dodecane</a:t>
-                      </a:r>
-                    </a:p>
-                  </a:txBody>
-                </a:tc>
-                <a:tc>
-                  <a:txBody>
-                    <a:bodyPr/>
-                    <a:lstStyle/>
-                    <a:p>
-                      <a:pPr lvl="0" indent="0" marL="0">
-                        <a:buNone/>
-                      </a:pPr>
-                      <a:r>
-                        <a:rPr/>
-                        <a:t>Best non-HBTA backup</a:t>
-                      </a:r>
-                    </a:p>
-                  </a:txBody>
-                </a:tc>
-                <a:tc>
-                  <a:txBody>
-                    <a:bodyPr/>
-                    <a:lstStyle/>
-                    <a:p>
-                      <a:pPr lvl="0" indent="0" marL="0">
-                        <a:buNone/>
-                      </a:pPr>
-                      <a:r>
-                        <a:rPr/>
-                        <a:t>Strong multication selectivity, blocked by missing parameter set</a:t>
+                      <a:pPr lvl="0" indent="0" marL="0">
+                        <a:buNone/>
+                      </a:pPr>
+                      <a:r>
+                        <a:rPr/>
+                        <a:t>2026 DES/TOPO/RLi/RNa PC-SAFT parameters and organic (k_{ij}) values</a:t>
+                      </a:r>
+                    </a:p>
+                  </a:txBody>
+                </a:tc>
+                <a:tc>
+                  <a:txBody>
+                    <a:bodyPr/>
+                    <a:lstStyle/>
+                    <a:p>
+                      <a:pPr lvl="0" indent="0" marL="0">
+                        <a:buNone/>
+                      </a:pPr>
+                      <a:r>
+                        <a:rPr/>
+                        <a:t>Package-facing parameter payload</a:t>
                       </a:r>
                     </a:p>
                   </a:txBody>
@@ -7223,57 +7204,27 @@
                     <a:bodyPr/>
                     <a:lstStyle/>
                     <a:p>
-                      <a:pPr lvl="0" indent="0" marL="0" algn="r">
-                        <a:buNone/>
-                      </a:pPr>
-                      <a:r>
-                        <a:rPr/>
-                        <a:t>3</a:t>
-                      </a:r>
-                    </a:p>
-                  </a:txBody>
-                </a:tc>
-                <a:tc>
-                  <a:txBody>
-                    <a:bodyPr/>
-                    <a:lstStyle/>
-                    <a:p>
-                      <a:pPr lvl="0" indent="0" marL="0">
-                        <a:buNone/>
-                      </a:pPr>
-                      <a:r>
-                        <a:rPr/>
-                        <a:t>TBAC + decanoic-acid DES + TOPO</a:t>
-                      </a:r>
-                    </a:p>
-                  </a:txBody>
-                </a:tc>
-                <a:tc>
-                  <a:txBody>
-                    <a:bodyPr/>
-                    <a:lstStyle/>
-                    <a:p>
-                      <a:pPr lvl="0" indent="0" marL="0">
-                        <a:buNone/>
-                      </a:pPr>
-                      <a:r>
-                        <a:rPr/>
-                        <a:t>Parameter-regression pilot</a:t>
-                      </a:r>
-                    </a:p>
-                  </a:txBody>
-                </a:tc>
-                <a:tc>
-                  <a:txBody>
-                    <a:bodyPr/>
-                    <a:lstStyle/>
-                    <a:p>
-                      <a:pPr lvl="0" indent="0" marL="0">
-                        <a:buNone/>
-                      </a:pPr>
-                      <a:r>
-                        <a:rPr/>
-                        <a:t>Rezaee smoke test runs; not the flagship chemistry</a:t>
+                      <a:pPr lvl="0" indent="0" marL="0">
+                        <a:buNone/>
+                      </a:pPr>
+                      <a:r>
+                        <a:rPr/>
+                        <a:t>2026 reaction constants and phase-specific ion-exchange equations</a:t>
+                      </a:r>
+                    </a:p>
+                  </a:txBody>
+                </a:tc>
+                <a:tc>
+                  <a:txBody>
+                    <a:bodyPr/>
+                    <a:lstStyle/>
+                    <a:p>
+                      <a:pPr lvl="0" indent="0" marL="0">
+                        <a:buNone/>
+                      </a:pPr>
+                      <a:r>
+                        <a:rPr/>
+                        <a:t>Reactive-equilibrium diagnostic target</a:t>
                       </a:r>
                     </a:p>
                   </a:txBody>
@@ -7285,57 +7236,27 @@
                     <a:bodyPr/>
                     <a:lstStyle/>
                     <a:p>
-                      <a:pPr lvl="0" indent="0" marL="0" algn="r">
-                        <a:buNone/>
-                      </a:pPr>
-                      <a:r>
-                        <a:rPr/>
-                        <a:t>4</a:t>
-                      </a:r>
-                    </a:p>
-                  </a:txBody>
-                </a:tc>
-                <a:tc>
-                  <a:txBody>
-                    <a:bodyPr/>
-                    <a:lstStyle/>
-                    <a:p>
-                      <a:pPr lvl="0" indent="0" marL="0">
-                        <a:buNone/>
-                      </a:pPr>
-                      <a:r>
-                        <a:rPr/>
-                        <a:t>TBP + FeCl3/HCl</a:t>
-                      </a:r>
-                    </a:p>
-                  </a:txBody>
-                </a:tc>
-                <a:tc>
-                  <a:txBody>
-                    <a:bodyPr/>
-                    <a:lstStyle/>
-                    <a:p>
-                      <a:pPr lvl="0" indent="0" marL="0">
-                        <a:buNone/>
-                      </a:pPr>
-                      <a:r>
-                        <a:rPr/>
-                        <a:t>Mechanistic backup</a:t>
-                      </a:r>
-                    </a:p>
-                  </a:txBody>
-                </a:tc>
-                <a:tc>
-                  <a:txBody>
-                    <a:bodyPr/>
-                    <a:lstStyle/>
-                    <a:p>
-                      <a:pPr lvl="0" indent="0" marL="0">
-                        <a:buNone/>
-                      </a:pPr>
-                      <a:r>
-                        <a:rPr/>
-                        <a:t>Useful high-Mg comparison, process-burden and parameter gaps</a:t>
+                      <a:pPr lvl="0" indent="0" marL="0">
+                        <a:buNone/>
+                      </a:pPr>
+                      <a:r>
+                        <a:rPr/>
+                        <a:t>Aqueous electrolyte phase modeled with ePC-SAFT</a:t>
+                      </a:r>
+                    </a:p>
+                  </a:txBody>
+                </a:tc>
+                <a:tc>
+                  <a:txBody>
+                    <a:bodyPr/>
+                    <a:lstStyle/>
+                    <a:p>
+                      <a:pPr lvl="0" indent="0" marL="0">
+                        <a:buNone/>
+                      </a:pPr>
+                      <a:r>
+                        <a:rPr/>
+                        <a:t>Activity and stability diagnostics for the brine side</a:t>
                       </a:r>
                     </a:p>
                   </a:txBody>
@@ -7430,7 +7351,7 @@
             </a:pPr>
             <a:r>
               <a:rPr sz="2000"/>
-              <a:t>Produced-water lithium extraction needs a thermodynamic model that maps basin chemistry into solvent-extraction transfer variables. The benchmark chemistry is the non-ionic HBTA/TOPO/sulfonated-kerosene system; ePC-SAFT is evaluated as the equilibrium backbone for PrOMMiS and IDAES.</a:t>
+              <a:t>Produced-water lithium extraction needs a thermodynamic model that maps basin chemistry into solvent-extraction transfer variables. The active Li/Na bridge is Rezaee DES/TOPO after divalent pretreatment; ePC-SAFT is evaluated as the equilibrium and diagnostics backbone for PrOMMiS and IDAES.</a:t>
             </a:r>
           </a:p>
           <a:p>
@@ -7444,14 +7365,14 @@
             <a:pPr lvl="0"/>
             <a:r>
               <a:rPr/>
-              <a:t>Solvent chemistry: HBTA/TOPO complexation with selective Li transfer.</a:t>
+              <a:t>Solvent chemistry: Rezaee TBAC/decanoic-acid DES with TOPO coextractant.</a:t>
             </a:r>
           </a:p>
           <a:p>
             <a:pPr lvl="0"/>
             <a:r>
               <a:rPr/>
-              <a:t>Thermodynamic target: electrolyte liquid-liquid equilibrium and ion-specific distribution.</a:t>
+              <a:t>Thermodynamic target: phase-specific reactive equilibrium, electrolyte diagnostics, and ion-specific distribution.</a:t>
             </a:r>
           </a:p>
           <a:p>
@@ -7487,137 +7408,34 @@
       </p:grpSpPr>
       <p:sp>
         <p:nvSpPr>
-          <p:cNvPr id="2" name="Title 1"/>
-          <p:cNvSpPr>
-            <a:spLocks noGrp="1"/>
-          </p:cNvSpPr>
-          <p:nvPr>
-            <p:ph type="title"/>
-          </p:nvPr>
-        </p:nvSpPr>
-        <p:spPr/>
-        <p:txBody>
-          <a:bodyPr/>
-          <a:lstStyle/>
-          <a:p>
-            <a:pPr lvl="0" indent="0" marL="0">
+          <p:cNvPr id="3" name="Content Placeholder 2"/>
+          <p:cNvSpPr>
+            <a:spLocks noGrp="1"/>
+          </p:cNvSpPr>
+          <p:nvPr>
+            <p:ph idx="1"/>
+          </p:nvPr>
+        </p:nvSpPr>
+        <p:spPr/>
+        <p:txBody>
+          <a:bodyPr/>
+          <a:lstStyle/>
+          <a:p>
+            <a:pPr lvl="0" indent="0" marL="1270000">
               <a:buNone/>
             </a:pPr>
             <a:r>
-              <a:rPr/>
-              <a:t>2.5 Limitation Of Fixed-Coefficient Crossflow</a:t>
-            </a:r>
-          </a:p>
-        </p:txBody>
-      </p:sp>
-      <p:sp>
-        <p:nvSpPr>
-          <p:cNvPr id="3" name="Content Placeholder 2"/>
-          <p:cNvSpPr>
-            <a:spLocks noGrp="1"/>
-          </p:cNvSpPr>
-          <p:nvPr>
-            <p:ph idx="1" sz="half"/>
-          </p:nvPr>
-        </p:nvSpPr>
-        <p:spPr/>
-        <p:txBody>
-          <a:bodyPr/>
-          <a:lstStyle/>
-          <a:p>
-            <a:pPr lvl="0" indent="0" marL="0">
+              <a:rPr sz="2000" b="1"/>
+              <a:t>None</a:t>
+            </a:r>
+          </a:p>
+          <a:p>
+            <a:pPr lvl="0" indent="0" marL="1270000">
               <a:buNone/>
             </a:pPr>
             <a:r>
-              <a:rPr b="1"/>
-              <a:t>Placeholder limitation</a:t>
-            </a:r>
-          </a:p>
-          <a:p>
-            <a:pPr lvl="0"/>
-            <a:r>
-              <a:rPr/>
-              <a:t>The legacy Jang-style crossflow placeholder reaches only </a:t>
-            </a:r>
-            <a:r>
-              <a:rPr>
-                <a:latin typeface="Courier"/>
-              </a:rPr>
-              <a:t>39.96%</a:t>
-            </a:r>
-            <a:r>
-              <a:rPr/>
-              <a:t> cumulative Li extraction after ten contacts.</a:t>
-            </a:r>
-          </a:p>
-          <a:p>
-            <a:pPr lvl="0"/>
-            <a:r>
-              <a:rPr/>
-              <a:t>Sodium still reaches </a:t>
-            </a:r>
-            <a:r>
-              <a:rPr>
-                <a:latin typeface="Courier"/>
-              </a:rPr>
-              <a:t>38.05%</a:t>
-            </a:r>
-            <a:r>
-              <a:rPr/>
-              <a:t> cumulative extraction in that same chain.</a:t>
-            </a:r>
-          </a:p>
-          <a:p>
-            <a:pPr lvl="0"/>
-            <a:r>
-              <a:rPr/>
-              <a:t>It is a limitation baseline, not a flagship produced-water case.</a:t>
-            </a:r>
-          </a:p>
-        </p:txBody>
-      </p:sp>
-      <p:sp>
-        <p:nvSpPr>
-          <p:cNvPr id="4" name="Content Placeholder 3"/>
-          <p:cNvSpPr>
-            <a:spLocks noGrp="1"/>
-          </p:cNvSpPr>
-          <p:nvPr>
-            <p:ph idx="2" sz="half"/>
-          </p:nvPr>
-        </p:nvSpPr>
-        <p:spPr/>
-        <p:txBody>
-          <a:bodyPr/>
-          <a:lstStyle/>
-          <a:p>
-            <a:pPr lvl="0" indent="0" marL="0">
-              <a:buNone/>
-            </a:pPr>
-            <a:r>
-              <a:rPr b="1"/>
-              <a:t>Why it was not enough</a:t>
-            </a:r>
-          </a:p>
-          <a:p>
-            <a:pPr lvl="0"/>
-            <a:r>
-              <a:rPr/>
-              <a:t>fixed surrogate chemistry</a:t>
-            </a:r>
-          </a:p>
-          <a:p>
-            <a:pPr lvl="0"/>
-            <a:r>
-              <a:rPr/>
-              <a:t>weak Li-over-Na separation</a:t>
-            </a:r>
-          </a:p>
-          <a:p>
-            <a:pPr lvl="0"/>
-            <a:r>
-              <a:rPr/>
-              <a:t>no bridge to trust-region sampling or ALAMO</a:t>
+              <a:rPr sz="2000"/>
+              <a:t>Rezaee is now the active Li/Na bridge. Direct published-constant closure is still a documented activity-reference gap.</a:t>
             </a:r>
           </a:p>
         </p:txBody>
@@ -7654,12 +7472,7 @@
             <p:ph type="title"/>
           </p:nvPr>
         </p:nvSpPr>
-        <p:spPr>
-          <a:xfrm>
-            <a:off x="722313" y="3305176"/>
-            <a:ext cx="7772400" cy="1021556"/>
-          </a:xfrm>
-        </p:spPr>
+        <p:spPr/>
         <p:txBody>
           <a:bodyPr/>
           <a:lstStyle/>
@@ -7669,11 +7482,278 @@
             </a:pPr>
             <a:r>
               <a:rPr/>
-              <a:t>3. Selective Extraction Model</a:t>
-            </a:r>
-          </a:p>
-        </p:txBody>
-      </p:sp>
+              <a:t>2.4 Active Rezaee Workflow Chain</a:t>
+            </a:r>
+          </a:p>
+        </p:txBody>
+      </p:sp>
+      <p:graphicFrame>
+        <p:nvGraphicFramePr>
+          <p:cNvPr id="6" name="Content Placeholder 5"/>
+          <p:cNvGraphicFramePr>
+            <a:graphicFrameLocks noGrp="1"/>
+          </p:cNvGraphicFramePr>
+          <p:nvPr>
+            <p:ph idx="1"/>
+          </p:nvPr>
+        </p:nvGraphicFramePr>
+        <p:xfrm>
+          <a:off x="457200" y="1193800"/>
+          <a:ext cx="8229600" cy="3390900"/>
+        </p:xfrm>
+        <a:graphic>
+          <a:graphicData uri="http://schemas.openxmlformats.org/drawingml/2006/table">
+            <a:tbl>
+              <a:tblPr firstRow="1" bandRow="1">
+                <a:tableStyleId>{5C22544A-7EE6-4342-B048-85BDC9FD1C3A}</a:tableStyleId>
+              </a:tblPr>
+              <a:tblGrid>
+                <a:gridCol w="3289300"/>
+                <a:gridCol w="2463800"/>
+                <a:gridCol w="2463800"/>
+              </a:tblGrid>
+              <a:tr h="0">
+                <a:tc>
+                  <a:txBody>
+                    <a:bodyPr/>
+                    <a:lstStyle/>
+                    <a:p>
+                      <a:pPr lvl="0" indent="0" marL="0" algn="r">
+                        <a:buNone/>
+                      </a:pPr>
+                      <a:r>
+                        <a:rPr/>
+                        <a:t>Step</a:t>
+                      </a:r>
+                    </a:p>
+                  </a:txBody>
+                  <a:tcPr/>
+                </a:tc>
+                <a:tc>
+                  <a:txBody>
+                    <a:bodyPr/>
+                    <a:lstStyle/>
+                    <a:p>
+                      <a:pPr lvl="0" indent="0" marL="0">
+                        <a:buNone/>
+                      </a:pPr>
+                      <a:r>
+                        <a:rPr/>
+                        <a:t>Current artifact</a:t>
+                      </a:r>
+                    </a:p>
+                  </a:txBody>
+                  <a:tcPr/>
+                </a:tc>
+                <a:tc>
+                  <a:txBody>
+                    <a:bodyPr/>
+                    <a:lstStyle/>
+                    <a:p>
+                      <a:pPr lvl="0" indent="0" marL="0">
+                        <a:buNone/>
+                      </a:pPr>
+                      <a:r>
+                        <a:rPr/>
+                        <a:t>Use</a:t>
+                      </a:r>
+                    </a:p>
+                  </a:txBody>
+                  <a:tcPr/>
+                </a:tc>
+              </a:tr>
+              <a:tr h="0">
+                <a:tc>
+                  <a:txBody>
+                    <a:bodyPr/>
+                    <a:lstStyle/>
+                    <a:p>
+                      <a:pPr lvl="0" indent="0" marL="0" algn="r">
+                        <a:buNone/>
+                      </a:pPr>
+                      <a:r>
+                        <a:rPr/>
+                        <a:t>1</a:t>
+                      </a:r>
+                    </a:p>
+                  </a:txBody>
+                </a:tc>
+                <a:tc>
+                  <a:txBody>
+                    <a:bodyPr/>
+                    <a:lstStyle/>
+                    <a:p>
+                      <a:pPr lvl="0" indent="0" marL="0">
+                        <a:buNone/>
+                      </a:pPr>
+                      <a:r>
+                        <a:rPr/>
+                        <a:t>Rezaee 2025/2026 source tables</a:t>
+                      </a:r>
+                    </a:p>
+                  </a:txBody>
+                </a:tc>
+                <a:tc>
+                  <a:txBody>
+                    <a:bodyPr/>
+                    <a:lstStyle/>
+                    <a:p>
+                      <a:pPr lvl="0" indent="0" marL="0">
+                        <a:buNone/>
+                      </a:pPr>
+                      <a:r>
+                        <a:rPr/>
+                        <a:t>Li/Na extraction and PC-SAFT/ePC-SAFT parameter evidence</a:t>
+                      </a:r>
+                    </a:p>
+                  </a:txBody>
+                </a:tc>
+              </a:tr>
+              <a:tr h="0">
+                <a:tc>
+                  <a:txBody>
+                    <a:bodyPr/>
+                    <a:lstStyle/>
+                    <a:p>
+                      <a:pPr lvl="0" indent="0" marL="0" algn="r">
+                        <a:buNone/>
+                      </a:pPr>
+                      <a:r>
+                        <a:rPr/>
+                        <a:t>2</a:t>
+                      </a:r>
+                    </a:p>
+                  </a:txBody>
+                </a:tc>
+                <a:tc>
+                  <a:txBody>
+                    <a:bodyPr/>
+                    <a:lstStyle/>
+                    <a:p>
+                      <a:pPr lvl="0" indent="0" marL="0">
+                        <a:buNone/>
+                      </a:pPr>
+                      <a:r>
+                        <a:rPr/>
+                        <a:t>Section 3.2 DOE-basis surface</a:t>
+                      </a:r>
+                    </a:p>
+                  </a:txBody>
+                </a:tc>
+                <a:tc>
+                  <a:txBody>
+                    <a:bodyPr/>
+                    <a:lstStyle/>
+                    <a:p>
+                      <a:pPr lvl="0" indent="0" marL="0">
+                        <a:buNone/>
+                      </a:pPr>
+                      <a:r>
+                        <a:rPr/>
+                        <a:t>calibrated log-(D_i) response basis</a:t>
+                      </a:r>
+                    </a:p>
+                  </a:txBody>
+                </a:tc>
+              </a:tr>
+              <a:tr h="0">
+                <a:tc>
+                  <a:txBody>
+                    <a:bodyPr/>
+                    <a:lstStyle/>
+                    <a:p>
+                      <a:pPr lvl="0" indent="0" marL="0" algn="r">
+                        <a:buNone/>
+                      </a:pPr>
+                      <a:r>
+                        <a:rPr/>
+                        <a:t>3</a:t>
+                      </a:r>
+                    </a:p>
+                  </a:txBody>
+                </a:tc>
+                <a:tc>
+                  <a:txBody>
+                    <a:bodyPr/>
+                    <a:lstStyle/>
+                    <a:p>
+                      <a:pPr lvl="0" indent="0" marL="0">
+                        <a:buNone/>
+                      </a:pPr>
+                      <a:r>
+                        <a:rPr/>
+                        <a:t>523-row TDS-Li-O/A matrix</a:t>
+                      </a:r>
+                    </a:p>
+                  </a:txBody>
+                </a:tc>
+                <a:tc>
+                  <a:txBody>
+                    <a:bodyPr/>
+                    <a:lstStyle/>
+                    <a:p>
+                      <a:pPr lvl="0" indent="0" marL="0">
+                        <a:buNone/>
+                      </a:pPr>
+                      <a:r>
+                        <a:rPr/>
+                        <a:t>produced-water process screening</a:t>
+                      </a:r>
+                    </a:p>
+                  </a:txBody>
+                </a:tc>
+              </a:tr>
+              <a:tr h="0">
+                <a:tc>
+                  <a:txBody>
+                    <a:bodyPr/>
+                    <a:lstStyle/>
+                    <a:p>
+                      <a:pPr lvl="0" indent="0" marL="0" algn="r">
+                        <a:buNone/>
+                      </a:pPr>
+                      <a:r>
+                        <a:rPr/>
+                        <a:t>4</a:t>
+                      </a:r>
+                    </a:p>
+                  </a:txBody>
+                </a:tc>
+                <a:tc>
+                  <a:txBody>
+                    <a:bodyPr/>
+                    <a:lstStyle/>
+                    <a:p>
+                      <a:pPr lvl="0" indent="0" marL="0">
+                        <a:buNone/>
+                      </a:pPr>
+                      <a:r>
+                        <a:rPr/>
+                        <a:t>PrOMMiS/IDAES transfer table</a:t>
+                      </a:r>
+                    </a:p>
+                  </a:txBody>
+                </a:tc>
+                <a:tc>
+                  <a:txBody>
+                    <a:bodyPr/>
+                    <a:lstStyle/>
+                    <a:p>
+                      <a:pPr lvl="0" indent="0" marL="0">
+                        <a:buNone/>
+                      </a:pPr>
+                      <a:r>
+                        <a:rPr/>
+                        <a:t>staged-contacting and costing handoff</a:t>
+                      </a:r>
+                    </a:p>
+                  </a:txBody>
+                </a:tc>
+              </a:tr>
+            </a:tbl>
+          </a:graphicData>
+        </a:graphic>
+      </p:graphicFrame>
     </p:spTree>
   </p:cSld>
 </p:sld>
@@ -7716,7 +7796,7 @@
             </a:pPr>
             <a:r>
               <a:rPr/>
-              <a:t>3.1 One-Stage Selective Split</a:t>
+              <a:t>2.5 Why The Calibrated Surrogate Is The Right Bridge</a:t>
             </a:r>
           </a:p>
         </p:txBody>
@@ -7741,148 +7821,74 @@
             </a:pPr>
             <a:r>
               <a:rPr b="1"/>
-              <a:t>MS-2 O/A = 1 stage result</a:t>
+              <a:t>What it now gives</a:t>
             </a:r>
           </a:p>
           <a:p>
             <a:pPr lvl="0"/>
             <a:r>
               <a:rPr/>
-              <a:t>Li extraction: </a:t>
-            </a:r>
-            <a:r>
-              <a:rPr>
-                <a:latin typeface="Courier"/>
-              </a:rPr>
-              <a:t>47.2846%</a:t>
+              <a:t>finite Li and Na extraction for all 523 rows</a:t>
             </a:r>
           </a:p>
           <a:p>
             <a:pPr lvl="0"/>
             <a:r>
               <a:rPr/>
-              <a:t>Na extraction: </a:t>
-            </a:r>
-            <a:r>
-              <a:rPr>
-                <a:latin typeface="Courier"/>
-              </a:rPr>
-              <a:t>0.0131%</a:t>
+              <a:t>explicit (D_{Li}), (D_{Na}), and selectivity</a:t>
             </a:r>
           </a:p>
           <a:p>
             <a:pPr lvl="0"/>
             <a:r>
               <a:rPr/>
-              <a:t>(D_{Li} = 0.8970)</a:t>
+              <a:t>transfer variables ready for staged process models</a:t>
+            </a:r>
+          </a:p>
+        </p:txBody>
+      </p:sp>
+      <p:sp>
+        <p:nvSpPr>
+          <p:cNvPr id="4" name="Content Placeholder 3"/>
+          <p:cNvSpPr>
+            <a:spLocks noGrp="1"/>
+          </p:cNvSpPr>
+          <p:nvPr>
+            <p:ph idx="2" sz="half"/>
+          </p:nvPr>
+        </p:nvSpPr>
+        <p:spPr/>
+        <p:txBody>
+          <a:bodyPr/>
+          <a:lstStyle/>
+          <a:p>
+            <a:pPr lvl="0" indent="0" marL="0">
+              <a:buNone/>
+            </a:pPr>
+            <a:r>
+              <a:rPr b="1"/>
+              <a:t>What remains bounded</a:t>
             </a:r>
           </a:p>
           <a:p>
             <a:pPr lvl="0"/>
             <a:r>
               <a:rPr/>
-              <a:t>(S_{Li/Na} = 6840.1)</a:t>
+              <a:t>raw Smackover is not fed directly to extraction</a:t>
             </a:r>
           </a:p>
           <a:p>
             <a:pPr lvl="0"/>
             <a:r>
               <a:rPr/>
-              <a:t>Raffinate Li: </a:t>
-            </a:r>
-            <a:r>
-              <a:rPr>
-                <a:latin typeface="Courier"/>
-              </a:rPr>
-              <a:t>88.56 mg/L</a:t>
+              <a:t>divalents are pretreatment species</a:t>
             </a:r>
           </a:p>
           <a:p>
             <a:pPr lvl="0"/>
             <a:r>
               <a:rPr/>
-              <a:t>Activity correction: ePC-SAFT aqueous gamma</a:t>
-            </a:r>
-          </a:p>
-          <a:p>
-            <a:pPr lvl="0" indent="0" marL="1270000">
-              <a:buNone/>
-            </a:pPr>
-            <a:r>
-              <a:rPr sz="2000" b="1"/>
-              <a:t>None</a:t>
-            </a:r>
-          </a:p>
-          <a:p>
-            <a:pPr lvl="0" indent="0" marL="1270000">
-              <a:buNone/>
-            </a:pPr>
-            <a:r>
-              <a:rPr sz="2000"/>
-              <a:t>Source-regressed Li/Na stage solve; not a full multication reactive LLE flash.</a:t>
-            </a:r>
-          </a:p>
-        </p:txBody>
-      </p:sp>
-      <p:sp>
-        <p:nvSpPr>
-          <p:cNvPr id="4" name="Content Placeholder 3"/>
-          <p:cNvSpPr>
-            <a:spLocks noGrp="1"/>
-          </p:cNvSpPr>
-          <p:nvPr>
-            <p:ph idx="2" sz="half"/>
-          </p:nvPr>
-        </p:nvSpPr>
-        <p:spPr/>
-        <p:txBody>
-          <a:bodyPr/>
-          <a:lstStyle/>
-          <a:p>
-            <a:pPr lvl="0" indent="0" marL="0">
-              <a:buNone/>
-            </a:pPr>
-            <a:r>
-              <a:rPr b="1"/>
-              <a:t>What changed from the old wrapper</a:t>
-            </a:r>
-          </a:p>
-          <a:p>
-            <a:pPr lvl="0"/>
-            <a:r>
-              <a:rPr/>
-              <a:t>The chemistry now carries the literature-backed </a:t>
-            </a:r>
-            <a:r>
-              <a:rPr>
-                <a:latin typeface="Courier"/>
-              </a:rPr>
-              <a:t>2 HBTA : 1 TOPO : 1 Li</a:t>
-            </a:r>
-            <a:r>
-              <a:rPr/>
-              <a:t> complex stoichiometry.</a:t>
-            </a:r>
-          </a:p>
-          <a:p>
-            <a:pPr lvl="0"/>
-            <a:r>
-              <a:rPr/>
-              <a:t>The aqueous Li/Na activity correction is evaluated by ePC-SAFT when available.</a:t>
-            </a:r>
-          </a:p>
-          <a:p>
-            <a:pPr lvl="0"/>
-            <a:r>
-              <a:rPr/>
-              <a:t>The old selective wrapper remains only as historical support and fallback context.</a:t>
-            </a:r>
-          </a:p>
-          <a:p>
-            <a:pPr lvl="0"/>
-            <a:r>
-              <a:rPr/>
-              <a:t>The current stage-output table carries extraction, distribution, selectivity, and validity labels.</a:t>
+              <a:t>high Na/Li rows carry extrapolation warnings</a:t>
             </a:r>
           </a:p>
         </p:txBody>
@@ -7919,7 +7925,12 @@
             <p:ph type="title"/>
           </p:nvPr>
         </p:nvSpPr>
-        <p:spPr/>
+        <p:spPr>
+          <a:xfrm>
+            <a:off x="722313" y="3305176"/>
+            <a:ext cx="7772400" cy="1021556"/>
+          </a:xfrm>
+        </p:spPr>
         <p:txBody>
           <a:bodyPr/>
           <a:lstStyle/>
@@ -7929,464 +7940,11 @@
             </a:pPr>
             <a:r>
               <a:rPr/>
-              <a:t>3.2 Li/Na Regression Closure</a:t>
-            </a:r>
-          </a:p>
-        </p:txBody>
-      </p:sp>
-      <p:graphicFrame>
-        <p:nvGraphicFramePr>
-          <p:cNvPr id="6" name="Content Placeholder 5"/>
-          <p:cNvGraphicFramePr>
-            <a:graphicFrameLocks noGrp="1"/>
-          </p:cNvGraphicFramePr>
-          <p:nvPr>
-            <p:ph idx="1"/>
-          </p:nvPr>
-        </p:nvGraphicFramePr>
-        <p:xfrm>
-          <a:off x="457200" y="1193800"/>
-          <a:ext cx="8229600" cy="3390900"/>
-        </p:xfrm>
-        <a:graphic>
-          <a:graphicData uri="http://schemas.openxmlformats.org/drawingml/2006/table">
-            <a:tbl>
-              <a:tblPr firstRow="1" bandRow="1">
-                <a:tableStyleId>{5C22544A-7EE6-4342-B048-85BDC9FD1C3A}</a:tableStyleId>
-              </a:tblPr>
-              <a:tblGrid>
-                <a:gridCol w="1371600"/>
-                <a:gridCol w="1371600"/>
-                <a:gridCol w="1828800"/>
-                <a:gridCol w="1828800"/>
-                <a:gridCol w="1828800"/>
-              </a:tblGrid>
-              <a:tr h="0">
-                <a:tc>
-                  <a:txBody>
-                    <a:bodyPr/>
-                    <a:lstStyle/>
-                    <a:p>
-                      <a:pPr lvl="0" indent="0" marL="0">
-                        <a:buNone/>
-                      </a:pPr>
-                      <a:r>
-                        <a:rPr/>
-                        <a:t>Anchor</a:t>
-                      </a:r>
-                    </a:p>
-                  </a:txBody>
-                  <a:tcPr/>
-                </a:tc>
-                <a:tc>
-                  <a:txBody>
-                    <a:bodyPr/>
-                    <a:lstStyle/>
-                    <a:p>
-                      <a:pPr lvl="0" indent="0" marL="0">
-                        <a:buNone/>
-                      </a:pPr>
-                      <a:r>
-                        <a:rPr/>
-                        <a:t>Zotero key</a:t>
-                      </a:r>
-                    </a:p>
-                  </a:txBody>
-                  <a:tcPr/>
-                </a:tc>
-                <a:tc>
-                  <a:txBody>
-                    <a:bodyPr/>
-                    <a:lstStyle/>
-                    <a:p>
-                      <a:pPr lvl="0" indent="0" marL="0" algn="r">
-                        <a:buNone/>
-                      </a:pPr>
-                      <a:r>
-                        <a:rPr/>
-                        <a:t>Target</a:t>
-                      </a:r>
-                    </a:p>
-                  </a:txBody>
-                  <a:tcPr/>
-                </a:tc>
-                <a:tc>
-                  <a:txBody>
-                    <a:bodyPr/>
-                    <a:lstStyle/>
-                    <a:p>
-                      <a:pPr lvl="0" indent="0" marL="0" algn="r">
-                        <a:buNone/>
-                      </a:pPr>
-                      <a:r>
-                        <a:rPr/>
-                        <a:t>Prediction</a:t>
-                      </a:r>
-                    </a:p>
-                  </a:txBody>
-                  <a:tcPr/>
-                </a:tc>
-                <a:tc>
-                  <a:txBody>
-                    <a:bodyPr/>
-                    <a:lstStyle/>
-                    <a:p>
-                      <a:pPr lvl="0" indent="0" marL="0" algn="r">
-                        <a:buNone/>
-                      </a:pPr>
-                      <a:r>
-                        <a:rPr/>
-                        <a:t>Residual</a:t>
-                      </a:r>
-                    </a:p>
-                  </a:txBody>
-                  <a:tcPr/>
-                </a:tc>
-              </a:tr>
-              <a:tr h="0">
-                <a:tc>
-                  <a:txBody>
-                    <a:bodyPr/>
-                    <a:lstStyle/>
-                    <a:p>
-                      <a:pPr lvl="0" indent="0" marL="0">
-                        <a:buNone/>
-                      </a:pPr>
-                      <a:r>
-                        <a:rPr/>
-                        <a:t>Stage 1 Li cumulative extraction</a:t>
-                      </a:r>
-                    </a:p>
-                  </a:txBody>
-                </a:tc>
-                <a:tc>
-                  <a:txBody>
-                    <a:bodyPr/>
-                    <a:lstStyle/>
-                    <a:p>
-                      <a:pPr lvl="0" indent="0" marL="0">
-                        <a:buNone/>
-                      </a:pPr>
-                      <a:r>
-                        <a:rPr>
-                          <a:latin typeface="Courier"/>
-                        </a:rPr>
-                        <a:t>JUNBXVTI</a:t>
-                      </a:r>
-                    </a:p>
-                  </a:txBody>
-                </a:tc>
-                <a:tc>
-                  <a:txBody>
-                    <a:bodyPr/>
-                    <a:lstStyle/>
-                    <a:p>
-                      <a:pPr lvl="0" indent="0" marL="0" algn="r">
-                        <a:buNone/>
-                      </a:pPr>
-                      <a:r>
-                        <a:rPr>
-                          <a:latin typeface="Courier"/>
-                        </a:rPr>
-                        <a:t>54.95%</a:t>
-                      </a:r>
-                    </a:p>
-                  </a:txBody>
-                </a:tc>
-                <a:tc>
-                  <a:txBody>
-                    <a:bodyPr/>
-                    <a:lstStyle/>
-                    <a:p>
-                      <a:pPr lvl="0" indent="0" marL="0" algn="r">
-                        <a:buNone/>
-                      </a:pPr>
-                      <a:r>
-                        <a:rPr>
-                          <a:latin typeface="Courier"/>
-                        </a:rPr>
-                        <a:t>54.8882%</a:t>
-                      </a:r>
-                    </a:p>
-                  </a:txBody>
-                </a:tc>
-                <a:tc>
-                  <a:txBody>
-                    <a:bodyPr/>
-                    <a:lstStyle/>
-                    <a:p>
-                      <a:pPr lvl="0" indent="0" marL="0" algn="r">
-                        <a:buNone/>
-                      </a:pPr>
-                      <a:r>
-                        <a:rPr>
-                          <a:latin typeface="Courier"/>
-                        </a:rPr>
-                        <a:t>-0.0618 pp</a:t>
-                      </a:r>
-                    </a:p>
-                  </a:txBody>
-                </a:tc>
-              </a:tr>
-              <a:tr h="0">
-                <a:tc>
-                  <a:txBody>
-                    <a:bodyPr/>
-                    <a:lstStyle/>
-                    <a:p>
-                      <a:pPr lvl="0" indent="0" marL="0">
-                        <a:buNone/>
-                      </a:pPr>
-                      <a:r>
-                        <a:rPr/>
-                        <a:t>Stage 2 Li cumulative extraction</a:t>
-                      </a:r>
-                    </a:p>
-                  </a:txBody>
-                </a:tc>
-                <a:tc>
-                  <a:txBody>
-                    <a:bodyPr/>
-                    <a:lstStyle/>
-                    <a:p>
-                      <a:pPr lvl="0" indent="0" marL="0">
-                        <a:buNone/>
-                      </a:pPr>
-                      <a:r>
-                        <a:rPr>
-                          <a:latin typeface="Courier"/>
-                        </a:rPr>
-                        <a:t>JUNBXVTI</a:t>
-                      </a:r>
-                    </a:p>
-                  </a:txBody>
-                </a:tc>
-                <a:tc>
-                  <a:txBody>
-                    <a:bodyPr/>
-                    <a:lstStyle/>
-                    <a:p>
-                      <a:pPr lvl="0" indent="0" marL="0" algn="r">
-                        <a:buNone/>
-                      </a:pPr>
-                      <a:r>
-                        <a:rPr>
-                          <a:latin typeface="Courier"/>
-                        </a:rPr>
-                        <a:t>85.60%</a:t>
-                      </a:r>
-                    </a:p>
-                  </a:txBody>
-                </a:tc>
-                <a:tc>
-                  <a:txBody>
-                    <a:bodyPr/>
-                    <a:lstStyle/>
-                    <a:p>
-                      <a:pPr lvl="0" indent="0" marL="0" algn="r">
-                        <a:buNone/>
-                      </a:pPr>
-                      <a:r>
-                        <a:rPr>
-                          <a:latin typeface="Courier"/>
-                        </a:rPr>
-                        <a:t>85.7224%</a:t>
-                      </a:r>
-                    </a:p>
-                  </a:txBody>
-                </a:tc>
-                <a:tc>
-                  <a:txBody>
-                    <a:bodyPr/>
-                    <a:lstStyle/>
-                    <a:p>
-                      <a:pPr lvl="0" indent="0" marL="0" algn="r">
-                        <a:buNone/>
-                      </a:pPr>
-                      <a:r>
-                        <a:rPr>
-                          <a:latin typeface="Courier"/>
-                        </a:rPr>
-                        <a:t>+0.1224 pp</a:t>
-                      </a:r>
-                    </a:p>
-                  </a:txBody>
-                </a:tc>
-              </a:tr>
-              <a:tr h="0">
-                <a:tc>
-                  <a:txBody>
-                    <a:bodyPr/>
-                    <a:lstStyle/>
-                    <a:p>
-                      <a:pPr lvl="0" indent="0" marL="0">
-                        <a:buNone/>
-                      </a:pPr>
-                      <a:r>
-                        <a:rPr/>
-                        <a:t>Stage 3 Li cumulative extraction</a:t>
-                      </a:r>
-                    </a:p>
-                  </a:txBody>
-                </a:tc>
-                <a:tc>
-                  <a:txBody>
-                    <a:bodyPr/>
-                    <a:lstStyle/>
-                    <a:p>
-                      <a:pPr lvl="0" indent="0" marL="0">
-                        <a:buNone/>
-                      </a:pPr>
-                      <a:r>
-                        <a:rPr>
-                          <a:latin typeface="Courier"/>
-                        </a:rPr>
-                        <a:t>JUNBXVTI</a:t>
-                      </a:r>
-                    </a:p>
-                  </a:txBody>
-                </a:tc>
-                <a:tc>
-                  <a:txBody>
-                    <a:bodyPr/>
-                    <a:lstStyle/>
-                    <a:p>
-                      <a:pPr lvl="0" indent="0" marL="0" algn="r">
-                        <a:buNone/>
-                      </a:pPr>
-                      <a:r>
-                        <a:rPr>
-                          <a:latin typeface="Courier"/>
-                        </a:rPr>
-                        <a:t>97.17%</a:t>
-                      </a:r>
-                    </a:p>
-                  </a:txBody>
-                </a:tc>
-                <a:tc>
-                  <a:txBody>
-                    <a:bodyPr/>
-                    <a:lstStyle/>
-                    <a:p>
-                      <a:pPr lvl="0" indent="0" marL="0" algn="r">
-                        <a:buNone/>
-                      </a:pPr>
-                      <a:r>
-                        <a:rPr>
-                          <a:latin typeface="Courier"/>
-                        </a:rPr>
-                        <a:t>97.0385%</a:t>
-                      </a:r>
-                    </a:p>
-                  </a:txBody>
-                </a:tc>
-                <a:tc>
-                  <a:txBody>
-                    <a:bodyPr/>
-                    <a:lstStyle/>
-                    <a:p>
-                      <a:pPr lvl="0" indent="0" marL="0" algn="r">
-                        <a:buNone/>
-                      </a:pPr>
-                      <a:r>
-                        <a:rPr>
-                          <a:latin typeface="Courier"/>
-                        </a:rPr>
-                        <a:t>-0.1315 pp</a:t>
-                      </a:r>
-                    </a:p>
-                  </a:txBody>
-                </a:tc>
-              </a:tr>
-              <a:tr h="0">
-                <a:tc>
-                  <a:txBody>
-                    <a:bodyPr/>
-                    <a:lstStyle/>
-                    <a:p>
-                      <a:pPr lvl="0" indent="0" marL="0">
-                        <a:buNone/>
-                      </a:pPr>
-                      <a:r>
-                        <a:rPr/>
-                        <a:t>Li/Na selectivity lower-bound anchor</a:t>
-                      </a:r>
-                    </a:p>
-                  </a:txBody>
-                </a:tc>
-                <a:tc>
-                  <a:txBody>
-                    <a:bodyPr/>
-                    <a:lstStyle/>
-                    <a:p>
-                      <a:pPr lvl="0" indent="0" marL="0">
-                        <a:buNone/>
-                      </a:pPr>
-                      <a:r>
-                        <a:rPr>
-                          <a:latin typeface="Courier"/>
-                        </a:rPr>
-                        <a:t>9LJWDC7E</a:t>
-                      </a:r>
-                    </a:p>
-                  </a:txBody>
-                </a:tc>
-                <a:tc>
-                  <a:txBody>
-                    <a:bodyPr/>
-                    <a:lstStyle/>
-                    <a:p>
-                      <a:pPr lvl="0" indent="0" marL="0" algn="r">
-                        <a:buNone/>
-                      </a:pPr>
-                      <a:r>
-                        <a:rPr>
-                          <a:latin typeface="Courier"/>
-                        </a:rPr>
-                        <a:t>2100</a:t>
-                      </a:r>
-                    </a:p>
-                  </a:txBody>
-                </a:tc>
-                <a:tc>
-                  <a:txBody>
-                    <a:bodyPr/>
-                    <a:lstStyle/>
-                    <a:p>
-                      <a:pPr lvl="0" indent="0" marL="0" algn="r">
-                        <a:buNone/>
-                      </a:pPr>
-                      <a:r>
-                        <a:rPr>
-                          <a:latin typeface="Courier"/>
-                        </a:rPr>
-                        <a:t>2100.008</a:t>
-                      </a:r>
-                    </a:p>
-                  </a:txBody>
-                </a:tc>
-                <a:tc>
-                  <a:txBody>
-                    <a:bodyPr/>
-                    <a:lstStyle/>
-                    <a:p>
-                      <a:pPr lvl="0" indent="0" marL="0" algn="r">
-                        <a:buNone/>
-                      </a:pPr>
-                      <a:r>
-                        <a:rPr>
-                          <a:latin typeface="Courier"/>
-                        </a:rPr>
-                        <a:t>+0.008</a:t>
-                      </a:r>
-                    </a:p>
-                  </a:txBody>
-                </a:tc>
-              </a:tr>
-            </a:tbl>
-          </a:graphicData>
-        </a:graphic>
-      </p:graphicFrame>
+              <a:t>3. Selective Extraction Model</a:t>
+            </a:r>
+          </a:p>
+        </p:txBody>
+      </p:sp>
     </p:spTree>
   </p:cSld>
 </p:sld>
@@ -8411,18 +7969,112 @@
       </p:grpSpPr>
       <p:sp>
         <p:nvSpPr>
+          <p:cNvPr id="2" name="Title 1"/>
+          <p:cNvSpPr>
+            <a:spLocks noGrp="1"/>
+          </p:cNvSpPr>
+          <p:nvPr>
+            <p:ph type="title"/>
+          </p:nvPr>
+        </p:nvSpPr>
+        <p:spPr/>
+        <p:txBody>
+          <a:bodyPr/>
+          <a:lstStyle/>
+          <a:p>
+            <a:pPr lvl="0" indent="0" marL="0">
+              <a:buNone/>
+            </a:pPr>
+            <a:r>
+              <a:rPr/>
+              <a:t>3.1 One-Stage Selective Split</a:t>
+            </a:r>
+          </a:p>
+        </p:txBody>
+      </p:sp>
+      <p:sp>
+        <p:nvSpPr>
           <p:cNvPr id="3" name="Content Placeholder 2"/>
           <p:cNvSpPr>
             <a:spLocks noGrp="1"/>
           </p:cNvSpPr>
           <p:nvPr>
-            <p:ph idx="1"/>
-          </p:nvPr>
-        </p:nvSpPr>
-        <p:spPr/>
-        <p:txBody>
-          <a:bodyPr/>
-          <a:lstStyle/>
+            <p:ph idx="1" sz="half"/>
+          </p:nvPr>
+        </p:nvSpPr>
+        <p:spPr/>
+        <p:txBody>
+          <a:bodyPr/>
+          <a:lstStyle/>
+          <a:p>
+            <a:pPr lvl="0" indent="0" marL="0">
+              <a:buNone/>
+            </a:pPr>
+            <a:r>
+              <a:rPr b="1"/>
+              <a:t>MS-2 O/A = 1 stage result</a:t>
+            </a:r>
+          </a:p>
+          <a:p>
+            <a:pPr lvl="0"/>
+            <a:r>
+              <a:rPr/>
+              <a:t>Li extraction: </a:t>
+            </a:r>
+            <a:r>
+              <a:rPr>
+                <a:latin typeface="Courier"/>
+              </a:rPr>
+              <a:t>45.3660%</a:t>
+            </a:r>
+          </a:p>
+          <a:p>
+            <a:pPr lvl="0"/>
+            <a:r>
+              <a:rPr/>
+              <a:t>Na extraction: </a:t>
+            </a:r>
+            <a:r>
+              <a:rPr>
+                <a:latin typeface="Courier"/>
+              </a:rPr>
+              <a:t>8.9780%</a:t>
+            </a:r>
+          </a:p>
+          <a:p>
+            <a:pPr lvl="0"/>
+            <a:r>
+              <a:rPr/>
+              <a:t>(D_{Li} = 0.8304)</a:t>
+            </a:r>
+          </a:p>
+          <a:p>
+            <a:pPr lvl="0"/>
+            <a:r>
+              <a:rPr/>
+              <a:t>(D_{Na} = 0.09864)</a:t>
+            </a:r>
+          </a:p>
+          <a:p>
+            <a:pPr lvl="0"/>
+            <a:r>
+              <a:rPr/>
+              <a:t>(S_{Li/Na} = 8.4185)</a:t>
+            </a:r>
+          </a:p>
+          <a:p>
+            <a:pPr lvl="0"/>
+            <a:r>
+              <a:rPr/>
+              <a:t>Trust label: </a:t>
+            </a:r>
+            <a:r>
+              <a:rPr>
+                <a:latin typeface="Courier"/>
+              </a:rPr>
+              <a:t>anchored_by_rezaee_real_brine_high_na_li</a:t>
+            </a:r>
+          </a:p>
           <a:p>
             <a:pPr lvl="0" indent="0" marL="1270000">
               <a:buNone/>
@@ -8438,7 +8090,60 @@
             </a:pPr>
             <a:r>
               <a:rPr sz="2000"/>
-              <a:t>This is the current predictive closure: Li/Na staged transfer from one source-regressed parameter payload. Ca, Mg, Ba, Sr, diluent, and complex parameters remain explicit limits.</a:t>
+              <a:t>Source-regressed Rezaee Li/Na bridge after divalent pretreatment; not a divalent reactive LLE flash.</a:t>
+            </a:r>
+          </a:p>
+        </p:txBody>
+      </p:sp>
+      <p:sp>
+        <p:nvSpPr>
+          <p:cNvPr id="4" name="Content Placeholder 3"/>
+          <p:cNvSpPr>
+            <a:spLocks noGrp="1"/>
+          </p:cNvSpPr>
+          <p:nvPr>
+            <p:ph idx="2" sz="half"/>
+          </p:nvPr>
+        </p:nvSpPr>
+        <p:spPr/>
+        <p:txBody>
+          <a:bodyPr/>
+          <a:lstStyle/>
+          <a:p>
+            <a:pPr lvl="0" indent="0" marL="0">
+              <a:buNone/>
+            </a:pPr>
+            <a:r>
+              <a:rPr b="1"/>
+              <a:t>What changed from the old wrapper</a:t>
+            </a:r>
+          </a:p>
+          <a:p>
+            <a:pPr lvl="0"/>
+            <a:r>
+              <a:rPr/>
+              <a:t>The active bridge now uses Rezaee DES/TOPO source responses instead of the old HBTA/TOPO placeholder.</a:t>
+            </a:r>
+          </a:p>
+          <a:p>
+            <a:pPr lvl="0"/>
+            <a:r>
+              <a:rPr/>
+              <a:t>The package evaluates ePC-SAFT electrolyte stability and PC-SAFT/ePC-SAFT activity diagnostics.</a:t>
+            </a:r>
+          </a:p>
+          <a:p>
+            <a:pPr lvl="0"/>
+            <a:r>
+              <a:rPr/>
+              <a:t>The old HBTA/TOPO wrapper remains only as comparison and future parameterization context.</a:t>
+            </a:r>
+          </a:p>
+          <a:p>
+            <a:pPr lvl="0"/>
+            <a:r>
+              <a:rPr/>
+              <a:t>The current stage-output table carries extraction, distribution, selectivity, and validity labels.</a:t>
             </a:r>
           </a:p>
         </p:txBody>
@@ -8485,120 +8190,503 @@
             </a:pPr>
             <a:r>
               <a:rPr/>
-              <a:t>3.3 Multi-Stage Performance</a:t>
-            </a:r>
-          </a:p>
-        </p:txBody>
-      </p:sp>
-      <p:sp>
-        <p:nvSpPr>
-          <p:cNvPr id="3" name="Content Placeholder 2"/>
-          <p:cNvSpPr>
-            <a:spLocks noGrp="1"/>
-          </p:cNvSpPr>
-          <p:nvPr>
-            <p:ph idx="1" sz="half"/>
-          </p:nvPr>
-        </p:nvSpPr>
-        <p:spPr/>
-        <p:txBody>
-          <a:bodyPr/>
-          <a:lstStyle/>
-          <a:p>
-            <a:pPr lvl="0" indent="0" marL="0">
-              <a:buNone/>
-            </a:pPr>
-          </a:p>
-        </p:txBody>
-      </p:sp>
-      <p:sp>
-        <p:nvSpPr>
-          <p:cNvPr id="4" name="Content Placeholder 3"/>
-          <p:cNvSpPr>
-            <a:spLocks noGrp="1"/>
-          </p:cNvSpPr>
-          <p:nvPr>
-            <p:ph idx="2" sz="half"/>
-          </p:nvPr>
-        </p:nvSpPr>
-        <p:spPr/>
-        <p:txBody>
-          <a:bodyPr/>
-          <a:lstStyle/>
-          <a:p>
-            <a:pPr lvl="0" indent="0" marL="0">
-              <a:buNone/>
-            </a:pPr>
-            <a:r>
-              <a:rPr b="1"/>
-              <a:t>Three-stage reactive-stage chain</a:t>
-            </a:r>
-          </a:p>
-          <a:p>
-            <a:pPr lvl="0"/>
-            <a:r>
-              <a:rPr/>
-              <a:t>Stage 1 cumulative Li extraction: </a:t>
-            </a:r>
-            <a:r>
-              <a:rPr>
-                <a:latin typeface="Courier"/>
-              </a:rPr>
-              <a:t>47.2846%</a:t>
-            </a:r>
-          </a:p>
-          <a:p>
-            <a:pPr lvl="0"/>
-            <a:r>
-              <a:rPr/>
-              <a:t>Stage 2 cumulative Li extraction: </a:t>
-            </a:r>
-            <a:r>
-              <a:rPr>
-                <a:latin typeface="Courier"/>
-              </a:rPr>
-              <a:t>89.5753%</a:t>
-            </a:r>
-          </a:p>
-          <a:p>
-            <a:pPr lvl="0"/>
-            <a:r>
-              <a:rPr/>
-              <a:t>Stage 3 model Li extraction: near-total</a:t>
-            </a:r>
-          </a:p>
-          <a:p>
-            <a:pPr lvl="0"/>
-            <a:r>
-              <a:rPr/>
-              <a:t>Stage 3 cumulative Na extraction: </a:t>
-            </a:r>
-            <a:r>
-              <a:rPr>
-                <a:latin typeface="Courier"/>
-              </a:rPr>
-              <a:t>0.1160%</a:t>
-            </a:r>
-          </a:p>
-          <a:p>
-            <a:pPr lvl="0"/>
-            <a:r>
-              <a:rPr/>
-              <a:t>Costing recovery is capped at the </a:t>
-            </a:r>
-            <a:r>
-              <a:rPr>
-                <a:latin typeface="Courier"/>
-              </a:rPr>
-              <a:t>97.17%</a:t>
-            </a:r>
-            <a:r>
-              <a:rPr/>
-              <a:t> literature anchor</a:t>
-            </a:r>
-          </a:p>
-        </p:txBody>
-      </p:sp>
+              <a:t>3.2 Rezaee Bridge Closure</a:t>
+            </a:r>
+          </a:p>
+        </p:txBody>
+      </p:sp>
+      <p:graphicFrame>
+        <p:nvGraphicFramePr>
+          <p:cNvPr id="6" name="Content Placeholder 5"/>
+          <p:cNvGraphicFramePr>
+            <a:graphicFrameLocks noGrp="1"/>
+          </p:cNvGraphicFramePr>
+          <p:nvPr>
+            <p:ph idx="1"/>
+          </p:nvPr>
+        </p:nvGraphicFramePr>
+        <p:xfrm>
+          <a:off x="457200" y="1193800"/>
+          <a:ext cx="8229600" cy="3390900"/>
+        </p:xfrm>
+        <a:graphic>
+          <a:graphicData uri="http://schemas.openxmlformats.org/drawingml/2006/table">
+            <a:tbl>
+              <a:tblPr firstRow="1" bandRow="1">
+                <a:tableStyleId>{5C22544A-7EE6-4342-B048-85BDC9FD1C3A}</a:tableStyleId>
+              </a:tblPr>
+              <a:tblGrid>
+                <a:gridCol w="1905000"/>
+                <a:gridCol w="1905000"/>
+                <a:gridCol w="2527300"/>
+                <a:gridCol w="1905000"/>
+              </a:tblGrid>
+              <a:tr h="0">
+                <a:tc>
+                  <a:txBody>
+                    <a:bodyPr/>
+                    <a:lstStyle/>
+                    <a:p>
+                      <a:pPr lvl="0" indent="0" marL="0">
+                        <a:buNone/>
+                      </a:pPr>
+                      <a:r>
+                        <a:rPr/>
+                        <a:t>Evidence item</a:t>
+                      </a:r>
+                    </a:p>
+                  </a:txBody>
+                  <a:tcPr/>
+                </a:tc>
+                <a:tc>
+                  <a:txBody>
+                    <a:bodyPr/>
+                    <a:lstStyle/>
+                    <a:p>
+                      <a:pPr lvl="0" indent="0" marL="0">
+                        <a:buNone/>
+                      </a:pPr>
+                      <a:r>
+                        <a:rPr/>
+                        <a:t>Source artifact</a:t>
+                      </a:r>
+                    </a:p>
+                  </a:txBody>
+                  <a:tcPr/>
+                </a:tc>
+                <a:tc>
+                  <a:txBody>
+                    <a:bodyPr/>
+                    <a:lstStyle/>
+                    <a:p>
+                      <a:pPr lvl="0" indent="0" marL="0" algn="r">
+                        <a:buNone/>
+                      </a:pPr>
+                      <a:r>
+                        <a:rPr/>
+                        <a:t>Value</a:t>
+                      </a:r>
+                    </a:p>
+                  </a:txBody>
+                  <a:tcPr/>
+                </a:tc>
+                <a:tc>
+                  <a:txBody>
+                    <a:bodyPr/>
+                    <a:lstStyle/>
+                    <a:p>
+                      <a:pPr lvl="0" indent="0" marL="0">
+                        <a:buNone/>
+                      </a:pPr>
+                      <a:r>
+                        <a:rPr/>
+                        <a:t>Use</a:t>
+                      </a:r>
+                    </a:p>
+                  </a:txBody>
+                  <a:tcPr/>
+                </a:tc>
+              </a:tr>
+              <a:tr h="0">
+                <a:tc>
+                  <a:txBody>
+                    <a:bodyPr/>
+                    <a:lstStyle/>
+                    <a:p>
+                      <a:pPr lvl="0" indent="0" marL="0">
+                        <a:buNone/>
+                      </a:pPr>
+                      <a:r>
+                        <a:rPr/>
+                        <a:t>Extraction target rows</a:t>
+                      </a:r>
+                    </a:p>
+                  </a:txBody>
+                </a:tc>
+                <a:tc>
+                  <a:txBody>
+                    <a:bodyPr/>
+                    <a:lstStyle/>
+                    <a:p>
+                      <a:pPr lvl="0" indent="0" marL="0">
+                        <a:buNone/>
+                      </a:pPr>
+                      <a:r>
+                        <a:rPr>
+                          <a:latin typeface="Courier"/>
+                        </a:rPr>
+                        <a:t>rezaee_2025_extraction_target_summary.csv</a:t>
+                      </a:r>
+                    </a:p>
+                  </a:txBody>
+                </a:tc>
+                <a:tc>
+                  <a:txBody>
+                    <a:bodyPr/>
+                    <a:lstStyle/>
+                    <a:p>
+                      <a:pPr lvl="0" indent="0" marL="0" algn="r">
+                        <a:buNone/>
+                      </a:pPr>
+                      <a:r>
+                        <a:rPr>
+                          <a:latin typeface="Courier"/>
+                        </a:rPr>
+                        <a:t>32</a:t>
+                      </a:r>
+                    </a:p>
+                  </a:txBody>
+                </a:tc>
+                <a:tc>
+                  <a:txBody>
+                    <a:bodyPr/>
+                    <a:lstStyle/>
+                    <a:p>
+                      <a:pPr lvl="0" indent="0" marL="0">
+                        <a:buNone/>
+                      </a:pPr>
+                      <a:r>
+                        <a:rPr/>
+                        <a:t>Source-regressed bridge fit</a:t>
+                      </a:r>
+                    </a:p>
+                  </a:txBody>
+                </a:tc>
+              </a:tr>
+              <a:tr h="0">
+                <a:tc>
+                  <a:txBody>
+                    <a:bodyPr/>
+                    <a:lstStyle/>
+                    <a:p>
+                      <a:pPr lvl="0" indent="0" marL="0">
+                        <a:buNone/>
+                      </a:pPr>
+                      <a:r>
+                        <a:rPr/>
+                        <a:t>SI phase-composition rows</a:t>
+                      </a:r>
+                    </a:p>
+                  </a:txBody>
+                </a:tc>
+                <a:tc>
+                  <a:txBody>
+                    <a:bodyPr/>
+                    <a:lstStyle/>
+                    <a:p>
+                      <a:pPr lvl="0" indent="0" marL="0">
+                        <a:buNone/>
+                      </a:pPr>
+                      <a:r>
+                        <a:rPr>
+                          <a:latin typeface="Courier"/>
+                        </a:rPr>
+                        <a:t>rezaee_2025_extraction_equilibrium_summary.csv</a:t>
+                      </a:r>
+                    </a:p>
+                  </a:txBody>
+                </a:tc>
+                <a:tc>
+                  <a:txBody>
+                    <a:bodyPr/>
+                    <a:lstStyle/>
+                    <a:p>
+                      <a:pPr lvl="0" indent="0" marL="0" algn="r">
+                        <a:buNone/>
+                      </a:pPr>
+                      <a:r>
+                        <a:rPr>
+                          <a:latin typeface="Courier"/>
+                        </a:rPr>
+                        <a:t>26</a:t>
+                      </a:r>
+                    </a:p>
+                  </a:txBody>
+                </a:tc>
+                <a:tc>
+                  <a:txBody>
+                    <a:bodyPr/>
+                    <a:lstStyle/>
+                    <a:p>
+                      <a:pPr lvl="0" indent="0" marL="0">
+                        <a:buNone/>
+                      </a:pPr>
+                      <a:r>
+                        <a:rPr/>
+                        <a:t>Reactive-equilibrium diagnostic</a:t>
+                      </a:r>
+                    </a:p>
+                  </a:txBody>
+                </a:tc>
+              </a:tr>
+              <a:tr h="0">
+                <a:tc>
+                  <a:txBody>
+                    <a:bodyPr/>
+                    <a:lstStyle/>
+                    <a:p>
+                      <a:pPr lvl="0" indent="0" marL="0">
+                        <a:buNone/>
+                      </a:pPr>
+                      <a:r>
+                        <a:rPr/>
+                        <a:t>Median source (D_{Li})</a:t>
+                      </a:r>
+                    </a:p>
+                  </a:txBody>
+                </a:tc>
+                <a:tc>
+                  <a:txBody>
+                    <a:bodyPr/>
+                    <a:lstStyle/>
+                    <a:p>
+                      <a:pPr lvl="0" indent="0" marL="0">
+                        <a:buNone/>
+                      </a:pPr>
+                      <a:r>
+                        <a:rPr>
+                          <a:latin typeface="Courier"/>
+                        </a:rPr>
+                        <a:t>rezaee_li_na_distribution_coefficients.csv</a:t>
+                      </a:r>
+                    </a:p>
+                  </a:txBody>
+                </a:tc>
+                <a:tc>
+                  <a:txBody>
+                    <a:bodyPr/>
+                    <a:lstStyle/>
+                    <a:p>
+                      <a:pPr lvl="0" indent="0" marL="0" algn="r">
+                        <a:buNone/>
+                      </a:pPr>
+                      <a:r>
+                        <a:rPr>
+                          <a:latin typeface="Courier"/>
+                        </a:rPr>
+                        <a:t>0.6017</a:t>
+                      </a:r>
+                    </a:p>
+                  </a:txBody>
+                </a:tc>
+                <a:tc>
+                  <a:txBody>
+                    <a:bodyPr/>
+                    <a:lstStyle/>
+                    <a:p>
+                      <a:pPr lvl="0" indent="0" marL="0">
+                        <a:buNone/>
+                      </a:pPr>
+                      <a:r>
+                        <a:rPr/>
+                        <a:t>Surrogate prior</a:t>
+                      </a:r>
+                    </a:p>
+                  </a:txBody>
+                </a:tc>
+              </a:tr>
+              <a:tr h="0">
+                <a:tc>
+                  <a:txBody>
+                    <a:bodyPr/>
+                    <a:lstStyle/>
+                    <a:p>
+                      <a:pPr lvl="0" indent="0" marL="0">
+                        <a:buNone/>
+                      </a:pPr>
+                      <a:r>
+                        <a:rPr/>
+                        <a:t>Median source (D_{Na})</a:t>
+                      </a:r>
+                    </a:p>
+                  </a:txBody>
+                </a:tc>
+                <a:tc>
+                  <a:txBody>
+                    <a:bodyPr/>
+                    <a:lstStyle/>
+                    <a:p>
+                      <a:pPr lvl="0" indent="0" marL="0">
+                        <a:buNone/>
+                      </a:pPr>
+                      <a:r>
+                        <a:rPr>
+                          <a:latin typeface="Courier"/>
+                        </a:rPr>
+                        <a:t>rezaee_li_na_distribution_coefficients.csv</a:t>
+                      </a:r>
+                    </a:p>
+                  </a:txBody>
+                </a:tc>
+                <a:tc>
+                  <a:txBody>
+                    <a:bodyPr/>
+                    <a:lstStyle/>
+                    <a:p>
+                      <a:pPr lvl="0" indent="0" marL="0" algn="r">
+                        <a:buNone/>
+                      </a:pPr>
+                      <a:r>
+                        <a:rPr>
+                          <a:latin typeface="Courier"/>
+                        </a:rPr>
+                        <a:t>0.1257</a:t>
+                      </a:r>
+                    </a:p>
+                  </a:txBody>
+                </a:tc>
+                <a:tc>
+                  <a:txBody>
+                    <a:bodyPr/>
+                    <a:lstStyle/>
+                    <a:p>
+                      <a:pPr lvl="0" indent="0" marL="0">
+                        <a:buNone/>
+                      </a:pPr>
+                      <a:r>
+                        <a:rPr/>
+                        <a:t>Surrogate prior</a:t>
+                      </a:r>
+                    </a:p>
+                  </a:txBody>
+                </a:tc>
+              </a:tr>
+              <a:tr h="0">
+                <a:tc>
+                  <a:txBody>
+                    <a:bodyPr/>
+                    <a:lstStyle/>
+                    <a:p>
+                      <a:pPr lvl="0" indent="0" marL="0">
+                        <a:buNone/>
+                      </a:pPr>
+                      <a:r>
+                        <a:rPr/>
+                        <a:t>Bridge Li logit RMSE</a:t>
+                      </a:r>
+                    </a:p>
+                  </a:txBody>
+                </a:tc>
+                <a:tc>
+                  <a:txBody>
+                    <a:bodyPr/>
+                    <a:lstStyle/>
+                    <a:p>
+                      <a:pPr lvl="0" indent="0" marL="0">
+                        <a:buNone/>
+                      </a:pPr>
+                      <a:r>
+                        <a:rPr>
+                          <a:latin typeface="Courier"/>
+                        </a:rPr>
+                        <a:t>rezaee_li_na_distribution_bridge_report.md</a:t>
+                      </a:r>
+                    </a:p>
+                  </a:txBody>
+                </a:tc>
+                <a:tc>
+                  <a:txBody>
+                    <a:bodyPr/>
+                    <a:lstStyle/>
+                    <a:p>
+                      <a:pPr lvl="0" indent="0" marL="0" algn="r">
+                        <a:buNone/>
+                      </a:pPr>
+                      <a:r>
+                        <a:rPr>
+                          <a:latin typeface="Courier"/>
+                        </a:rPr>
+                        <a:t>0.154</a:t>
+                      </a:r>
+                    </a:p>
+                  </a:txBody>
+                </a:tc>
+                <a:tc>
+                  <a:txBody>
+                    <a:bodyPr/>
+                    <a:lstStyle/>
+                    <a:p>
+                      <a:pPr lvl="0" indent="0" marL="0">
+                        <a:buNone/>
+                      </a:pPr>
+                      <a:r>
+                        <a:rPr/>
+                        <a:t>Fit diagnostic</a:t>
+                      </a:r>
+                    </a:p>
+                  </a:txBody>
+                </a:tc>
+              </a:tr>
+              <a:tr h="0">
+                <a:tc>
+                  <a:txBody>
+                    <a:bodyPr/>
+                    <a:lstStyle/>
+                    <a:p>
+                      <a:pPr lvl="0" indent="0" marL="0">
+                        <a:buNone/>
+                      </a:pPr>
+                      <a:r>
+                        <a:rPr/>
+                        <a:t>Bridge Na logit RMSE</a:t>
+                      </a:r>
+                    </a:p>
+                  </a:txBody>
+                </a:tc>
+                <a:tc>
+                  <a:txBody>
+                    <a:bodyPr/>
+                    <a:lstStyle/>
+                    <a:p>
+                      <a:pPr lvl="0" indent="0" marL="0">
+                        <a:buNone/>
+                      </a:pPr>
+                      <a:r>
+                        <a:rPr>
+                          <a:latin typeface="Courier"/>
+                        </a:rPr>
+                        <a:t>rezaee_li_na_distribution_bridge_report.md</a:t>
+                      </a:r>
+                    </a:p>
+                  </a:txBody>
+                </a:tc>
+                <a:tc>
+                  <a:txBody>
+                    <a:bodyPr/>
+                    <a:lstStyle/>
+                    <a:p>
+                      <a:pPr lvl="0" indent="0" marL="0" algn="r">
+                        <a:buNone/>
+                      </a:pPr>
+                      <a:r>
+                        <a:rPr>
+                          <a:latin typeface="Courier"/>
+                        </a:rPr>
+                        <a:t>0.1615</a:t>
+                      </a:r>
+                    </a:p>
+                  </a:txBody>
+                </a:tc>
+                <a:tc>
+                  <a:txBody>
+                    <a:bodyPr/>
+                    <a:lstStyle/>
+                    <a:p>
+                      <a:pPr lvl="0" indent="0" marL="0">
+                        <a:buNone/>
+                      </a:pPr>
+                      <a:r>
+                        <a:rPr/>
+                        <a:t>Fit diagnostic</a:t>
+                      </a:r>
+                    </a:p>
+                  </a:txBody>
+                </a:tc>
+              </a:tr>
+            </a:tbl>
+          </a:graphicData>
+        </a:graphic>
+      </p:graphicFrame>
     </p:spTree>
   </p:cSld>
 </p:sld>
@@ -8623,123 +8711,34 @@
       </p:grpSpPr>
       <p:sp>
         <p:nvSpPr>
-          <p:cNvPr id="2" name="Title 1"/>
-          <p:cNvSpPr>
-            <a:spLocks noGrp="1"/>
-          </p:cNvSpPr>
-          <p:nvPr>
-            <p:ph type="title"/>
-          </p:nvPr>
-        </p:nvSpPr>
-        <p:spPr/>
-        <p:txBody>
-          <a:bodyPr/>
-          <a:lstStyle/>
-          <a:p>
-            <a:pPr lvl="0" indent="0" marL="0">
+          <p:cNvPr id="3" name="Content Placeholder 2"/>
+          <p:cNvSpPr>
+            <a:spLocks noGrp="1"/>
+          </p:cNvSpPr>
+          <p:nvPr>
+            <p:ph idx="1"/>
+          </p:nvPr>
+        </p:nvSpPr>
+        <p:spPr/>
+        <p:txBody>
+          <a:bodyPr/>
+          <a:lstStyle/>
+          <a:p>
+            <a:pPr lvl="0" indent="0" marL="1270000">
               <a:buNone/>
             </a:pPr>
             <a:r>
-              <a:rPr/>
-              <a:t>3.4 Thermodynamic Insight</a:t>
-            </a:r>
-          </a:p>
-        </p:txBody>
-      </p:sp>
-      <p:sp>
-        <p:nvSpPr>
-          <p:cNvPr id="3" name="Content Placeholder 2"/>
-          <p:cNvSpPr>
-            <a:spLocks noGrp="1"/>
-          </p:cNvSpPr>
-          <p:nvPr>
-            <p:ph idx="1" sz="half"/>
-          </p:nvPr>
-        </p:nvSpPr>
-        <p:spPr/>
-        <p:txBody>
-          <a:bodyPr/>
-          <a:lstStyle/>
-          <a:p>
-            <a:pPr lvl="0" indent="0" marL="0">
+              <a:rPr sz="2000" b="1"/>
+              <a:t>None</a:t>
+            </a:r>
+          </a:p>
+          <a:p>
+            <a:pPr lvl="0" indent="0" marL="1270000">
               <a:buNone/>
             </a:pPr>
             <a:r>
-              <a:rPr b="1"/>
-              <a:t>The old question</a:t>
-            </a:r>
-          </a:p>
-          <a:p>
-            <a:pPr lvl="0" indent="0" marL="0">
-              <a:buNone/>
-            </a:pPr>
-            <a:r>
-              <a:rPr/>
-              <a:t>Can this solvent extract lithium from this brine?</a:t>
-            </a:r>
-          </a:p>
-          <a:p>
-            <a:pPr lvl="0" indent="0" marL="0">
-              <a:buNone/>
-            </a:pPr>
-            <a:r>
-              <a:rPr b="1"/>
-              <a:t>The stronger question</a:t>
-            </a:r>
-          </a:p>
-          <a:p>
-            <a:pPr lvl="0" indent="0" marL="0">
-              <a:buNone/>
-            </a:pPr>
-            <a:r>
-              <a:rPr/>
-              <a:t>Where should this chemistry work, how does the answer change with basin chemistry, and what stage variables should enter a process model?</a:t>
-            </a:r>
-          </a:p>
-        </p:txBody>
-      </p:sp>
-      <p:sp>
-        <p:nvSpPr>
-          <p:cNvPr id="4" name="Content Placeholder 3"/>
-          <p:cNvSpPr>
-            <a:spLocks noGrp="1"/>
-          </p:cNvSpPr>
-          <p:nvPr>
-            <p:ph idx="2" sz="half"/>
-          </p:nvPr>
-        </p:nvSpPr>
-        <p:spPr/>
-        <p:txBody>
-          <a:bodyPr/>
-          <a:lstStyle/>
-          <a:p>
-            <a:pPr lvl="0" indent="0" marL="0">
-              <a:buNone/>
-            </a:pPr>
-            <a:r>
-              <a:rPr b="1"/>
-              <a:t>Why ePC-SAFT changes the question</a:t>
-            </a:r>
-          </a:p>
-          <a:p>
-            <a:pPr lvl="0"/>
-            <a:r>
-              <a:rPr/>
-              <a:t>It turns feed chemistry into equilibrium states.</a:t>
-            </a:r>
-          </a:p>
-          <a:p>
-            <a:pPr lvl="0"/>
-            <a:r>
-              <a:rPr/>
-              <a:t>It lets salt load and O/A ratio become computable sensitivities.</a:t>
-            </a:r>
-          </a:p>
-          <a:p>
-            <a:pPr lvl="0"/>
-            <a:r>
-              <a:rPr/>
-              <a:t>It provides distribution and selectivity variables, not only recovery percentages.</a:t>
+              <a:rPr sz="2000"/>
+              <a:t>This is the current presentation-facing closure: Li/Na staged transfer from a Rezaee source-regressed bridge. Ca, Mg, and other divalent ions remain pretreatment context, not active extraction targets.</a:t>
             </a:r>
           </a:p>
         </p:txBody>
@@ -8776,12 +8775,7 @@
             <p:ph type="title"/>
           </p:nvPr>
         </p:nvSpPr>
-        <p:spPr>
-          <a:xfrm>
-            <a:off x="722313" y="3305176"/>
-            <a:ext cx="7772400" cy="1021556"/>
-          </a:xfrm>
-        </p:spPr>
+        <p:spPr/>
         <p:txBody>
           <a:bodyPr/>
           <a:lstStyle/>
@@ -8791,7 +8785,251 @@
             </a:pPr>
             <a:r>
               <a:rPr/>
-              <a:t>4. PrOMMiS / IDAES Process Bridge</a:t>
+              <a:t>3.3 Multi-Stage Performance</a:t>
+            </a:r>
+          </a:p>
+        </p:txBody>
+      </p:sp>
+      <p:graphicFrame>
+        <p:nvGraphicFramePr>
+          <p:cNvPr id="6" name="Content Placeholder 5"/>
+          <p:cNvGraphicFramePr>
+            <a:graphicFrameLocks noGrp="1"/>
+          </p:cNvGraphicFramePr>
+          <p:nvPr>
+            <p:ph idx="1"/>
+          </p:nvPr>
+        </p:nvGraphicFramePr>
+        <p:xfrm>
+          <a:off x="457200" y="1193800"/>
+          <a:ext cx="4038600" cy="3390900"/>
+        </p:xfrm>
+        <a:graphic>
+          <a:graphicData uri="http://schemas.openxmlformats.org/drawingml/2006/table">
+            <a:tbl>
+              <a:tblPr firstRow="1" bandRow="1">
+                <a:tableStyleId>{5C22544A-7EE6-4342-B048-85BDC9FD1C3A}</a:tableStyleId>
+              </a:tblPr>
+              <a:tblGrid>
+                <a:gridCol w="2019300"/>
+                <a:gridCol w="2019300"/>
+              </a:tblGrid>
+              <a:tr h="0">
+                <a:tc>
+                  <a:txBody>
+                    <a:bodyPr/>
+                    <a:lstStyle/>
+                    <a:p>
+                      <a:pPr lvl="0" indent="0" marL="0">
+                        <a:buNone/>
+                      </a:pPr>
+                      <a:r>
+                        <a:rPr/>
+                        <a:t>Stage metric</a:t>
+                      </a:r>
+                    </a:p>
+                  </a:txBody>
+                  <a:tcPr/>
+                </a:tc>
+                <a:tc>
+                  <a:txBody>
+                    <a:bodyPr/>
+                    <a:lstStyle/>
+                    <a:p>
+                      <a:pPr lvl="0" indent="0" marL="0" algn="r">
+                        <a:buNone/>
+                      </a:pPr>
+                      <a:r>
+                        <a:rPr/>
+                        <a:t>Rezaee bridge value</a:t>
+                      </a:r>
+                    </a:p>
+                  </a:txBody>
+                  <a:tcPr/>
+                </a:tc>
+              </a:tr>
+              <a:tr h="0">
+                <a:tc>
+                  <a:txBody>
+                    <a:bodyPr/>
+                    <a:lstStyle/>
+                    <a:p>
+                      <a:pPr lvl="0" indent="0" marL="0">
+                        <a:buNone/>
+                      </a:pPr>
+                      <a:r>
+                        <a:rPr/>
+                        <a:t>Stage 1 Li extraction</a:t>
+                      </a:r>
+                    </a:p>
+                  </a:txBody>
+                </a:tc>
+                <a:tc>
+                  <a:txBody>
+                    <a:bodyPr/>
+                    <a:lstStyle/>
+                    <a:p>
+                      <a:pPr lvl="0" indent="0" marL="0" algn="r">
+                        <a:buNone/>
+                      </a:pPr>
+                      <a:r>
+                        <a:rPr>
+                          <a:latin typeface="Courier"/>
+                        </a:rPr>
+                        <a:t>45.3660%</a:t>
+                      </a:r>
+                    </a:p>
+                  </a:txBody>
+                </a:tc>
+              </a:tr>
+              <a:tr h="0">
+                <a:tc>
+                  <a:txBody>
+                    <a:bodyPr/>
+                    <a:lstStyle/>
+                    <a:p>
+                      <a:pPr lvl="0" indent="0" marL="0">
+                        <a:buNone/>
+                      </a:pPr>
+                      <a:r>
+                        <a:rPr/>
+                        <a:t>Stage 1 Na extraction</a:t>
+                      </a:r>
+                    </a:p>
+                  </a:txBody>
+                </a:tc>
+                <a:tc>
+                  <a:txBody>
+                    <a:bodyPr/>
+                    <a:lstStyle/>
+                    <a:p>
+                      <a:pPr lvl="0" indent="0" marL="0" algn="r">
+                        <a:buNone/>
+                      </a:pPr>
+                      <a:r>
+                        <a:rPr>
+                          <a:latin typeface="Courier"/>
+                        </a:rPr>
+                        <a:t>8.9780%</a:t>
+                      </a:r>
+                    </a:p>
+                  </a:txBody>
+                </a:tc>
+              </a:tr>
+              <a:tr h="0">
+                <a:tc>
+                  <a:txBody>
+                    <a:bodyPr/>
+                    <a:lstStyle/>
+                    <a:p>
+                      <a:pPr lvl="0" indent="0" marL="0">
+                        <a:buNone/>
+                      </a:pPr>
+                      <a:r>
+                        <a:rPr/>
+                        <a:t>Stage 3 Li recovery</a:t>
+                      </a:r>
+                    </a:p>
+                  </a:txBody>
+                </a:tc>
+                <a:tc>
+                  <a:txBody>
+                    <a:bodyPr/>
+                    <a:lstStyle/>
+                    <a:p>
+                      <a:pPr lvl="0" indent="0" marL="0" algn="r">
+                        <a:buNone/>
+                      </a:pPr>
+                      <a:r>
+                        <a:rPr>
+                          <a:latin typeface="Courier"/>
+                        </a:rPr>
+                        <a:t>83.6925%</a:t>
+                      </a:r>
+                    </a:p>
+                  </a:txBody>
+                </a:tc>
+              </a:tr>
+              <a:tr h="0">
+                <a:tc>
+                  <a:txBody>
+                    <a:bodyPr/>
+                    <a:lstStyle/>
+                    <a:p>
+                      <a:pPr lvl="0" indent="0" marL="0">
+                        <a:buNone/>
+                      </a:pPr>
+                      <a:r>
+                        <a:rPr/>
+                        <a:t>Stage 3 Na recovery</a:t>
+                      </a:r>
+                    </a:p>
+                  </a:txBody>
+                </a:tc>
+                <a:tc>
+                  <a:txBody>
+                    <a:bodyPr/>
+                    <a:lstStyle/>
+                    <a:p>
+                      <a:pPr lvl="0" indent="0" marL="0" algn="r">
+                        <a:buNone/>
+                      </a:pPr>
+                      <a:r>
+                        <a:rPr>
+                          <a:latin typeface="Courier"/>
+                        </a:rPr>
+                        <a:t>24.5883%</a:t>
+                      </a:r>
+                    </a:p>
+                  </a:txBody>
+                </a:tc>
+              </a:tr>
+            </a:tbl>
+          </a:graphicData>
+        </a:graphic>
+      </p:graphicFrame>
+      <p:sp>
+        <p:nvSpPr>
+          <p:cNvPr id="4" name="Content Placeholder 3"/>
+          <p:cNvSpPr>
+            <a:spLocks noGrp="1"/>
+          </p:cNvSpPr>
+          <p:nvPr>
+            <p:ph idx="2" sz="half"/>
+          </p:nvPr>
+        </p:nvSpPr>
+        <p:spPr/>
+        <p:txBody>
+          <a:bodyPr/>
+          <a:lstStyle/>
+          <a:p>
+            <a:pPr lvl="0" indent="0" marL="0">
+              <a:buNone/>
+            </a:pPr>
+            <a:r>
+              <a:rPr b="1"/>
+              <a:t>Three-stage bridge interpretation</a:t>
+            </a:r>
+          </a:p>
+          <a:p>
+            <a:pPr lvl="0"/>
+            <a:r>
+              <a:rPr/>
+              <a:t>The stage chain is source-regressed from Rezaee Li/Na responses.</a:t>
+            </a:r>
+          </a:p>
+          <a:p>
+            <a:pPr lvl="0"/>
+            <a:r>
+              <a:rPr/>
+              <a:t>The Smackover row is a feed-context projection, not a measured Arkansas extraction experiment.</a:t>
+            </a:r>
+          </a:p>
+          <a:p>
+            <a:pPr lvl="0"/>
+            <a:r>
+              <a:rPr/>
+              <a:t>The result is strong enough for PrOMMiS/IDAES handoff, not investment-grade TEA.</a:t>
             </a:r>
           </a:p>
         </p:txBody>
@@ -8838,278 +9076,109 @@
             </a:pPr>
             <a:r>
               <a:rPr/>
-              <a:t>4.1 From Equilibrium To Transfer Variables</a:t>
-            </a:r>
-          </a:p>
-        </p:txBody>
-      </p:sp>
-      <p:graphicFrame>
-        <p:nvGraphicFramePr>
-          <p:cNvPr id="6" name="Content Placeholder 5"/>
-          <p:cNvGraphicFramePr>
-            <a:graphicFrameLocks noGrp="1"/>
-          </p:cNvGraphicFramePr>
-          <p:nvPr>
-            <p:ph idx="1"/>
-          </p:nvPr>
-        </p:nvGraphicFramePr>
-        <p:xfrm>
-          <a:off x="457200" y="1193800"/>
-          <a:ext cx="8229600" cy="3390900"/>
-        </p:xfrm>
-        <a:graphic>
-          <a:graphicData uri="http://schemas.openxmlformats.org/drawingml/2006/table">
-            <a:tbl>
-              <a:tblPr firstRow="1" bandRow="1">
-                <a:tableStyleId>{5C22544A-7EE6-4342-B048-85BDC9FD1C3A}</a:tableStyleId>
-              </a:tblPr>
-              <a:tblGrid>
-                <a:gridCol w="2743200"/>
-                <a:gridCol w="2743200"/>
-                <a:gridCol w="2743200"/>
-              </a:tblGrid>
-              <a:tr h="0">
-                <a:tc>
-                  <a:txBody>
-                    <a:bodyPr/>
-                    <a:lstStyle/>
-                    <a:p>
-                      <a:pPr lvl="0" indent="0" marL="0">
-                        <a:buNone/>
-                      </a:pPr>
-                      <a:r>
-                        <a:rPr/>
-                        <a:t>Process-model need</a:t>
-                      </a:r>
-                    </a:p>
-                  </a:txBody>
-                  <a:tcPr/>
-                </a:tc>
-                <a:tc>
-                  <a:txBody>
-                    <a:bodyPr/>
-                    <a:lstStyle/>
-                    <a:p>
-                      <a:pPr lvl="0" indent="0" marL="0">
-                        <a:buNone/>
-                      </a:pPr>
-                      <a:r>
-                        <a:rPr/>
-                        <a:t>ePC-SAFT-derived quantity</a:t>
-                      </a:r>
-                    </a:p>
-                  </a:txBody>
-                  <a:tcPr/>
-                </a:tc>
-                <a:tc>
-                  <a:txBody>
-                    <a:bodyPr/>
-                    <a:lstStyle/>
-                    <a:p>
-                      <a:pPr lvl="0" indent="0" marL="0">
-                        <a:buNone/>
-                      </a:pPr>
-                      <a:r>
-                        <a:rPr/>
-                        <a:t>Use in PrOMMiS / IDAES</a:t>
-                      </a:r>
-                    </a:p>
-                  </a:txBody>
-                  <a:tcPr/>
-                </a:tc>
-              </a:tr>
-              <a:tr h="0">
-                <a:tc>
-                  <a:txBody>
-                    <a:bodyPr/>
-                    <a:lstStyle/>
-                    <a:p>
-                      <a:pPr lvl="0" indent="0" marL="0">
-                        <a:buNone/>
-                      </a:pPr>
-                      <a:r>
-                        <a:rPr/>
-                        <a:t>Feed state</a:t>
-                      </a:r>
-                    </a:p>
-                  </a:txBody>
-                </a:tc>
-                <a:tc>
-                  <a:txBody>
-                    <a:bodyPr/>
-                    <a:lstStyle/>
-                    <a:p>
-                      <a:pPr lvl="0" indent="0" marL="0">
-                        <a:buNone/>
-                      </a:pPr>
-                      <a:r>
-                        <a:rPr/>
-                        <a:t>(z_i), TDS, Li/Na/Mg/Ca/Sr/Ba/Cl basis, temperature</a:t>
-                      </a:r>
-                    </a:p>
-                  </a:txBody>
-                </a:tc>
-                <a:tc>
-                  <a:txBody>
-                    <a:bodyPr/>
-                    <a:lstStyle/>
-                    <a:p>
-                      <a:pPr lvl="0" indent="0" marL="0">
-                        <a:buNone/>
-                      </a:pPr>
-                      <a:r>
-                        <a:rPr/>
-                        <a:t>Basin-specific solvent-extraction inlet</a:t>
-                      </a:r>
-                    </a:p>
-                  </a:txBody>
-                </a:tc>
-              </a:tr>
-              <a:tr h="0">
-                <a:tc>
-                  <a:txBody>
-                    <a:bodyPr/>
-                    <a:lstStyle/>
-                    <a:p>
-                      <a:pPr lvl="0" indent="0" marL="0">
-                        <a:buNone/>
-                      </a:pPr>
-                      <a:r>
-                        <a:rPr/>
-                        <a:t>Phase split</a:t>
-                      </a:r>
-                    </a:p>
-                  </a:txBody>
-                </a:tc>
-                <a:tc>
-                  <a:txBody>
-                    <a:bodyPr/>
-                    <a:lstStyle/>
-                    <a:p>
-                      <a:pPr lvl="0" indent="0" marL="0">
-                        <a:buNone/>
-                      </a:pPr>
-                      <a:r>
-                        <a:rPr/>
-                        <a:t>aqueous and organic compositions, phase fraction</a:t>
-                      </a:r>
-                    </a:p>
-                  </a:txBody>
-                </a:tc>
-                <a:tc>
-                  <a:txBody>
-                    <a:bodyPr/>
-                    <a:lstStyle/>
-                    <a:p>
-                      <a:pPr lvl="0" indent="0" marL="0">
-                        <a:buNone/>
-                      </a:pPr>
-                      <a:r>
-                        <a:rPr/>
-                        <a:t>Equilibrium target or closure for a stage</a:t>
-                      </a:r>
-                    </a:p>
-                  </a:txBody>
-                </a:tc>
-              </a:tr>
-              <a:tr h="0">
-                <a:tc>
-                  <a:txBody>
-                    <a:bodyPr/>
-                    <a:lstStyle/>
-                    <a:p>
-                      <a:pPr lvl="0" indent="0" marL="0">
-                        <a:buNone/>
-                      </a:pPr>
-                      <a:r>
-                        <a:rPr/>
-                        <a:t>Transfer strength</a:t>
-                      </a:r>
-                    </a:p>
-                  </a:txBody>
-                </a:tc>
-                <a:tc>
-                  <a:txBody>
-                    <a:bodyPr/>
-                    <a:lstStyle/>
-                    <a:p>
-                      <a:pPr lvl="0" indent="0" marL="0">
-                        <a:buNone/>
-                      </a:pPr>
-                      <a:r>
-                        <a:rPr/>
-                        <a:t>(D_i = C_{i,org}/C_{i,aq})</a:t>
-                      </a:r>
-                    </a:p>
-                  </a:txBody>
-                </a:tc>
-                <a:tc>
-                  <a:txBody>
-                    <a:bodyPr/>
-                    <a:lstStyle/>
-                    <a:p>
-                      <a:pPr lvl="0" indent="0" marL="0">
-                        <a:buNone/>
-                      </a:pPr>
-                      <a:r>
-                        <a:rPr/>
-                        <a:t>Distribution behavior in material balances</a:t>
-                      </a:r>
-                    </a:p>
-                  </a:txBody>
-                </a:tc>
-              </a:tr>
-              <a:tr h="0">
-                <a:tc>
-                  <a:txBody>
-                    <a:bodyPr/>
-                    <a:lstStyle/>
-                    <a:p>
-                      <a:pPr lvl="0" indent="0" marL="0">
-                        <a:buNone/>
-                      </a:pPr>
-                      <a:r>
-                        <a:rPr/>
-                        <a:t>Selectivity</a:t>
-                      </a:r>
-                    </a:p>
-                  </a:txBody>
-                </a:tc>
-                <a:tc>
-                  <a:txBody>
-                    <a:bodyPr/>
-                    <a:lstStyle/>
-                    <a:p>
-                      <a:pPr lvl="0" indent="0" marL="0">
-                        <a:buNone/>
-                      </a:pPr>
-                      <a:r>
-                        <a:rPr/>
-                        <a:t>(S_{Li/Na}), later (S_{Li/Mg}), (S_{Li/Ca})</a:t>
-                      </a:r>
-                    </a:p>
-                  </a:txBody>
-                </a:tc>
-                <a:tc>
-                  <a:txBody>
-                    <a:bodyPr/>
-                    <a:lstStyle/>
-                    <a:p>
-                      <a:pPr lvl="0" indent="0" marL="0">
-                        <a:buNone/>
-                      </a:pPr>
-                      <a:r>
-                        <a:rPr/>
-                        <a:t>Separation constraints and solvent screening</a:t>
-                      </a:r>
-                    </a:p>
-                  </a:txBody>
-                </a:tc>
-              </a:tr>
-            </a:tbl>
-          </a:graphicData>
-        </a:graphic>
-      </p:graphicFrame>
+              <a:t>3.4 Thermodynamic Insight</a:t>
+            </a:r>
+          </a:p>
+        </p:txBody>
+      </p:sp>
+      <p:sp>
+        <p:nvSpPr>
+          <p:cNvPr id="3" name="Content Placeholder 2"/>
+          <p:cNvSpPr>
+            <a:spLocks noGrp="1"/>
+          </p:cNvSpPr>
+          <p:nvPr>
+            <p:ph idx="1" sz="half"/>
+          </p:nvPr>
+        </p:nvSpPr>
+        <p:spPr/>
+        <p:txBody>
+          <a:bodyPr/>
+          <a:lstStyle/>
+          <a:p>
+            <a:pPr lvl="0" indent="0" marL="0">
+              <a:buNone/>
+            </a:pPr>
+            <a:r>
+              <a:rPr b="1"/>
+              <a:t>The old question</a:t>
+            </a:r>
+          </a:p>
+          <a:p>
+            <a:pPr lvl="0" indent="0" marL="0">
+              <a:buNone/>
+            </a:pPr>
+            <a:r>
+              <a:rPr/>
+              <a:t>Can this solvent extract lithium from this brine?</a:t>
+            </a:r>
+          </a:p>
+          <a:p>
+            <a:pPr lvl="0" indent="0" marL="0">
+              <a:buNone/>
+            </a:pPr>
+            <a:r>
+              <a:rPr b="1"/>
+              <a:t>The stronger question</a:t>
+            </a:r>
+          </a:p>
+          <a:p>
+            <a:pPr lvl="0" indent="0" marL="0">
+              <a:buNone/>
+            </a:pPr>
+            <a:r>
+              <a:rPr/>
+              <a:t>Where should this chemistry work, how does the answer change with basin chemistry, and what stage variables should enter a process model?</a:t>
+            </a:r>
+          </a:p>
+        </p:txBody>
+      </p:sp>
+      <p:sp>
+        <p:nvSpPr>
+          <p:cNvPr id="4" name="Content Placeholder 3"/>
+          <p:cNvSpPr>
+            <a:spLocks noGrp="1"/>
+          </p:cNvSpPr>
+          <p:nvPr>
+            <p:ph idx="2" sz="half"/>
+          </p:nvPr>
+        </p:nvSpPr>
+        <p:spPr/>
+        <p:txBody>
+          <a:bodyPr/>
+          <a:lstStyle/>
+          <a:p>
+            <a:pPr lvl="0" indent="0" marL="0">
+              <a:buNone/>
+            </a:pPr>
+            <a:r>
+              <a:rPr b="1"/>
+              <a:t>Why ePC-SAFT changes the question</a:t>
+            </a:r>
+          </a:p>
+          <a:p>
+            <a:pPr lvl="0"/>
+            <a:r>
+              <a:rPr/>
+              <a:t>It turns feed chemistry into equilibrium states.</a:t>
+            </a:r>
+          </a:p>
+          <a:p>
+            <a:pPr lvl="0"/>
+            <a:r>
+              <a:rPr/>
+              <a:t>It lets salt load and O/A ratio become computable sensitivities.</a:t>
+            </a:r>
+          </a:p>
+          <a:p>
+            <a:pPr lvl="0"/>
+            <a:r>
+              <a:rPr/>
+              <a:t>It provides distribution and selectivity variables, not only recovery percentages.</a:t>
+            </a:r>
+          </a:p>
+        </p:txBody>
+      </p:sp>
     </p:spTree>
   </p:cSld>
 </p:sld>
@@ -9134,34 +9203,30 @@
       </p:grpSpPr>
       <p:sp>
         <p:nvSpPr>
-          <p:cNvPr id="3" name="Content Placeholder 2"/>
-          <p:cNvSpPr>
-            <a:spLocks noGrp="1"/>
-          </p:cNvSpPr>
-          <p:nvPr>
-            <p:ph idx="1"/>
-          </p:nvPr>
-        </p:nvSpPr>
-        <p:spPr/>
-        <p:txBody>
-          <a:bodyPr/>
-          <a:lstStyle/>
-          <a:p>
-            <a:pPr lvl="0" indent="0" marL="1270000">
+          <p:cNvPr id="2" name="Title 1"/>
+          <p:cNvSpPr>
+            <a:spLocks noGrp="1"/>
+          </p:cNvSpPr>
+          <p:nvPr>
+            <p:ph type="title"/>
+          </p:nvPr>
+        </p:nvSpPr>
+        <p:spPr>
+          <a:xfrm>
+            <a:off x="722313" y="3305176"/>
+            <a:ext cx="7772400" cy="1021556"/>
+          </a:xfrm>
+        </p:spPr>
+        <p:txBody>
+          <a:bodyPr/>
+          <a:lstStyle/>
+          <a:p>
+            <a:pPr lvl="0" indent="0" marL="0">
               <a:buNone/>
             </a:pPr>
             <a:r>
-              <a:rPr sz="2000" b="1"/>
-              <a:t>None</a:t>
-            </a:r>
-          </a:p>
-          <a:p>
-            <a:pPr lvl="0" indent="0" marL="1270000">
-              <a:buNone/>
-            </a:pPr>
-            <a:r>
-              <a:rPr sz="2000"/>
-              <a:t>PrOMMiS and IDAES do not just need a lithium recovery number. They need a defensible map from produced-water chemistry to stage transfer variables.</a:t>
+              <a:rPr/>
+              <a:t>4. PrOMMiS / IDAES Process Bridge</a:t>
             </a:r>
           </a:p>
         </p:txBody>
@@ -9250,12 +9315,7 @@
             <p:ph type="title"/>
           </p:nvPr>
         </p:nvSpPr>
-        <p:spPr>
-          <a:xfrm>
-            <a:off x="457201" y="204787"/>
-            <a:ext cx="3008313" cy="871538"/>
-          </a:xfrm>
-        </p:spPr>
+        <p:spPr/>
         <p:txBody>
           <a:bodyPr/>
           <a:lstStyle/>
@@ -9265,32 +9325,7 @@
             </a:pPr>
             <a:r>
               <a:rPr/>
-              <a:t>4.2 Transfer-Variable Contract</a:t>
-            </a:r>
-          </a:p>
-        </p:txBody>
-      </p:sp>
-      <p:sp>
-        <p:nvSpPr>
-          <p:cNvPr id="4" name="Text Placeholder 3"/>
-          <p:cNvSpPr>
-            <a:spLocks noGrp="1"/>
-          </p:cNvSpPr>
-          <p:nvPr>
-            <p:ph idx="2" sz="half" type="body"/>
-          </p:nvPr>
-        </p:nvSpPr>
-        <p:spPr/>
-        <p:txBody>
-          <a:bodyPr/>
-          <a:lstStyle/>
-          <a:p>
-            <a:pPr lvl="0" indent="0" marL="0">
-              <a:buNone/>
-            </a:pPr>
-            <a:r>
-              <a:rPr/>
-              <a:t>For process integration, the ePC-SAFT output should be treated as the following structured contract:</a:t>
+              <a:t>4.1 From Equilibrium To Transfer Variables</a:t>
             </a:r>
           </a:p>
         </p:txBody>
@@ -9306,8 +9341,8 @@
           </p:nvPr>
         </p:nvGraphicFramePr>
         <p:xfrm>
-          <a:off x="3568700" y="203200"/>
-          <a:ext cx="5105400" cy="4381500"/>
+          <a:off x="457200" y="1193800"/>
+          <a:ext cx="8229600" cy="3390900"/>
         </p:xfrm>
         <a:graphic>
           <a:graphicData uri="http://schemas.openxmlformats.org/drawingml/2006/table">
@@ -9316,9 +9351,9 @@
                 <a:tableStyleId>{5C22544A-7EE6-4342-B048-85BDC9FD1C3A}</a:tableStyleId>
               </a:tblPr>
               <a:tblGrid>
-                <a:gridCol w="1701800"/>
-                <a:gridCol w="1701800"/>
-                <a:gridCol w="1701800"/>
+                <a:gridCol w="2743200"/>
+                <a:gridCol w="2743200"/>
+                <a:gridCol w="2743200"/>
               </a:tblGrid>
               <a:tr h="0">
                 <a:tc>
@@ -9331,7 +9366,7 @@
                       </a:pPr>
                       <a:r>
                         <a:rPr/>
-                        <a:t>Variable</a:t>
+                        <a:t>Process-model need</a:t>
                       </a:r>
                     </a:p>
                   </a:txBody>
@@ -9347,7 +9382,7 @@
                       </a:pPr>
                       <a:r>
                         <a:rPr/>
-                        <a:t>Definition</a:t>
+                        <a:t>ePC-SAFT-derived quantity</a:t>
                       </a:r>
                     </a:p>
                   </a:txBody>
@@ -9363,7 +9398,7 @@
                       </a:pPr>
                       <a:r>
                         <a:rPr/>
-                        <a:t>Why PrOMMiS / IDAES needs it</a:t>
+                        <a:t>Use in PrOMMiS / IDAES</a:t>
                       </a:r>
                     </a:p>
                   </a:txBody>
@@ -9381,37 +9416,37 @@
                       </a:pPr>
                       <a:r>
                         <a:rPr/>
-                        <a:t>(_i)</a:t>
-                      </a:r>
-                    </a:p>
-                  </a:txBody>
-                </a:tc>
-                <a:tc>
-                  <a:txBody>
-                    <a:bodyPr/>
-                    <a:lstStyle/>
-                    <a:p>
-                      <a:pPr lvl="0" indent="0" marL="0">
-                        <a:buNone/>
-                      </a:pPr>
-                      <a:r>
-                        <a:rPr/>
-                        <a:t>stage removal (= (C_{i,in} - C_{i,out}) / C_{i,in})</a:t>
-                      </a:r>
-                    </a:p>
-                  </a:txBody>
-                </a:tc>
-                <a:tc>
-                  <a:txBody>
-                    <a:bodyPr/>
-                    <a:lstStyle/>
-                    <a:p>
-                      <a:pPr lvl="0" indent="0" marL="0">
-                        <a:buNone/>
-                      </a:pPr>
-                      <a:r>
-                        <a:rPr/>
-                        <a:t>Links chemistry to process-wide recovery objectives</a:t>
+                        <a:t>Feed state</a:t>
+                      </a:r>
+                    </a:p>
+                  </a:txBody>
+                </a:tc>
+                <a:tc>
+                  <a:txBody>
+                    <a:bodyPr/>
+                    <a:lstStyle/>
+                    <a:p>
+                      <a:pPr lvl="0" indent="0" marL="0">
+                        <a:buNone/>
+                      </a:pPr>
+                      <a:r>
+                        <a:rPr/>
+                        <a:t>(z_i), TDS, Li/Na/Mg/Ca/Sr/Ba/Cl basis, temperature</a:t>
+                      </a:r>
+                    </a:p>
+                  </a:txBody>
+                </a:tc>
+                <a:tc>
+                  <a:txBody>
+                    <a:bodyPr/>
+                    <a:lstStyle/>
+                    <a:p>
+                      <a:pPr lvl="0" indent="0" marL="0">
+                        <a:buNone/>
+                      </a:pPr>
+                      <a:r>
+                        <a:rPr/>
+                        <a:t>Basin-specific solvent-extraction inlet</a:t>
                       </a:r>
                     </a:p>
                   </a:txBody>
@@ -9428,37 +9463,37 @@
                       </a:pPr>
                       <a:r>
                         <a:rPr/>
-                        <a:t>(D_i)</a:t>
-                      </a:r>
-                    </a:p>
-                  </a:txBody>
-                </a:tc>
-                <a:tc>
-                  <a:txBody>
-                    <a:bodyPr/>
-                    <a:lstStyle/>
-                    <a:p>
-                      <a:pPr lvl="0" indent="0" marL="0">
-                        <a:buNone/>
-                      </a:pPr>
-                      <a:r>
-                        <a:rPr/>
-                        <a:t>(C_{i,org} / C_{i,aq})</a:t>
-                      </a:r>
-                    </a:p>
-                  </a:txBody>
-                </a:tc>
-                <a:tc>
-                  <a:txBody>
-                    <a:bodyPr/>
-                    <a:lstStyle/>
-                    <a:p>
-                      <a:pPr lvl="0" indent="0" marL="0">
-                        <a:buNone/>
-                      </a:pPr>
-                      <a:r>
-                        <a:rPr/>
-                        <a:t>Controls staged transfer in material balance equations</a:t>
+                        <a:t>Phase split</a:t>
+                      </a:r>
+                    </a:p>
+                  </a:txBody>
+                </a:tc>
+                <a:tc>
+                  <a:txBody>
+                    <a:bodyPr/>
+                    <a:lstStyle/>
+                    <a:p>
+                      <a:pPr lvl="0" indent="0" marL="0">
+                        <a:buNone/>
+                      </a:pPr>
+                      <a:r>
+                        <a:rPr/>
+                        <a:t>aqueous and organic compositions, phase fraction</a:t>
+                      </a:r>
+                    </a:p>
+                  </a:txBody>
+                </a:tc>
+                <a:tc>
+                  <a:txBody>
+                    <a:bodyPr/>
+                    <a:lstStyle/>
+                    <a:p>
+                      <a:pPr lvl="0" indent="0" marL="0">
+                        <a:buNone/>
+                      </a:pPr>
+                      <a:r>
+                        <a:rPr/>
+                        <a:t>Equilibrium target or closure for a stage</a:t>
                       </a:r>
                     </a:p>
                   </a:txBody>
@@ -9475,37 +9510,37 @@
                       </a:pPr>
                       <a:r>
                         <a:rPr/>
-                        <a:t>(S_{Li/Na}), (S_{Li/Mg}), (S_{Li/Ca})</a:t>
-                      </a:r>
-                    </a:p>
-                  </a:txBody>
-                </a:tc>
-                <a:tc>
-                  <a:txBody>
-                    <a:bodyPr/>
-                    <a:lstStyle/>
-                    <a:p>
-                      <a:pPr lvl="0" indent="0" marL="0">
-                        <a:buNone/>
-                      </a:pPr>
-                      <a:r>
-                        <a:rPr/>
-                        <a:t>Selectivity ratios from stage/phase outputs</a:t>
-                      </a:r>
-                    </a:p>
-                  </a:txBody>
-                </a:tc>
-                <a:tc>
-                  <a:txBody>
-                    <a:bodyPr/>
-                    <a:lstStyle/>
-                    <a:p>
-                      <a:pPr lvl="0" indent="0" marL="0">
-                        <a:buNone/>
-                      </a:pPr>
-                      <a:r>
-                        <a:rPr/>
-                        <a:t>Enables solvent and design comparison without refitting fixed coefficients</a:t>
+                        <a:t>Transfer strength</a:t>
+                      </a:r>
+                    </a:p>
+                  </a:txBody>
+                </a:tc>
+                <a:tc>
+                  <a:txBody>
+                    <a:bodyPr/>
+                    <a:lstStyle/>
+                    <a:p>
+                      <a:pPr lvl="0" indent="0" marL="0">
+                        <a:buNone/>
+                      </a:pPr>
+                      <a:r>
+                        <a:rPr/>
+                        <a:t>(D_i = C_{i,org}/C_{i,aq})</a:t>
+                      </a:r>
+                    </a:p>
+                  </a:txBody>
+                </a:tc>
+                <a:tc>
+                  <a:txBody>
+                    <a:bodyPr/>
+                    <a:lstStyle/>
+                    <a:p>
+                      <a:pPr lvl="0" indent="0" marL="0">
+                        <a:buNone/>
+                      </a:pPr>
+                      <a:r>
+                        <a:rPr/>
+                        <a:t>Distribution behavior in material balances</a:t>
                       </a:r>
                     </a:p>
                   </a:txBody>
@@ -9522,37 +9557,37 @@
                       </a:pPr>
                       <a:r>
                         <a:rPr/>
-                        <a:t>Validity flags</a:t>
-                      </a:r>
-                    </a:p>
-                  </a:txBody>
-                </a:tc>
-                <a:tc>
-                  <a:txBody>
-                    <a:bodyPr/>
-                    <a:lstStyle/>
-                    <a:p>
-                      <a:pPr lvl="0" indent="0" marL="0">
-                        <a:buNone/>
-                      </a:pPr>
-                      <a:r>
-                        <a:rPr/>
-                        <a:t>residuals, phase flags, domain bounds</a:t>
-                      </a:r>
-                    </a:p>
-                  </a:txBody>
-                </a:tc>
-                <a:tc>
-                  <a:txBody>
-                    <a:bodyPr/>
-                    <a:lstStyle/>
-                    <a:p>
-                      <a:pPr lvl="0" indent="0" marL="0">
-                        <a:buNone/>
-                      </a:pPr>
-                      <a:r>
-                        <a:rPr/>
-                        <a:t>Prevents brittle points from entering surrogate or optimizer datasets</a:t>
+                        <a:t>Selectivity</a:t>
+                      </a:r>
+                    </a:p>
+                  </a:txBody>
+                </a:tc>
+                <a:tc>
+                  <a:txBody>
+                    <a:bodyPr/>
+                    <a:lstStyle/>
+                    <a:p>
+                      <a:pPr lvl="0" indent="0" marL="0">
+                        <a:buNone/>
+                      </a:pPr>
+                      <a:r>
+                        <a:rPr/>
+                        <a:t>(S_{Li/Na})</a:t>
+                      </a:r>
+                    </a:p>
+                  </a:txBody>
+                </a:tc>
+                <a:tc>
+                  <a:txBody>
+                    <a:bodyPr/>
+                    <a:lstStyle/>
+                    <a:p>
+                      <a:pPr lvl="0" indent="0" marL="0">
+                        <a:buNone/>
+                      </a:pPr>
+                      <a:r>
+                        <a:rPr/>
+                        <a:t>Separation constraint for the active Li/Na showcase</a:t>
                       </a:r>
                     </a:p>
                   </a:txBody>
@@ -9613,7 +9648,7 @@
             </a:pPr>
             <a:r>
               <a:rPr sz="2000"/>
-              <a:t>This keeps the story concrete: ePC-SAFT computes the transfer map; PrOMMiS/IDAES consumes it.</a:t>
+              <a:t>PrOMMiS and IDAES do not just need a lithium recovery number. They need a defensible map from produced-water chemistry to stage transfer variables.</a:t>
             </a:r>
           </a:p>
         </p:txBody>
@@ -9650,7 +9685,12 @@
             <p:ph type="title"/>
           </p:nvPr>
         </p:nvSpPr>
-        <p:spPr/>
+        <p:spPr>
+          <a:xfrm>
+            <a:off x="457201" y="204787"/>
+            <a:ext cx="3008313" cy="871538"/>
+          </a:xfrm>
+        </p:spPr>
         <p:txBody>
           <a:bodyPr/>
           <a:lstStyle/>
@@ -9660,79 +9700,303 @@
             </a:pPr>
             <a:r>
               <a:rPr/>
-              <a:t>4.3 Why This Belongs In PrOMMiS / IDAES</a:t>
-            </a:r>
-          </a:p>
-        </p:txBody>
-      </p:sp>
-      <p:sp>
-        <p:nvSpPr>
-          <p:cNvPr id="3" name="Content Placeholder 2"/>
-          <p:cNvSpPr>
-            <a:spLocks noGrp="1"/>
-          </p:cNvSpPr>
+              <a:t>4.2 Transfer-Variable Contract</a:t>
+            </a:r>
+          </a:p>
+        </p:txBody>
+      </p:sp>
+      <p:sp>
+        <p:nvSpPr>
+          <p:cNvPr id="4" name="Text Placeholder 3"/>
+          <p:cNvSpPr>
+            <a:spLocks noGrp="1"/>
+          </p:cNvSpPr>
+          <p:nvPr>
+            <p:ph idx="2" sz="half" type="body"/>
+          </p:nvPr>
+        </p:nvSpPr>
+        <p:spPr/>
+        <p:txBody>
+          <a:bodyPr/>
+          <a:lstStyle/>
+          <a:p>
+            <a:pPr lvl="0" indent="0" marL="0">
+              <a:buNone/>
+            </a:pPr>
+            <a:r>
+              <a:rPr/>
+              <a:t>For process integration, the ePC-SAFT output should be treated as the following structured contract:</a:t>
+            </a:r>
+          </a:p>
+        </p:txBody>
+      </p:sp>
+      <p:graphicFrame>
+        <p:nvGraphicFramePr>
+          <p:cNvPr id="6" name="Content Placeholder 5"/>
+          <p:cNvGraphicFramePr>
+            <a:graphicFrameLocks noGrp="1"/>
+          </p:cNvGraphicFramePr>
           <p:nvPr>
             <p:ph idx="1"/>
           </p:nvPr>
-        </p:nvSpPr>
-        <p:spPr/>
-        <p:txBody>
-          <a:bodyPr/>
-          <a:lstStyle/>
-          <a:p>
-            <a:pPr lvl="0" indent="0" marL="0">
-              <a:buNone/>
-            </a:pPr>
-            <a:r>
-              <a:rPr b="1"/>
-              <a:t>1. Offline engine</a:t>
-            </a:r>
-            <a:r>
-              <a:rPr/>
-              <a:t> Run ePC-SAFT outside the flowsheet to generate equilibrium tables over feed chemistry, O/A ratio, and solvent conditions.</a:t>
-            </a:r>
-          </a:p>
-          <a:p>
-            <a:pPr lvl="0" indent="0" marL="0">
-              <a:buNone/>
-            </a:pPr>
-            <a:r>
-              <a:rPr b="1"/>
-              <a:t>2. Surrogate layer</a:t>
-            </a:r>
-            <a:r>
-              <a:rPr/>
-              <a:t> Fit ALAMO or another surrogate inside a documented trust region so optimization is fast and bounded.</a:t>
-            </a:r>
-          </a:p>
-          <a:p>
-            <a:pPr lvl="0" indent="0" marL="0">
-              <a:buNone/>
-            </a:pPr>
-            <a:r>
-              <a:rPr b="1"/>
-              <a:t>3. External function</a:t>
-            </a:r>
-            <a:r>
-              <a:rPr/>
-              <a:t> Expose high-fidelity calls for studies where direct thermodynamic solves are worth the cost.</a:t>
-            </a:r>
-          </a:p>
-          <a:p>
-            <a:pPr lvl="0" indent="0" marL="0">
-              <a:buNone/>
-            </a:pPr>
-            <a:r>
-              <a:rPr b="1"/>
-              <a:t>4. Process model</a:t>
-            </a:r>
-            <a:r>
-              <a:rPr/>
-              <a:t> Use PrOMMiS/IDAES for staged extraction, recycle, stripping, costing hooks, and optimization.</a:t>
-            </a:r>
-          </a:p>
-        </p:txBody>
-      </p:sp>
+        </p:nvGraphicFramePr>
+        <p:xfrm>
+          <a:off x="3568700" y="203200"/>
+          <a:ext cx="5105400" cy="4381500"/>
+        </p:xfrm>
+        <a:graphic>
+          <a:graphicData uri="http://schemas.openxmlformats.org/drawingml/2006/table">
+            <a:tbl>
+              <a:tblPr firstRow="1" bandRow="1">
+                <a:tableStyleId>{5C22544A-7EE6-4342-B048-85BDC9FD1C3A}</a:tableStyleId>
+              </a:tblPr>
+              <a:tblGrid>
+                <a:gridCol w="1701800"/>
+                <a:gridCol w="1701800"/>
+                <a:gridCol w="1701800"/>
+              </a:tblGrid>
+              <a:tr h="0">
+                <a:tc>
+                  <a:txBody>
+                    <a:bodyPr/>
+                    <a:lstStyle/>
+                    <a:p>
+                      <a:pPr lvl="0" indent="0" marL="0">
+                        <a:buNone/>
+                      </a:pPr>
+                      <a:r>
+                        <a:rPr/>
+                        <a:t>Variable</a:t>
+                      </a:r>
+                    </a:p>
+                  </a:txBody>
+                  <a:tcPr/>
+                </a:tc>
+                <a:tc>
+                  <a:txBody>
+                    <a:bodyPr/>
+                    <a:lstStyle/>
+                    <a:p>
+                      <a:pPr lvl="0" indent="0" marL="0">
+                        <a:buNone/>
+                      </a:pPr>
+                      <a:r>
+                        <a:rPr/>
+                        <a:t>Definition</a:t>
+                      </a:r>
+                    </a:p>
+                  </a:txBody>
+                  <a:tcPr/>
+                </a:tc>
+                <a:tc>
+                  <a:txBody>
+                    <a:bodyPr/>
+                    <a:lstStyle/>
+                    <a:p>
+                      <a:pPr lvl="0" indent="0" marL="0">
+                        <a:buNone/>
+                      </a:pPr>
+                      <a:r>
+                        <a:rPr/>
+                        <a:t>Why PrOMMiS / IDAES needs it</a:t>
+                      </a:r>
+                    </a:p>
+                  </a:txBody>
+                  <a:tcPr/>
+                </a:tc>
+              </a:tr>
+              <a:tr h="0">
+                <a:tc>
+                  <a:txBody>
+                    <a:bodyPr/>
+                    <a:lstStyle/>
+                    <a:p>
+                      <a:pPr lvl="0" indent="0" marL="0">
+                        <a:buNone/>
+                      </a:pPr>
+                      <a:r>
+                        <a:rPr/>
+                        <a:t>(_i)</a:t>
+                      </a:r>
+                    </a:p>
+                  </a:txBody>
+                </a:tc>
+                <a:tc>
+                  <a:txBody>
+                    <a:bodyPr/>
+                    <a:lstStyle/>
+                    <a:p>
+                      <a:pPr lvl="0" indent="0" marL="0">
+                        <a:buNone/>
+                      </a:pPr>
+                      <a:r>
+                        <a:rPr/>
+                        <a:t>stage removal (= (C_{i,in} - C_{i,out}) / C_{i,in})</a:t>
+                      </a:r>
+                    </a:p>
+                  </a:txBody>
+                </a:tc>
+                <a:tc>
+                  <a:txBody>
+                    <a:bodyPr/>
+                    <a:lstStyle/>
+                    <a:p>
+                      <a:pPr lvl="0" indent="0" marL="0">
+                        <a:buNone/>
+                      </a:pPr>
+                      <a:r>
+                        <a:rPr/>
+                        <a:t>Links chemistry to process-wide recovery objectives</a:t>
+                      </a:r>
+                    </a:p>
+                  </a:txBody>
+                </a:tc>
+              </a:tr>
+              <a:tr h="0">
+                <a:tc>
+                  <a:txBody>
+                    <a:bodyPr/>
+                    <a:lstStyle/>
+                    <a:p>
+                      <a:pPr lvl="0" indent="0" marL="0">
+                        <a:buNone/>
+                      </a:pPr>
+                      <a:r>
+                        <a:rPr/>
+                        <a:t>(D_i)</a:t>
+                      </a:r>
+                    </a:p>
+                  </a:txBody>
+                </a:tc>
+                <a:tc>
+                  <a:txBody>
+                    <a:bodyPr/>
+                    <a:lstStyle/>
+                    <a:p>
+                      <a:pPr lvl="0" indent="0" marL="0">
+                        <a:buNone/>
+                      </a:pPr>
+                      <a:r>
+                        <a:rPr/>
+                        <a:t>(C_{i,org} / C_{i,aq})</a:t>
+                      </a:r>
+                    </a:p>
+                  </a:txBody>
+                </a:tc>
+                <a:tc>
+                  <a:txBody>
+                    <a:bodyPr/>
+                    <a:lstStyle/>
+                    <a:p>
+                      <a:pPr lvl="0" indent="0" marL="0">
+                        <a:buNone/>
+                      </a:pPr>
+                      <a:r>
+                        <a:rPr/>
+                        <a:t>Controls staged transfer in material balance equations</a:t>
+                      </a:r>
+                    </a:p>
+                  </a:txBody>
+                </a:tc>
+              </a:tr>
+              <a:tr h="0">
+                <a:tc>
+                  <a:txBody>
+                    <a:bodyPr/>
+                    <a:lstStyle/>
+                    <a:p>
+                      <a:pPr lvl="0" indent="0" marL="0">
+                        <a:buNone/>
+                      </a:pPr>
+                      <a:r>
+                        <a:rPr/>
+                        <a:t>(S_{Li/Na})</a:t>
+                      </a:r>
+                    </a:p>
+                  </a:txBody>
+                </a:tc>
+                <a:tc>
+                  <a:txBody>
+                    <a:bodyPr/>
+                    <a:lstStyle/>
+                    <a:p>
+                      <a:pPr lvl="0" indent="0" marL="0">
+                        <a:buNone/>
+                      </a:pPr>
+                      <a:r>
+                        <a:rPr/>
+                        <a:t>Selectivity ratio from stage/phase outputs</a:t>
+                      </a:r>
+                    </a:p>
+                  </a:txBody>
+                </a:tc>
+                <a:tc>
+                  <a:txBody>
+                    <a:bodyPr/>
+                    <a:lstStyle/>
+                    <a:p>
+                      <a:pPr lvl="0" indent="0" marL="0">
+                        <a:buNone/>
+                      </a:pPr>
+                      <a:r>
+                        <a:rPr/>
+                        <a:t>Enables solvent and design comparison without refitting fixed coefficients</a:t>
+                      </a:r>
+                    </a:p>
+                  </a:txBody>
+                </a:tc>
+              </a:tr>
+              <a:tr h="0">
+                <a:tc>
+                  <a:txBody>
+                    <a:bodyPr/>
+                    <a:lstStyle/>
+                    <a:p>
+                      <a:pPr lvl="0" indent="0" marL="0">
+                        <a:buNone/>
+                      </a:pPr>
+                      <a:r>
+                        <a:rPr/>
+                        <a:t>Validity flags</a:t>
+                      </a:r>
+                    </a:p>
+                  </a:txBody>
+                </a:tc>
+                <a:tc>
+                  <a:txBody>
+                    <a:bodyPr/>
+                    <a:lstStyle/>
+                    <a:p>
+                      <a:pPr lvl="0" indent="0" marL="0">
+                        <a:buNone/>
+                      </a:pPr>
+                      <a:r>
+                        <a:rPr/>
+                        <a:t>residuals, phase flags, domain bounds</a:t>
+                      </a:r>
+                    </a:p>
+                  </a:txBody>
+                </a:tc>
+                <a:tc>
+                  <a:txBody>
+                    <a:bodyPr/>
+                    <a:lstStyle/>
+                    <a:p>
+                      <a:pPr lvl="0" indent="0" marL="0">
+                        <a:buNone/>
+                      </a:pPr>
+                      <a:r>
+                        <a:rPr/>
+                        <a:t>Prevents brittle points from entering surrogate or optimizer datasets</a:t>
+                      </a:r>
+                    </a:p>
+                  </a:txBody>
+                </a:tc>
+              </a:tr>
+            </a:tbl>
+          </a:graphicData>
+        </a:graphic>
+      </p:graphicFrame>
     </p:spTree>
   </p:cSld>
 </p:sld>
@@ -9757,369 +10021,38 @@
       </p:grpSpPr>
       <p:sp>
         <p:nvSpPr>
-          <p:cNvPr id="2" name="Title 1"/>
-          <p:cNvSpPr>
-            <a:spLocks noGrp="1"/>
-          </p:cNvSpPr>
-          <p:nvPr>
-            <p:ph type="title"/>
-          </p:nvPr>
-        </p:nvSpPr>
-        <p:spPr/>
-        <p:txBody>
-          <a:bodyPr/>
-          <a:lstStyle/>
-          <a:p>
-            <a:pPr lvl="0" indent="0" marL="0">
+          <p:cNvPr id="3" name="Content Placeholder 2"/>
+          <p:cNvSpPr>
+            <a:spLocks noGrp="1"/>
+          </p:cNvSpPr>
+          <p:nvPr>
+            <p:ph idx="1"/>
+          </p:nvPr>
+        </p:nvSpPr>
+        <p:spPr/>
+        <p:txBody>
+          <a:bodyPr/>
+          <a:lstStyle/>
+          <a:p>
+            <a:pPr lvl="0" indent="0" marL="1270000">
               <a:buNone/>
             </a:pPr>
             <a:r>
-              <a:rPr/>
-              <a:t>4.4 Formal IDAES Costing Scaffold</a:t>
-            </a:r>
-          </a:p>
-        </p:txBody>
-      </p:sp>
-      <p:graphicFrame>
-        <p:nvGraphicFramePr>
-          <p:cNvPr id="6" name="Content Placeholder 5"/>
-          <p:cNvGraphicFramePr>
-            <a:graphicFrameLocks noGrp="1"/>
-          </p:cNvGraphicFramePr>
-          <p:nvPr>
-            <p:ph idx="1"/>
-          </p:nvPr>
-        </p:nvGraphicFramePr>
-        <p:xfrm>
-          <a:off x="457200" y="1193800"/>
-          <a:ext cx="8229600" cy="3390900"/>
-        </p:xfrm>
-        <a:graphic>
-          <a:graphicData uri="http://schemas.openxmlformats.org/drawingml/2006/table">
-            <a:tbl>
-              <a:tblPr firstRow="1" bandRow="1">
-                <a:tableStyleId>{5C22544A-7EE6-4342-B048-85BDC9FD1C3A}</a:tableStyleId>
-              </a:tblPr>
-              <a:tblGrid>
-                <a:gridCol w="2743200"/>
-                <a:gridCol w="2743200"/>
-                <a:gridCol w="2743200"/>
-              </a:tblGrid>
-              <a:tr h="0">
-                <a:tc>
-                  <a:txBody>
-                    <a:bodyPr/>
-                    <a:lstStyle/>
-                    <a:p>
-                      <a:pPr lvl="0" indent="0" marL="0">
-                        <a:buNone/>
-                      </a:pPr>
-                      <a:r>
-                        <a:rPr/>
-                        <a:t>Costing block</a:t>
-                      </a:r>
-                    </a:p>
-                  </a:txBody>
-                  <a:tcPr/>
-                </a:tc>
-                <a:tc>
-                  <a:txBody>
-                    <a:bodyPr/>
-                    <a:lstStyle/>
-                    <a:p>
-                      <a:pPr lvl="0" indent="0" marL="0">
-                        <a:buNone/>
-                      </a:pPr>
-                      <a:r>
-                        <a:rPr/>
-                        <a:t>Current basis</a:t>
-                      </a:r>
-                    </a:p>
-                  </a:txBody>
-                  <a:tcPr/>
-                </a:tc>
-                <a:tc>
-                  <a:txBody>
-                    <a:bodyPr/>
-                    <a:lstStyle/>
-                    <a:p>
-                      <a:pPr lvl="0" indent="0" marL="0">
-                        <a:buNone/>
-                      </a:pPr>
-                      <a:r>
-                        <a:rPr/>
-                        <a:t>Needed before formal TEA</a:t>
-                      </a:r>
-                    </a:p>
-                  </a:txBody>
-                  <a:tcPr/>
-                </a:tc>
-              </a:tr>
-              <a:tr h="0">
-                <a:tc>
-                  <a:txBody>
-                    <a:bodyPr/>
-                    <a:lstStyle/>
-                    <a:p>
-                      <a:pPr lvl="0" indent="0" marL="0">
-                        <a:buNone/>
-                      </a:pPr>
-                      <a:r>
-                        <a:rPr/>
-                        <a:t>Feed and annual basis</a:t>
-                      </a:r>
-                    </a:p>
-                  </a:txBody>
-                </a:tc>
-                <a:tc>
-                  <a:txBody>
-                    <a:bodyPr/>
-                    <a:lstStyle/>
-                    <a:p>
-                      <a:pPr lvl="0" indent="0" marL="0">
-                        <a:buNone/>
-                      </a:pPr>
-                      <a:r>
-                        <a:rPr/>
-                        <a:t>Smackover base feed; </a:t>
-                      </a:r>
-                      <a:r>
-                        <a:rPr>
-                          <a:latin typeface="Courier"/>
-                        </a:rPr>
-                        <a:t>100/1000/10000 m3/day</a:t>
-                      </a:r>
-                      <a:r>
-                        <a:rPr/>
-                        <a:t> scenarios</a:t>
-                      </a:r>
-                    </a:p>
-                  </a:txBody>
-                </a:tc>
-                <a:tc>
-                  <a:txBody>
-                    <a:bodyPr/>
-                    <a:lstStyle/>
-                    <a:p>
-                      <a:pPr lvl="0" indent="0" marL="0">
-                        <a:buNone/>
-                      </a:pPr>
-                      <a:r>
-                        <a:rPr/>
-                        <a:t>approved flowrate and uptime</a:t>
-                      </a:r>
-                    </a:p>
-                  </a:txBody>
-                </a:tc>
-              </a:tr>
-              <a:tr h="0">
-                <a:tc>
-                  <a:txBody>
-                    <a:bodyPr/>
-                    <a:lstStyle/>
-                    <a:p>
-                      <a:pPr lvl="0" indent="0" marL="0">
-                        <a:buNone/>
-                      </a:pPr>
-                      <a:r>
-                        <a:rPr/>
-                        <a:t>Pretreatment</a:t>
-                      </a:r>
-                    </a:p>
-                  </a:txBody>
-                </a:tc>
-                <a:tc>
-                  <a:txBody>
-                    <a:bodyPr/>
-                    <a:lstStyle/>
-                    <a:p>
-                      <a:pPr lvl="0" indent="0" marL="0">
-                        <a:buNone/>
-                      </a:pPr>
-                      <a:r>
-                        <a:rPr/>
-                        <a:t>IDAES/Pyomo scenario expression from model inputs</a:t>
-                      </a:r>
-                    </a:p>
-                  </a:txBody>
-                </a:tc>
-                <a:tc>
-                  <a:txBody>
-                    <a:bodyPr/>
-                    <a:lstStyle/>
-                    <a:p>
-                      <a:pPr lvl="0" indent="0" marL="0">
-                        <a:buNone/>
-                      </a:pPr>
-                      <a:r>
-                        <a:rPr/>
-                        <a:t>removal target, reagent use, waste handling</a:t>
-                      </a:r>
-                    </a:p>
-                  </a:txBody>
-                </a:tc>
-              </a:tr>
-              <a:tr h="0">
-                <a:tc>
-                  <a:txBody>
-                    <a:bodyPr/>
-                    <a:lstStyle/>
-                    <a:p>
-                      <a:pPr lvl="0" indent="0" marL="0">
-                        <a:buNone/>
-                      </a:pPr>
-                      <a:r>
-                        <a:rPr/>
-                        <a:t>Extraction/contacting</a:t>
-                      </a:r>
-                    </a:p>
-                  </a:txBody>
-                </a:tc>
-                <a:tc>
-                  <a:txBody>
-                    <a:bodyPr/>
-                    <a:lstStyle/>
-                    <a:p>
-                      <a:pPr lvl="0" indent="0" marL="0">
-                        <a:buNone/>
-                      </a:pPr>
-                      <a:r>
-                        <a:rPr/>
-                        <a:t>three-stage HBTA/TOPO reactive-stage solve</a:t>
-                      </a:r>
-                    </a:p>
-                  </a:txBody>
-                </a:tc>
-                <a:tc>
-                  <a:txBody>
-                    <a:bodyPr/>
-                    <a:lstStyle/>
-                    <a:p>
-                      <a:pPr lvl="0" indent="0" marL="0">
-                        <a:buNone/>
-                      </a:pPr>
-                      <a:r>
-                        <a:rPr/>
-                        <a:t>contactor sizing, residence time, solvent inventory</a:t>
-                      </a:r>
-                    </a:p>
-                  </a:txBody>
-                </a:tc>
-              </a:tr>
-              <a:tr h="0">
-                <a:tc>
-                  <a:txBody>
-                    <a:bodyPr/>
-                    <a:lstStyle/>
-                    <a:p>
-                      <a:pPr lvl="0" indent="0" marL="0">
-                        <a:buNone/>
-                      </a:pPr>
-                      <a:r>
-                        <a:rPr/>
-                        <a:t>Solvent makeup/loss</a:t>
-                      </a:r>
-                    </a:p>
-                  </a:txBody>
-                </a:tc>
-                <a:tc>
-                  <a:txBody>
-                    <a:bodyPr/>
-                    <a:lstStyle/>
-                    <a:p>
-                      <a:pPr lvl="0" indent="0" marL="0">
-                        <a:buNone/>
-                      </a:pPr>
-                      <a:r>
-                        <a:rPr/>
-                        <a:t>low/base/high placeholder per m3 feed</a:t>
-                      </a:r>
-                    </a:p>
-                  </a:txBody>
-                </a:tc>
-                <a:tc>
-                  <a:txBody>
-                    <a:bodyPr/>
-                    <a:lstStyle/>
-                    <a:p>
-                      <a:pPr lvl="0" indent="0" marL="0">
-                        <a:buNone/>
-                      </a:pPr>
-                      <a:r>
-                        <a:rPr/>
-                        <a:t>HBTA/TOPO/diluent prices and loss rate</a:t>
-                      </a:r>
-                    </a:p>
-                  </a:txBody>
-                </a:tc>
-              </a:tr>
-              <a:tr h="0">
-                <a:tc>
-                  <a:txBody>
-                    <a:bodyPr/>
-                    <a:lstStyle/>
-                    <a:p>
-                      <a:pPr lvl="0" indent="0" marL="0">
-                        <a:buNone/>
-                      </a:pPr>
-                      <a:r>
-                        <a:rPr/>
-                        <a:t>Concentration and Li2CO3 precipitation</a:t>
-                      </a:r>
-                    </a:p>
-                  </a:txBody>
-                </a:tc>
-                <a:tc>
-                  <a:txBody>
-                    <a:bodyPr/>
-                    <a:lstStyle/>
-                    <a:p>
-                      <a:pPr lvl="0" indent="0" marL="0">
-                        <a:buNone/>
-                      </a:pPr>
-                      <a:r>
-                        <a:rPr/>
-                        <a:t>product-purity anchor </a:t>
-                      </a:r>
-                      <a:r>
-                        <a:rPr>
-                          <a:latin typeface="Courier"/>
-                        </a:rPr>
-                        <a:t>99.28%</a:t>
-                      </a:r>
-                      <a:r>
-                        <a:rPr/>
-                        <a:t>; recovery capped at </a:t>
-                      </a:r>
-                      <a:r>
-                        <a:rPr>
-                          <a:latin typeface="Courier"/>
-                        </a:rPr>
-                        <a:t>97.17%</a:t>
-                      </a:r>
-                    </a:p>
-                  </a:txBody>
-                </a:tc>
-                <a:tc>
-                  <a:txBody>
-                    <a:bodyPr/>
-                    <a:lstStyle/>
-                    <a:p>
-                      <a:pPr lvl="0" indent="0" marL="0">
-                        <a:buNone/>
-                      </a:pPr>
-                      <a:r>
-                        <a:rPr/>
-                        <a:t>evaporation duty, carbonate reagent, product spec</a:t>
-                      </a:r>
-                    </a:p>
-                  </a:txBody>
-                </a:tc>
-              </a:tr>
-            </a:tbl>
-          </a:graphicData>
-        </a:graphic>
-      </p:graphicFrame>
+              <a:rPr sz="2000" b="1"/>
+              <a:t>None</a:t>
+            </a:r>
+          </a:p>
+          <a:p>
+            <a:pPr lvl="0" indent="0" marL="1270000">
+              <a:buNone/>
+            </a:pPr>
+            <a:r>
+              <a:rPr sz="2000"/>
+              <a:t>This keeps the story concrete: ePC-SAFT computes the transfer map; PrOMMiS/IDAES consumes it.</a:t>
+            </a:r>
+          </a:p>
+        </p:txBody>
+      </p:sp>
     </p:spTree>
   </p:cSld>
 </p:sld>
@@ -10144,6 +10077,31 @@
       </p:grpSpPr>
       <p:sp>
         <p:nvSpPr>
+          <p:cNvPr id="2" name="Title 1"/>
+          <p:cNvSpPr>
+            <a:spLocks noGrp="1"/>
+          </p:cNvSpPr>
+          <p:nvPr>
+            <p:ph type="title"/>
+          </p:nvPr>
+        </p:nvSpPr>
+        <p:spPr/>
+        <p:txBody>
+          <a:bodyPr/>
+          <a:lstStyle/>
+          <a:p>
+            <a:pPr lvl="0" indent="0" marL="0">
+              <a:buNone/>
+            </a:pPr>
+            <a:r>
+              <a:rPr/>
+              <a:t>4.3 Why This Belongs In PrOMMiS / IDAES</a:t>
+            </a:r>
+          </a:p>
+        </p:txBody>
+      </p:sp>
+      <p:sp>
+        <p:nvSpPr>
           <p:cNvPr id="3" name="Content Placeholder 2"/>
           <p:cNvSpPr>
             <a:spLocks noGrp="1"/>
@@ -10157,21 +10115,55 @@
           <a:bodyPr/>
           <a:lstStyle/>
           <a:p>
-            <a:pPr lvl="0" indent="0" marL="1270000">
+            <a:pPr lvl="0" indent="0" marL="0">
               <a:buNone/>
             </a:pPr>
             <a:r>
-              <a:rPr sz="2000" b="1"/>
-              <a:t>None</a:t>
-            </a:r>
-          </a:p>
-          <a:p>
-            <a:pPr lvl="0" indent="0" marL="1270000">
+              <a:rPr b="1"/>
+              <a:t>1. Offline engine</a:t>
+            </a:r>
+            <a:r>
+              <a:rPr/>
+              <a:t> Run ePC-SAFT outside the flowsheet to generate equilibrium tables over feed chemistry, O/A ratio, and solvent conditions.</a:t>
+            </a:r>
+          </a:p>
+          <a:p>
+            <a:pPr lvl="0" indent="0" marL="0">
               <a:buNone/>
             </a:pPr>
             <a:r>
-              <a:rPr sz="2000"/>
-              <a:t>The formal IDAES/Pyomo layer computes production, revenue, annual operating cost, annualized contactor CAPEX, breakeven Li2CO3 price, and net-before-tax scenario values.</a:t>
+              <a:rPr b="1"/>
+              <a:t>2. Surrogate layer</a:t>
+            </a:r>
+            <a:r>
+              <a:rPr/>
+              <a:t> Fit ALAMO or another surrogate inside a documented trust region so optimization is fast and bounded.</a:t>
+            </a:r>
+          </a:p>
+          <a:p>
+            <a:pPr lvl="0" indent="0" marL="0">
+              <a:buNone/>
+            </a:pPr>
+            <a:r>
+              <a:rPr b="1"/>
+              <a:t>3. External function</a:t>
+            </a:r>
+            <a:r>
+              <a:rPr/>
+              <a:t> Expose high-fidelity calls for studies where direct thermodynamic solves are worth the cost.</a:t>
+            </a:r>
+          </a:p>
+          <a:p>
+            <a:pPr lvl="0" indent="0" marL="0">
+              <a:buNone/>
+            </a:pPr>
+            <a:r>
+              <a:rPr b="1"/>
+              <a:t>4. Process model</a:t>
+            </a:r>
+            <a:r>
+              <a:rPr/>
+              <a:t> Use PrOMMiS/IDAES for staged extraction, recycle, stripping, costing hooks, and optimization.</a:t>
             </a:r>
           </a:p>
         </p:txBody>
@@ -10218,117 +10210,341 @@
             </a:pPr>
             <a:r>
               <a:rPr/>
-              <a:t>4.5 Implementation Requirements</a:t>
-            </a:r>
-          </a:p>
-        </p:txBody>
-      </p:sp>
-      <p:sp>
-        <p:nvSpPr>
-          <p:cNvPr id="3" name="Content Placeholder 2"/>
-          <p:cNvSpPr>
-            <a:spLocks noGrp="1"/>
-          </p:cNvSpPr>
-          <p:nvPr>
-            <p:ph idx="1" sz="half"/>
-          </p:nvPr>
-        </p:nvSpPr>
-        <p:spPr/>
-        <p:txBody>
-          <a:bodyPr/>
-          <a:lstStyle/>
-          <a:p>
-            <a:pPr lvl="0" indent="0" marL="0">
-              <a:buNone/>
-            </a:pPr>
-            <a:r>
-              <a:rPr b="1"/>
-              <a:t>Add ePC-SAFT as the thermodynamic backbone</a:t>
-            </a:r>
-          </a:p>
-          <a:p>
-            <a:pPr lvl="0"/>
-            <a:r>
-              <a:rPr/>
-              <a:t>property/equilibrium service for electrolyte LLE</a:t>
-            </a:r>
-          </a:p>
-          <a:p>
-            <a:pPr lvl="0"/>
-            <a:r>
-              <a:rPr/>
-              <a:t>documented species and feed basis</a:t>
-            </a:r>
-          </a:p>
-          <a:p>
-            <a:pPr lvl="0"/>
-            <a:r>
-              <a:rPr/>
-              <a:t>diagnostics carried with every result</a:t>
-            </a:r>
-          </a:p>
-          <a:p>
-            <a:pPr lvl="0"/>
-            <a:r>
-              <a:rPr/>
-              <a:t>reproducible dataset generation</a:t>
-            </a:r>
-          </a:p>
-        </p:txBody>
-      </p:sp>
-      <p:sp>
-        <p:nvSpPr>
-          <p:cNvPr id="4" name="Content Placeholder 3"/>
-          <p:cNvSpPr>
-            <a:spLocks noGrp="1"/>
-          </p:cNvSpPr>
-          <p:nvPr>
-            <p:ph idx="2" sz="half"/>
-          </p:nvPr>
-        </p:nvSpPr>
-        <p:spPr/>
-        <p:txBody>
-          <a:bodyPr/>
-          <a:lstStyle/>
-          <a:p>
-            <a:pPr lvl="0" indent="0" marL="0">
-              <a:buNone/>
-            </a:pPr>
-            <a:r>
-              <a:rPr b="1"/>
-              <a:t>Use PrOMMiS/IDAES for the process system</a:t>
-            </a:r>
-          </a:p>
-          <a:p>
-            <a:pPr lvl="0"/>
-            <a:r>
-              <a:rPr/>
-              <a:t>solvent-extraction stage balances</a:t>
-            </a:r>
-          </a:p>
-          <a:p>
-            <a:pPr lvl="0"/>
-            <a:r>
-              <a:rPr/>
-              <a:t>multi-stage contactors</a:t>
-            </a:r>
-          </a:p>
-          <a:p>
-            <a:pPr lvl="0"/>
-            <a:r>
-              <a:rPr/>
-              <a:t>surrogate and external-function interfaces</a:t>
-            </a:r>
-          </a:p>
-          <a:p>
-            <a:pPr lvl="0"/>
-            <a:r>
-              <a:rPr/>
-              <a:t>flowsheet optimization and costing hooks</a:t>
-            </a:r>
-          </a:p>
-        </p:txBody>
-      </p:sp>
+              <a:t>4.4 Formal IDAES Costing Scaffold</a:t>
+            </a:r>
+          </a:p>
+        </p:txBody>
+      </p:sp>
+      <p:graphicFrame>
+        <p:nvGraphicFramePr>
+          <p:cNvPr id="6" name="Content Placeholder 5"/>
+          <p:cNvGraphicFramePr>
+            <a:graphicFrameLocks noGrp="1"/>
+          </p:cNvGraphicFramePr>
+          <p:nvPr>
+            <p:ph idx="1"/>
+          </p:nvPr>
+        </p:nvGraphicFramePr>
+        <p:xfrm>
+          <a:off x="457200" y="1193800"/>
+          <a:ext cx="8229600" cy="3390900"/>
+        </p:xfrm>
+        <a:graphic>
+          <a:graphicData uri="http://schemas.openxmlformats.org/drawingml/2006/table">
+            <a:tbl>
+              <a:tblPr firstRow="1" bandRow="1">
+                <a:tableStyleId>{5C22544A-7EE6-4342-B048-85BDC9FD1C3A}</a:tableStyleId>
+              </a:tblPr>
+              <a:tblGrid>
+                <a:gridCol w="2743200"/>
+                <a:gridCol w="2743200"/>
+                <a:gridCol w="2743200"/>
+              </a:tblGrid>
+              <a:tr h="0">
+                <a:tc>
+                  <a:txBody>
+                    <a:bodyPr/>
+                    <a:lstStyle/>
+                    <a:p>
+                      <a:pPr lvl="0" indent="0" marL="0">
+                        <a:buNone/>
+                      </a:pPr>
+                      <a:r>
+                        <a:rPr/>
+                        <a:t>Costing block</a:t>
+                      </a:r>
+                    </a:p>
+                  </a:txBody>
+                  <a:tcPr/>
+                </a:tc>
+                <a:tc>
+                  <a:txBody>
+                    <a:bodyPr/>
+                    <a:lstStyle/>
+                    <a:p>
+                      <a:pPr lvl="0" indent="0" marL="0">
+                        <a:buNone/>
+                      </a:pPr>
+                      <a:r>
+                        <a:rPr/>
+                        <a:t>Current basis</a:t>
+                      </a:r>
+                    </a:p>
+                  </a:txBody>
+                  <a:tcPr/>
+                </a:tc>
+                <a:tc>
+                  <a:txBody>
+                    <a:bodyPr/>
+                    <a:lstStyle/>
+                    <a:p>
+                      <a:pPr lvl="0" indent="0" marL="0">
+                        <a:buNone/>
+                      </a:pPr>
+                      <a:r>
+                        <a:rPr/>
+                        <a:t>Needed before formal TEA</a:t>
+                      </a:r>
+                    </a:p>
+                  </a:txBody>
+                  <a:tcPr/>
+                </a:tc>
+              </a:tr>
+              <a:tr h="0">
+                <a:tc>
+                  <a:txBody>
+                    <a:bodyPr/>
+                    <a:lstStyle/>
+                    <a:p>
+                      <a:pPr lvl="0" indent="0" marL="0">
+                        <a:buNone/>
+                      </a:pPr>
+                      <a:r>
+                        <a:rPr/>
+                        <a:t>Feed and annual basis</a:t>
+                      </a:r>
+                    </a:p>
+                  </a:txBody>
+                </a:tc>
+                <a:tc>
+                  <a:txBody>
+                    <a:bodyPr/>
+                    <a:lstStyle/>
+                    <a:p>
+                      <a:pPr lvl="0" indent="0" marL="0">
+                        <a:buNone/>
+                      </a:pPr>
+                      <a:r>
+                        <a:rPr/>
+                        <a:t>Smackover base feed; </a:t>
+                      </a:r>
+                      <a:r>
+                        <a:rPr>
+                          <a:latin typeface="Courier"/>
+                        </a:rPr>
+                        <a:t>100/1000/10000 m3/day</a:t>
+                      </a:r>
+                      <a:r>
+                        <a:rPr/>
+                        <a:t> scenarios</a:t>
+                      </a:r>
+                    </a:p>
+                  </a:txBody>
+                </a:tc>
+                <a:tc>
+                  <a:txBody>
+                    <a:bodyPr/>
+                    <a:lstStyle/>
+                    <a:p>
+                      <a:pPr lvl="0" indent="0" marL="0">
+                        <a:buNone/>
+                      </a:pPr>
+                      <a:r>
+                        <a:rPr/>
+                        <a:t>approved flowrate and uptime</a:t>
+                      </a:r>
+                    </a:p>
+                  </a:txBody>
+                </a:tc>
+              </a:tr>
+              <a:tr h="0">
+                <a:tc>
+                  <a:txBody>
+                    <a:bodyPr/>
+                    <a:lstStyle/>
+                    <a:p>
+                      <a:pPr lvl="0" indent="0" marL="0">
+                        <a:buNone/>
+                      </a:pPr>
+                      <a:r>
+                        <a:rPr/>
+                        <a:t>Pretreatment</a:t>
+                      </a:r>
+                    </a:p>
+                  </a:txBody>
+                </a:tc>
+                <a:tc>
+                  <a:txBody>
+                    <a:bodyPr/>
+                    <a:lstStyle/>
+                    <a:p>
+                      <a:pPr lvl="0" indent="0" marL="0">
+                        <a:buNone/>
+                      </a:pPr>
+                      <a:r>
+                        <a:rPr/>
+                        <a:t>IDAES/Pyomo scenario expression from model inputs</a:t>
+                      </a:r>
+                    </a:p>
+                  </a:txBody>
+                </a:tc>
+                <a:tc>
+                  <a:txBody>
+                    <a:bodyPr/>
+                    <a:lstStyle/>
+                    <a:p>
+                      <a:pPr lvl="0" indent="0" marL="0">
+                        <a:buNone/>
+                      </a:pPr>
+                      <a:r>
+                        <a:rPr/>
+                        <a:t>removal target, reagent use, waste handling</a:t>
+                      </a:r>
+                    </a:p>
+                  </a:txBody>
+                </a:tc>
+              </a:tr>
+              <a:tr h="0">
+                <a:tc>
+                  <a:txBody>
+                    <a:bodyPr/>
+                    <a:lstStyle/>
+                    <a:p>
+                      <a:pPr lvl="0" indent="0" marL="0">
+                        <a:buNone/>
+                      </a:pPr>
+                      <a:r>
+                        <a:rPr/>
+                        <a:t>Extraction/contacting</a:t>
+                      </a:r>
+                    </a:p>
+                  </a:txBody>
+                </a:tc>
+                <a:tc>
+                  <a:txBody>
+                    <a:bodyPr/>
+                    <a:lstStyle/>
+                    <a:p>
+                      <a:pPr lvl="0" indent="0" marL="0">
+                        <a:buNone/>
+                      </a:pPr>
+                      <a:r>
+                        <a:rPr/>
+                        <a:t>three-stage Rezaee DES/TOPO Li/Na bridge</a:t>
+                      </a:r>
+                    </a:p>
+                  </a:txBody>
+                </a:tc>
+                <a:tc>
+                  <a:txBody>
+                    <a:bodyPr/>
+                    <a:lstStyle/>
+                    <a:p>
+                      <a:pPr lvl="0" indent="0" marL="0">
+                        <a:buNone/>
+                      </a:pPr>
+                      <a:r>
+                        <a:rPr/>
+                        <a:t>contactor sizing, residence time, solvent inventory</a:t>
+                      </a:r>
+                    </a:p>
+                  </a:txBody>
+                </a:tc>
+              </a:tr>
+              <a:tr h="0">
+                <a:tc>
+                  <a:txBody>
+                    <a:bodyPr/>
+                    <a:lstStyle/>
+                    <a:p>
+                      <a:pPr lvl="0" indent="0" marL="0">
+                        <a:buNone/>
+                      </a:pPr>
+                      <a:r>
+                        <a:rPr/>
+                        <a:t>Solvent makeup/loss</a:t>
+                      </a:r>
+                    </a:p>
+                  </a:txBody>
+                </a:tc>
+                <a:tc>
+                  <a:txBody>
+                    <a:bodyPr/>
+                    <a:lstStyle/>
+                    <a:p>
+                      <a:pPr lvl="0" indent="0" marL="0">
+                        <a:buNone/>
+                      </a:pPr>
+                      <a:r>
+                        <a:rPr/>
+                        <a:t>low/base/high placeholder per m3 feed</a:t>
+                      </a:r>
+                    </a:p>
+                  </a:txBody>
+                </a:tc>
+                <a:tc>
+                  <a:txBody>
+                    <a:bodyPr/>
+                    <a:lstStyle/>
+                    <a:p>
+                      <a:pPr lvl="0" indent="0" marL="0">
+                        <a:buNone/>
+                      </a:pPr>
+                      <a:r>
+                        <a:rPr/>
+                        <a:t>DES/TOPO prices and solvent-loss rate</a:t>
+                      </a:r>
+                    </a:p>
+                  </a:txBody>
+                </a:tc>
+              </a:tr>
+              <a:tr h="0">
+                <a:tc>
+                  <a:txBody>
+                    <a:bodyPr/>
+                    <a:lstStyle/>
+                    <a:p>
+                      <a:pPr lvl="0" indent="0" marL="0">
+                        <a:buNone/>
+                      </a:pPr>
+                      <a:r>
+                        <a:rPr/>
+                        <a:t>Concentration and Li2CO3 precipitation</a:t>
+                      </a:r>
+                    </a:p>
+                  </a:txBody>
+                </a:tc>
+                <a:tc>
+                  <a:txBody>
+                    <a:bodyPr/>
+                    <a:lstStyle/>
+                    <a:p>
+                      <a:pPr lvl="0" indent="0" marL="0">
+                        <a:buNone/>
+                      </a:pPr>
+                      <a:r>
+                        <a:rPr/>
+                        <a:t>bridge recovery </a:t>
+                      </a:r>
+                      <a:r>
+                        <a:rPr>
+                          <a:latin typeface="Courier"/>
+                        </a:rPr>
+                        <a:t>83.6925%</a:t>
+                      </a:r>
+                    </a:p>
+                  </a:txBody>
+                </a:tc>
+                <a:tc>
+                  <a:txBody>
+                    <a:bodyPr/>
+                    <a:lstStyle/>
+                    <a:p>
+                      <a:pPr lvl="0" indent="0" marL="0">
+                        <a:buNone/>
+                      </a:pPr>
+                      <a:r>
+                        <a:rPr/>
+                        <a:t>evaporation duty, carbonate reagent, product spec</a:t>
+                      </a:r>
+                    </a:p>
+                  </a:txBody>
+                </a:tc>
+              </a:tr>
+            </a:tbl>
+          </a:graphicData>
+        </a:graphic>
+      </p:graphicFrame>
     </p:spTree>
   </p:cSld>
 </p:sld>
@@ -10380,7 +10596,7 @@
             </a:pPr>
             <a:r>
               <a:rPr sz="2000"/>
-              <a:t>The sell is simple: ePC-SAFT supplies the equilibrium evidence; PrOMMiS/IDAES turns that evidence into a process model.</a:t>
+              <a:t>The formal IDAES/Pyomo layer computes production, revenue, annual operating cost, annualized contactor CAPEX, breakeven Li2CO3 price, and net-before-tax scenario values.</a:t>
             </a:r>
           </a:p>
         </p:txBody>
@@ -10427,278 +10643,41 @@
             </a:pPr>
             <a:r>
               <a:rPr/>
-              <a:t>4.6 Remaining Engineering Work</a:t>
-            </a:r>
-          </a:p>
-        </p:txBody>
-      </p:sp>
-      <p:graphicFrame>
-        <p:nvGraphicFramePr>
-          <p:cNvPr id="6" name="Content Placeholder 5"/>
-          <p:cNvGraphicFramePr>
-            <a:graphicFrameLocks noGrp="1"/>
-          </p:cNvGraphicFramePr>
-          <p:nvPr>
-            <p:ph idx="1"/>
-          </p:nvPr>
-        </p:nvGraphicFramePr>
-        <p:xfrm>
-          <a:off x="457200" y="1193800"/>
-          <a:ext cx="8229600" cy="3390900"/>
-        </p:xfrm>
-        <a:graphic>
-          <a:graphicData uri="http://schemas.openxmlformats.org/drawingml/2006/table">
-            <a:tbl>
-              <a:tblPr firstRow="1" bandRow="1">
-                <a:tableStyleId>{5C22544A-7EE6-4342-B048-85BDC9FD1C3A}</a:tableStyleId>
-              </a:tblPr>
-              <a:tblGrid>
-                <a:gridCol w="2743200"/>
-                <a:gridCol w="2743200"/>
-                <a:gridCol w="2743200"/>
-              </a:tblGrid>
-              <a:tr h="0">
-                <a:tc>
-                  <a:txBody>
-                    <a:bodyPr/>
-                    <a:lstStyle/>
-                    <a:p>
-                      <a:pPr lvl="0" indent="0" marL="0">
-                        <a:buNone/>
-                      </a:pPr>
-                      <a:r>
-                        <a:rPr/>
-                        <a:t>Priority</a:t>
-                      </a:r>
-                    </a:p>
-                  </a:txBody>
-                  <a:tcPr/>
-                </a:tc>
-                <a:tc>
-                  <a:txBody>
-                    <a:bodyPr/>
-                    <a:lstStyle/>
-                    <a:p>
-                      <a:pPr lvl="0" indent="0" marL="0">
-                        <a:buNone/>
-                      </a:pPr>
-                      <a:r>
-                        <a:rPr/>
-                        <a:t>Work item</a:t>
-                      </a:r>
-                    </a:p>
-                  </a:txBody>
-                  <a:tcPr/>
-                </a:tc>
-                <a:tc>
-                  <a:txBody>
-                    <a:bodyPr/>
-                    <a:lstStyle/>
-                    <a:p>
-                      <a:pPr lvl="0" indent="0" marL="0">
-                        <a:buNone/>
-                      </a:pPr>
-                      <a:r>
-                        <a:rPr/>
-                        <a:t>Why it matters</a:t>
-                      </a:r>
-                    </a:p>
-                  </a:txBody>
-                  <a:tcPr/>
-                </a:tc>
-              </a:tr>
-              <a:tr h="0">
-                <a:tc>
-                  <a:txBody>
-                    <a:bodyPr/>
-                    <a:lstStyle/>
-                    <a:p>
-                      <a:pPr lvl="0" indent="0" marL="0">
-                        <a:buNone/>
-                      </a:pPr>
-                      <a:r>
-                        <a:rPr/>
-                        <a:t>1</a:t>
-                      </a:r>
-                    </a:p>
-                  </a:txBody>
-                </a:tc>
-                <a:tc>
-                  <a:txBody>
-                    <a:bodyPr/>
-                    <a:lstStyle/>
-                    <a:p>
-                      <a:pPr lvl="0" indent="0" marL="0">
-                        <a:buNone/>
-                      </a:pPr>
-                      <a:r>
-                        <a:rPr/>
-                        <a:t>Extract Zhang 2017 distribution, O/A, temperature, and capacity data</a:t>
-                      </a:r>
-                    </a:p>
-                  </a:txBody>
-                </a:tc>
-                <a:tc>
-                  <a:txBody>
-                    <a:bodyPr/>
-                    <a:lstStyle/>
-                    <a:p>
-                      <a:pPr lvl="0" indent="0" marL="0">
-                        <a:buNone/>
-                      </a:pPr>
-                      <a:r>
-                        <a:rPr/>
-                        <a:t>Improves identifiability of the Li/Na transfer law</a:t>
-                      </a:r>
-                    </a:p>
-                  </a:txBody>
-                </a:tc>
-              </a:tr>
-              <a:tr h="0">
-                <a:tc>
-                  <a:txBody>
-                    <a:bodyPr/>
-                    <a:lstStyle/>
-                    <a:p>
-                      <a:pPr lvl="0" indent="0" marL="0">
-                        <a:buNone/>
-                      </a:pPr>
-                      <a:r>
-                        <a:rPr/>
-                        <a:t>2</a:t>
-                      </a:r>
-                    </a:p>
-                  </a:txBody>
-                </a:tc>
-                <a:tc>
-                  <a:txBody>
-                    <a:bodyPr/>
-                    <a:lstStyle/>
-                    <a:p>
-                      <a:pPr lvl="0" indent="0" marL="0">
-                        <a:buNone/>
-                      </a:pPr>
-                      <a:r>
-                        <a:rPr/>
-                        <a:t>Add explicit HBTA, TOPO, diluent, and Li-complex parameter regression</a:t>
-                      </a:r>
-                    </a:p>
-                  </a:txBody>
-                </a:tc>
-                <a:tc>
-                  <a:txBody>
-                    <a:bodyPr/>
-                    <a:lstStyle/>
-                    <a:p>
-                      <a:pPr lvl="0" indent="0" marL="0">
-                        <a:buNone/>
-                      </a:pPr>
-                      <a:r>
-                        <a:rPr/>
-                        <a:t>Moves from source-regressed transfer to reactive ePC-SAFT closure</a:t>
-                      </a:r>
-                    </a:p>
-                  </a:txBody>
-                </a:tc>
-              </a:tr>
-              <a:tr h="0">
-                <a:tc>
-                  <a:txBody>
-                    <a:bodyPr/>
-                    <a:lstStyle/>
-                    <a:p>
-                      <a:pPr lvl="0" indent="0" marL="0">
-                        <a:buNone/>
-                      </a:pPr>
-                      <a:r>
-                        <a:rPr/>
-                        <a:t>3</a:t>
-                      </a:r>
-                    </a:p>
-                  </a:txBody>
-                </a:tc>
-                <a:tc>
-                  <a:txBody>
-                    <a:bodyPr/>
-                    <a:lstStyle/>
-                    <a:p>
-                      <a:pPr lvl="0" indent="0" marL="0">
-                        <a:buNone/>
-                      </a:pPr>
-                      <a:r>
-                        <a:rPr/>
-                        <a:t>Build a PrOMMiS MSContactor validation case</a:t>
-                      </a:r>
-                    </a:p>
-                  </a:txBody>
-                </a:tc>
-                <a:tc>
-                  <a:txBody>
-                    <a:bodyPr/>
-                    <a:lstStyle/>
-                    <a:p>
-                      <a:pPr lvl="0" indent="0" marL="0">
-                        <a:buNone/>
-                      </a:pPr>
-                      <a:r>
-                        <a:rPr/>
-                        <a:t>Tests convergence and material-balance consistency under staged operation</a:t>
-                      </a:r>
-                    </a:p>
-                  </a:txBody>
-                </a:tc>
-              </a:tr>
-              <a:tr h="0">
-                <a:tc>
-                  <a:txBody>
-                    <a:bodyPr/>
-                    <a:lstStyle/>
-                    <a:p>
-                      <a:pPr lvl="0" indent="0" marL="0">
-                        <a:buNone/>
-                      </a:pPr>
-                      <a:r>
-                        <a:rPr/>
-                        <a:t>4</a:t>
-                      </a:r>
-                    </a:p>
-                  </a:txBody>
-                </a:tc>
-                <a:tc>
-                  <a:txBody>
-                    <a:bodyPr/>
-                    <a:lstStyle/>
-                    <a:p>
-                      <a:pPr lvl="0" indent="0" marL="0">
-                        <a:buNone/>
-                      </a:pPr>
-                      <a:r>
-                        <a:rPr/>
-                        <a:t>Replace Class-5 costing assumptions with engineering ranges</a:t>
-                      </a:r>
-                    </a:p>
-                  </a:txBody>
-                </a:tc>
-                <a:tc>
-                  <a:txBody>
-                    <a:bodyPr/>
-                    <a:lstStyle/>
-                    <a:p>
-                      <a:pPr lvl="0" indent="0" marL="0">
-                        <a:buNone/>
-                      </a:pPr>
-                      <a:r>
-                        <a:rPr/>
-                        <a:t>Improves economic credibility before TEA-style interpretation</a:t>
-                      </a:r>
-                    </a:p>
-                  </a:txBody>
-                </a:tc>
-              </a:tr>
-            </a:tbl>
-          </a:graphicData>
-        </a:graphic>
-      </p:graphicFrame>
+              <a:t>4.5 MSContactor/Costing Readiness Check</a:t>
+            </a:r>
+          </a:p>
+        </p:txBody>
+      </p:sp>
+      <p:pic>
+        <p:nvPicPr>
+          <p:cNvPr descr="../analyses/rezaee_2026_pcsaft_epcsaft/results/uq_surrogate/figures/calibrated_costing_scenarios.png" id="0" name="Picture 1"/>
+          <p:cNvPicPr>
+            <a:picLocks noGrp="1" noChangeAspect="1"/>
+          </p:cNvPicPr>
+          <p:nvPr/>
+        </p:nvPicPr>
+        <p:blipFill>
+          <a:blip r:embed="rId3"/>
+          <a:stretch>
+            <a:fillRect/>
+          </a:stretch>
+        </p:blipFill>
+        <p:spPr bwMode="auto">
+          <a:xfrm>
+            <a:off x="1701800" y="1193800"/>
+            <a:ext cx="5740400" cy="3390900"/>
+          </a:xfrm>
+          <a:prstGeom prst="rect">
+            <a:avLst/>
+          </a:prstGeom>
+          <a:noFill/>
+          <a:ln w="9525">
+            <a:noFill/>
+            <a:headEnd/>
+            <a:tailEnd/>
+          </a:ln>
+        </p:spPr>
+      </p:pic>
     </p:spTree>
   </p:cSld>
 </p:sld>
@@ -10731,12 +10710,7 @@
             <p:ph type="title"/>
           </p:nvPr>
         </p:nvSpPr>
-        <p:spPr>
-          <a:xfrm>
-            <a:off x="722313" y="3305176"/>
-            <a:ext cx="7772400" cy="1021556"/>
-          </a:xfrm>
-        </p:spPr>
+        <p:spPr/>
         <p:txBody>
           <a:bodyPr/>
           <a:lstStyle/>
@@ -10746,7 +10720,113 @@
             </a:pPr>
             <a:r>
               <a:rPr/>
-              <a:t>5. Backup: Sensitivity Expansion</a:t>
+              <a:t>4.6 Implementation Requirements</a:t>
+            </a:r>
+          </a:p>
+        </p:txBody>
+      </p:sp>
+      <p:sp>
+        <p:nvSpPr>
+          <p:cNvPr id="3" name="Content Placeholder 2"/>
+          <p:cNvSpPr>
+            <a:spLocks noGrp="1"/>
+          </p:cNvSpPr>
+          <p:nvPr>
+            <p:ph idx="1" sz="half"/>
+          </p:nvPr>
+        </p:nvSpPr>
+        <p:spPr/>
+        <p:txBody>
+          <a:bodyPr/>
+          <a:lstStyle/>
+          <a:p>
+            <a:pPr lvl="0" indent="0" marL="0">
+              <a:buNone/>
+            </a:pPr>
+            <a:r>
+              <a:rPr b="1"/>
+              <a:t>Add ePC-SAFT as the thermodynamic backbone</a:t>
+            </a:r>
+          </a:p>
+          <a:p>
+            <a:pPr lvl="0"/>
+            <a:r>
+              <a:rPr/>
+              <a:t>property/equilibrium service for electrolyte LLE</a:t>
+            </a:r>
+          </a:p>
+          <a:p>
+            <a:pPr lvl="0"/>
+            <a:r>
+              <a:rPr/>
+              <a:t>documented species and feed basis</a:t>
+            </a:r>
+          </a:p>
+          <a:p>
+            <a:pPr lvl="0"/>
+            <a:r>
+              <a:rPr/>
+              <a:t>diagnostics carried with every result</a:t>
+            </a:r>
+          </a:p>
+          <a:p>
+            <a:pPr lvl="0"/>
+            <a:r>
+              <a:rPr/>
+              <a:t>reproducible dataset generation</a:t>
+            </a:r>
+          </a:p>
+        </p:txBody>
+      </p:sp>
+      <p:sp>
+        <p:nvSpPr>
+          <p:cNvPr id="4" name="Content Placeholder 3"/>
+          <p:cNvSpPr>
+            <a:spLocks noGrp="1"/>
+          </p:cNvSpPr>
+          <p:nvPr>
+            <p:ph idx="2" sz="half"/>
+          </p:nvPr>
+        </p:nvSpPr>
+        <p:spPr/>
+        <p:txBody>
+          <a:bodyPr/>
+          <a:lstStyle/>
+          <a:p>
+            <a:pPr lvl="0" indent="0" marL="0">
+              <a:buNone/>
+            </a:pPr>
+            <a:r>
+              <a:rPr b="1"/>
+              <a:t>Use PrOMMiS/IDAES for the process system</a:t>
+            </a:r>
+          </a:p>
+          <a:p>
+            <a:pPr lvl="0"/>
+            <a:r>
+              <a:rPr/>
+              <a:t>solvent-extraction stage balances</a:t>
+            </a:r>
+          </a:p>
+          <a:p>
+            <a:pPr lvl="0"/>
+            <a:r>
+              <a:rPr/>
+              <a:t>multi-stage contactors</a:t>
+            </a:r>
+          </a:p>
+          <a:p>
+            <a:pPr lvl="0"/>
+            <a:r>
+              <a:rPr/>
+              <a:t>surrogate and external-function interfaces</a:t>
+            </a:r>
+          </a:p>
+          <a:p>
+            <a:pPr lvl="0"/>
+            <a:r>
+              <a:rPr/>
+              <a:t>flowsheet optimization and costing hooks</a:t>
             </a:r>
           </a:p>
         </p:txBody>
@@ -10775,97 +10855,34 @@
       </p:grpSpPr>
       <p:sp>
         <p:nvSpPr>
-          <p:cNvPr id="2" name="Title 1"/>
-          <p:cNvSpPr>
-            <a:spLocks noGrp="1"/>
-          </p:cNvSpPr>
-          <p:nvPr>
-            <p:ph type="title"/>
-          </p:nvPr>
-        </p:nvSpPr>
-        <p:spPr/>
-        <p:txBody>
-          <a:bodyPr/>
-          <a:lstStyle/>
-          <a:p>
-            <a:pPr lvl="0" indent="0" marL="0">
+          <p:cNvPr id="3" name="Content Placeholder 2"/>
+          <p:cNvSpPr>
+            <a:spLocks noGrp="1"/>
+          </p:cNvSpPr>
+          <p:nvPr>
+            <p:ph idx="1"/>
+          </p:nvPr>
+        </p:nvSpPr>
+        <p:spPr/>
+        <p:txBody>
+          <a:bodyPr/>
+          <a:lstStyle/>
+          <a:p>
+            <a:pPr lvl="0" indent="0" marL="1270000">
               <a:buNone/>
             </a:pPr>
             <a:r>
-              <a:rPr/>
-              <a:t>5.1 Next-Step Sensitivity Expansion</a:t>
-            </a:r>
-          </a:p>
-        </p:txBody>
-      </p:sp>
-      <p:sp>
-        <p:nvSpPr>
-          <p:cNvPr id="3" name="Content Placeholder 2"/>
-          <p:cNvSpPr>
-            <a:spLocks noGrp="1"/>
-          </p:cNvSpPr>
-          <p:nvPr>
-            <p:ph idx="1"/>
-          </p:nvPr>
-        </p:nvSpPr>
-        <p:spPr/>
-        <p:txBody>
-          <a:bodyPr/>
-          <a:lstStyle/>
-          <a:p>
-            <a:pPr lvl="0"/>
-            <a:r>
-              <a:rPr/>
-              <a:t>Re-run the selective case across basin-style feed envelopes:</a:t>
-            </a:r>
-          </a:p>
-          <a:p>
-            <a:pPr lvl="1"/>
-            <a:r>
-              <a:rPr/>
-              <a:t>Appalachian high-Li case</a:t>
-            </a:r>
-          </a:p>
-          <a:p>
-            <a:pPr lvl="1"/>
-            <a:r>
-              <a:rPr/>
-              <a:t>Permian volume-driven low-grade case</a:t>
-            </a:r>
-          </a:p>
-          <a:p>
-            <a:pPr lvl="1"/>
-            <a:r>
-              <a:rPr/>
-              <a:t>Williston high-TDS case</a:t>
-            </a:r>
-          </a:p>
-          <a:p>
-            <a:pPr lvl="1"/>
-            <a:r>
-              <a:rPr/>
-              <a:t>Smackover premium-brine case</a:t>
-            </a:r>
-          </a:p>
-          <a:p>
-            <a:pPr lvl="0"/>
-            <a:r>
-              <a:rPr/>
-              <a:t>Keep the next design-of-experiments table in Markdown so trust-region bounds and surrogate regions are explicit.</a:t>
-            </a:r>
-          </a:p>
-          <a:p>
-            <a:pPr lvl="0"/>
-            <a:r>
-              <a:rPr/>
-              <a:t>Add a PrOMMiS/IDAES interface table for every generated variable: units, species basis, source basis, and validity limits.</a:t>
-            </a:r>
-          </a:p>
-          <a:p>
-            <a:pPr lvl="0"/>
-            <a:r>
-              <a:rPr/>
-              <a:t>Keep the narrative in one place: screening, thermodynamics, selective result, and process-design interface.</a:t>
+              <a:rPr sz="2000" b="1"/>
+              <a:t>None</a:t>
+            </a:r>
+          </a:p>
+          <a:p>
+            <a:pPr lvl="0" indent="0" marL="1270000">
+              <a:buNone/>
+            </a:pPr>
+            <a:r>
+              <a:rPr sz="2000"/>
+              <a:t>The sell is simple: ePC-SAFT supplies the equilibrium evidence; PrOMMiS/IDAES turns that evidence into a process model.</a:t>
             </a:r>
           </a:p>
         </p:txBody>
@@ -11329,6 +11346,545 @@
           </a:graphicData>
         </a:graphic>
       </p:graphicFrame>
+    </p:spTree>
+  </p:cSld>
+</p:sld>
+</file>
+
+<file path=ppt/slides/slide40.xml><?xml version="1.0" encoding="utf-8"?>
+<p:sld xmlns:a="http://schemas.openxmlformats.org/drawingml/2006/main" xmlns:r="http://schemas.openxmlformats.org/officeDocument/2006/relationships" xmlns:p="http://schemas.openxmlformats.org/presentationml/2006/main">
+  <p:cSld>
+    <p:spTree>
+      <p:nvGrpSpPr>
+        <p:cNvPr id="1" name=""/>
+        <p:cNvGrpSpPr/>
+        <p:nvPr/>
+      </p:nvGrpSpPr>
+      <p:grpSpPr>
+        <a:xfrm>
+          <a:off x="0" y="0"/>
+          <a:ext cx="0" cy="0"/>
+          <a:chOff x="0" y="0"/>
+          <a:chExt cx="0" cy="0"/>
+        </a:xfrm>
+      </p:grpSpPr>
+      <p:sp>
+        <p:nvSpPr>
+          <p:cNvPr id="2" name="Title 1"/>
+          <p:cNvSpPr>
+            <a:spLocks noGrp="1"/>
+          </p:cNvSpPr>
+          <p:nvPr>
+            <p:ph type="title"/>
+          </p:nvPr>
+        </p:nvSpPr>
+        <p:spPr/>
+        <p:txBody>
+          <a:bodyPr/>
+          <a:lstStyle/>
+          <a:p>
+            <a:pPr lvl="0" indent="0" marL="0">
+              <a:buNone/>
+            </a:pPr>
+            <a:r>
+              <a:rPr/>
+              <a:t>4.7 Remaining Engineering Work</a:t>
+            </a:r>
+          </a:p>
+        </p:txBody>
+      </p:sp>
+      <p:graphicFrame>
+        <p:nvGraphicFramePr>
+          <p:cNvPr id="6" name="Content Placeholder 5"/>
+          <p:cNvGraphicFramePr>
+            <a:graphicFrameLocks noGrp="1"/>
+          </p:cNvGraphicFramePr>
+          <p:nvPr>
+            <p:ph idx="1"/>
+          </p:nvPr>
+        </p:nvGraphicFramePr>
+        <p:xfrm>
+          <a:off x="457200" y="1193800"/>
+          <a:ext cx="8229600" cy="3390900"/>
+        </p:xfrm>
+        <a:graphic>
+          <a:graphicData uri="http://schemas.openxmlformats.org/drawingml/2006/table">
+            <a:tbl>
+              <a:tblPr firstRow="1" bandRow="1">
+                <a:tableStyleId>{5C22544A-7EE6-4342-B048-85BDC9FD1C3A}</a:tableStyleId>
+              </a:tblPr>
+              <a:tblGrid>
+                <a:gridCol w="2743200"/>
+                <a:gridCol w="2743200"/>
+                <a:gridCol w="2743200"/>
+              </a:tblGrid>
+              <a:tr h="0">
+                <a:tc>
+                  <a:txBody>
+                    <a:bodyPr/>
+                    <a:lstStyle/>
+                    <a:p>
+                      <a:pPr lvl="0" indent="0" marL="0">
+                        <a:buNone/>
+                      </a:pPr>
+                      <a:r>
+                        <a:rPr/>
+                        <a:t>Priority</a:t>
+                      </a:r>
+                    </a:p>
+                  </a:txBody>
+                  <a:tcPr/>
+                </a:tc>
+                <a:tc>
+                  <a:txBody>
+                    <a:bodyPr/>
+                    <a:lstStyle/>
+                    <a:p>
+                      <a:pPr lvl="0" indent="0" marL="0">
+                        <a:buNone/>
+                      </a:pPr>
+                      <a:r>
+                        <a:rPr/>
+                        <a:t>Work item</a:t>
+                      </a:r>
+                    </a:p>
+                  </a:txBody>
+                  <a:tcPr/>
+                </a:tc>
+                <a:tc>
+                  <a:txBody>
+                    <a:bodyPr/>
+                    <a:lstStyle/>
+                    <a:p>
+                      <a:pPr lvl="0" indent="0" marL="0">
+                        <a:buNone/>
+                      </a:pPr>
+                      <a:r>
+                        <a:rPr/>
+                        <a:t>Why it matters</a:t>
+                      </a:r>
+                    </a:p>
+                  </a:txBody>
+                  <a:tcPr/>
+                </a:tc>
+              </a:tr>
+              <a:tr h="0">
+                <a:tc>
+                  <a:txBody>
+                    <a:bodyPr/>
+                    <a:lstStyle/>
+                    <a:p>
+                      <a:pPr lvl="0" indent="0" marL="0">
+                        <a:buNone/>
+                      </a:pPr>
+                      <a:r>
+                        <a:rPr/>
+                        <a:t>1</a:t>
+                      </a:r>
+                    </a:p>
+                  </a:txBody>
+                </a:tc>
+                <a:tc>
+                  <a:txBody>
+                    <a:bodyPr/>
+                    <a:lstStyle/>
+                    <a:p>
+                      <a:pPr lvl="0" indent="0" marL="0">
+                        <a:buNone/>
+                      </a:pPr>
+                      <a:r>
+                        <a:rPr/>
+                        <a:t>Resolve the Rezaee activity-reference gap</a:t>
+                      </a:r>
+                    </a:p>
+                  </a:txBody>
+                </a:tc>
+                <a:tc>
+                  <a:txBody>
+                    <a:bodyPr/>
+                    <a:lstStyle/>
+                    <a:p>
+                      <a:pPr lvl="0" indent="0" marL="0">
+                        <a:buNone/>
+                      </a:pPr>
+                      <a:r>
+                        <a:rPr/>
+                        <a:t>Determines whether direct published-constant reactive equilibrium can replace the bridge</a:t>
+                      </a:r>
+                    </a:p>
+                  </a:txBody>
+                </a:tc>
+              </a:tr>
+              <a:tr h="0">
+                <a:tc>
+                  <a:txBody>
+                    <a:bodyPr/>
+                    <a:lstStyle/>
+                    <a:p>
+                      <a:pPr lvl="0" indent="0" marL="0">
+                        <a:buNone/>
+                      </a:pPr>
+                      <a:r>
+                        <a:rPr/>
+                        <a:t>2</a:t>
+                      </a:r>
+                    </a:p>
+                  </a:txBody>
+                </a:tc>
+                <a:tc>
+                  <a:txBody>
+                    <a:bodyPr/>
+                    <a:lstStyle/>
+                    <a:p>
+                      <a:pPr lvl="0" indent="0" marL="0">
+                        <a:buNone/>
+                      </a:pPr>
+                      <a:r>
+                        <a:rPr/>
+                        <a:t>Validate high-Na/Li extraction data</a:t>
+                      </a:r>
+                    </a:p>
+                  </a:txBody>
+                </a:tc>
+                <a:tc>
+                  <a:txBody>
+                    <a:bodyPr/>
+                    <a:lstStyle/>
+                    <a:p>
+                      <a:pPr lvl="0" indent="0" marL="0">
+                        <a:buNone/>
+                      </a:pPr>
+                      <a:r>
+                        <a:rPr/>
+                        <a:t>Tests the main extrapolation warning beyond the Rezaee DOE range</a:t>
+                      </a:r>
+                    </a:p>
+                  </a:txBody>
+                </a:tc>
+              </a:tr>
+              <a:tr h="0">
+                <a:tc>
+                  <a:txBody>
+                    <a:bodyPr/>
+                    <a:lstStyle/>
+                    <a:p>
+                      <a:pPr lvl="0" indent="0" marL="0">
+                        <a:buNone/>
+                      </a:pPr>
+                      <a:r>
+                        <a:rPr/>
+                        <a:t>3</a:t>
+                      </a:r>
+                    </a:p>
+                  </a:txBody>
+                </a:tc>
+                <a:tc>
+                  <a:txBody>
+                    <a:bodyPr/>
+                    <a:lstStyle/>
+                    <a:p>
+                      <a:pPr lvl="0" indent="0" marL="0">
+                        <a:buNone/>
+                      </a:pPr>
+                      <a:r>
+                        <a:rPr/>
+                        <a:t>Upgrade the Rezaee-named PrOMMiS MSContactor case from algebraic transfer to unit-model validation</a:t>
+                      </a:r>
+                    </a:p>
+                  </a:txBody>
+                </a:tc>
+                <a:tc>
+                  <a:txBody>
+                    <a:bodyPr/>
+                    <a:lstStyle/>
+                    <a:p>
+                      <a:pPr lvl="0" indent="0" marL="0">
+                        <a:buNone/>
+                      </a:pPr>
+                      <a:r>
+                        <a:rPr/>
+                        <a:t>Tests convergence and material-balance consistency under staged operation</a:t>
+                      </a:r>
+                    </a:p>
+                  </a:txBody>
+                </a:tc>
+              </a:tr>
+              <a:tr h="0">
+                <a:tc>
+                  <a:txBody>
+                    <a:bodyPr/>
+                    <a:lstStyle/>
+                    <a:p>
+                      <a:pPr lvl="0" indent="0" marL="0">
+                        <a:buNone/>
+                      </a:pPr>
+                      <a:r>
+                        <a:rPr/>
+                        <a:t>4</a:t>
+                      </a:r>
+                    </a:p>
+                  </a:txBody>
+                </a:tc>
+                <a:tc>
+                  <a:txBody>
+                    <a:bodyPr/>
+                    <a:lstStyle/>
+                    <a:p>
+                      <a:pPr lvl="0" indent="0" marL="0">
+                        <a:buNone/>
+                      </a:pPr>
+                      <a:r>
+                        <a:rPr/>
+                        <a:t>Replace Class-5 costing assumptions with engineering ranges</a:t>
+                      </a:r>
+                    </a:p>
+                  </a:txBody>
+                </a:tc>
+                <a:tc>
+                  <a:txBody>
+                    <a:bodyPr/>
+                    <a:lstStyle/>
+                    <a:p>
+                      <a:pPr lvl="0" indent="0" marL="0">
+                        <a:buNone/>
+                      </a:pPr>
+                      <a:r>
+                        <a:rPr/>
+                        <a:t>Improves economic credibility before TEA-style interpretation</a:t>
+                      </a:r>
+                    </a:p>
+                  </a:txBody>
+                </a:tc>
+              </a:tr>
+              <a:tr h="0">
+                <a:tc>
+                  <a:txBody>
+                    <a:bodyPr/>
+                    <a:lstStyle/>
+                    <a:p>
+                      <a:pPr lvl="0" indent="0" marL="0">
+                        <a:buNone/>
+                      </a:pPr>
+                      <a:r>
+                        <a:rPr/>
+                        <a:t>5</a:t>
+                      </a:r>
+                    </a:p>
+                  </a:txBody>
+                </a:tc>
+                <a:tc>
+                  <a:txBody>
+                    <a:bodyPr/>
+                    <a:lstStyle/>
+                    <a:p>
+                      <a:pPr lvl="0" indent="0" marL="0">
+                        <a:buNone/>
+                      </a:pPr>
+                      <a:r>
+                        <a:rPr/>
+                        <a:t>Keep legacy solvent artifacts in the archive</a:t>
+                      </a:r>
+                    </a:p>
+                  </a:txBody>
+                </a:tc>
+                <a:tc>
+                  <a:txBody>
+                    <a:bodyPr/>
+                    <a:lstStyle/>
+                    <a:p>
+                      <a:pPr lvl="0" indent="0" marL="0">
+                        <a:buNone/>
+                      </a:pPr>
+                      <a:r>
+                        <a:rPr/>
+                        <a:t>Preserves traceability without confusing the active Rezaee chain</a:t>
+                      </a:r>
+                    </a:p>
+                  </a:txBody>
+                </a:tc>
+              </a:tr>
+            </a:tbl>
+          </a:graphicData>
+        </a:graphic>
+      </p:graphicFrame>
+    </p:spTree>
+  </p:cSld>
+</p:sld>
+</file>
+
+<file path=ppt/slides/slide41.xml><?xml version="1.0" encoding="utf-8"?>
+<p:sld xmlns:a="http://schemas.openxmlformats.org/drawingml/2006/main" xmlns:r="http://schemas.openxmlformats.org/officeDocument/2006/relationships" xmlns:p="http://schemas.openxmlformats.org/presentationml/2006/main">
+  <p:cSld>
+    <p:spTree>
+      <p:nvGrpSpPr>
+        <p:cNvPr id="1" name=""/>
+        <p:cNvGrpSpPr/>
+        <p:nvPr/>
+      </p:nvGrpSpPr>
+      <p:grpSpPr>
+        <a:xfrm>
+          <a:off x="0" y="0"/>
+          <a:ext cx="0" cy="0"/>
+          <a:chOff x="0" y="0"/>
+          <a:chExt cx="0" cy="0"/>
+        </a:xfrm>
+      </p:grpSpPr>
+      <p:sp>
+        <p:nvSpPr>
+          <p:cNvPr id="2" name="Title 1"/>
+          <p:cNvSpPr>
+            <a:spLocks noGrp="1"/>
+          </p:cNvSpPr>
+          <p:nvPr>
+            <p:ph type="title"/>
+          </p:nvPr>
+        </p:nvSpPr>
+        <p:spPr>
+          <a:xfrm>
+            <a:off x="722313" y="3305176"/>
+            <a:ext cx="7772400" cy="1021556"/>
+          </a:xfrm>
+        </p:spPr>
+        <p:txBody>
+          <a:bodyPr/>
+          <a:lstStyle/>
+          <a:p>
+            <a:pPr lvl="0" indent="0" marL="0">
+              <a:buNone/>
+            </a:pPr>
+            <a:r>
+              <a:rPr/>
+              <a:t>5. Backup: Sensitivity Expansion</a:t>
+            </a:r>
+          </a:p>
+        </p:txBody>
+      </p:sp>
+    </p:spTree>
+  </p:cSld>
+</p:sld>
+</file>
+
+<file path=ppt/slides/slide42.xml><?xml version="1.0" encoding="utf-8"?>
+<p:sld xmlns:a="http://schemas.openxmlformats.org/drawingml/2006/main" xmlns:r="http://schemas.openxmlformats.org/officeDocument/2006/relationships" xmlns:p="http://schemas.openxmlformats.org/presentationml/2006/main">
+  <p:cSld>
+    <p:spTree>
+      <p:nvGrpSpPr>
+        <p:cNvPr id="1" name=""/>
+        <p:cNvGrpSpPr/>
+        <p:nvPr/>
+      </p:nvGrpSpPr>
+      <p:grpSpPr>
+        <a:xfrm>
+          <a:off x="0" y="0"/>
+          <a:ext cx="0" cy="0"/>
+          <a:chOff x="0" y="0"/>
+          <a:chExt cx="0" cy="0"/>
+        </a:xfrm>
+      </p:grpSpPr>
+      <p:sp>
+        <p:nvSpPr>
+          <p:cNvPr id="2" name="Title 1"/>
+          <p:cNvSpPr>
+            <a:spLocks noGrp="1"/>
+          </p:cNvSpPr>
+          <p:nvPr>
+            <p:ph type="title"/>
+          </p:nvPr>
+        </p:nvSpPr>
+        <p:spPr/>
+        <p:txBody>
+          <a:bodyPr/>
+          <a:lstStyle/>
+          <a:p>
+            <a:pPr lvl="0" indent="0" marL="0">
+              <a:buNone/>
+            </a:pPr>
+            <a:r>
+              <a:rPr/>
+              <a:t>5.1 Next-Step Sensitivity Expansion</a:t>
+            </a:r>
+          </a:p>
+        </p:txBody>
+      </p:sp>
+      <p:sp>
+        <p:nvSpPr>
+          <p:cNvPr id="3" name="Content Placeholder 2"/>
+          <p:cNvSpPr>
+            <a:spLocks noGrp="1"/>
+          </p:cNvSpPr>
+          <p:nvPr>
+            <p:ph idx="1"/>
+          </p:nvPr>
+        </p:nvSpPr>
+        <p:spPr/>
+        <p:txBody>
+          <a:bodyPr/>
+          <a:lstStyle/>
+          <a:p>
+            <a:pPr lvl="0"/>
+            <a:r>
+              <a:rPr/>
+              <a:t>Re-run the Rezaee bridge across basin-style feed envelopes:</a:t>
+            </a:r>
+          </a:p>
+          <a:p>
+            <a:pPr lvl="1"/>
+            <a:r>
+              <a:rPr/>
+              <a:t>Appalachian high-Li case</a:t>
+            </a:r>
+          </a:p>
+          <a:p>
+            <a:pPr lvl="1"/>
+            <a:r>
+              <a:rPr/>
+              <a:t>Permian volume-driven low-grade case</a:t>
+            </a:r>
+          </a:p>
+          <a:p>
+            <a:pPr lvl="1"/>
+            <a:r>
+              <a:rPr/>
+              <a:t>Williston high-TDS case</a:t>
+            </a:r>
+          </a:p>
+          <a:p>
+            <a:pPr lvl="1"/>
+            <a:r>
+              <a:rPr/>
+              <a:t>Smackover premium-brine case</a:t>
+            </a:r>
+          </a:p>
+          <a:p>
+            <a:pPr lvl="0"/>
+            <a:r>
+              <a:rPr/>
+              <a:t>Keep the next design-of-experiments table in Markdown so trust-region bounds and surrogate regions are explicit.</a:t>
+            </a:r>
+          </a:p>
+          <a:p>
+            <a:pPr lvl="0"/>
+            <a:r>
+              <a:rPr/>
+              <a:t>Start from the scaffold response table and replace the response columns with calibrated model outputs.</a:t>
+            </a:r>
+          </a:p>
+          <a:p>
+            <a:pPr lvl="0"/>
+            <a:r>
+              <a:rPr/>
+              <a:t>Add a PrOMMiS/IDAES interface table for every generated variable: units, species basis, source basis, and validity limits.</a:t>
+            </a:r>
+          </a:p>
+          <a:p>
+            <a:pPr lvl="0"/>
+            <a:r>
+              <a:rPr/>
+              <a:t>Keep the narrative in one place: screening, thermodynamics, selective result, and process-design interface.</a:t>
+            </a:r>
+          </a:p>
+        </p:txBody>
+      </p:sp>
     </p:spTree>
   </p:cSld>
 </p:sld>
